--- a/output/wordlabs-cloud-3day.pptx
+++ b/output/wordlabs-cloud-3day.pptx
@@ -4279,7 +4279,7 @@
                 <a:ea typeface="Calibri" pitchFamily="34" charset="-122"/>
                 <a:cs typeface="Calibri" pitchFamily="34" charset="-120"/>
               </a:rPr>
-              <a:t>Origin: Old English: clud</a:t>
+              <a:t>Origin: Latin: cloudus</a:t>
             </a:r>
             <a:endParaRPr lang="en-US" sz="1300" dirty="0"/>
           </a:p>
@@ -5622,7 +5622,7 @@
                 <a:ea typeface="Trebuchet MS" pitchFamily="34" charset="-122"/>
                 <a:cs typeface="Trebuchet MS" pitchFamily="34" charset="-120"/>
               </a:rPr>
-              <a:t>1</a:t>
+              <a:t>0</a:t>
             </a:r>
             <a:pPr algn="ctr" indent="0" marL="0">
               <a:buNone/>
@@ -6071,7 +6071,7 @@
                 <a:ea typeface="Calibri" pitchFamily="34" charset="-122"/>
                 <a:cs typeface="Calibri" pitchFamily="34" charset="-120"/>
               </a:rPr>
-              <a:t> weather made our picnic feel gloomy, but the </a:t>
+              <a:t> sky turned dark as a </a:t>
             </a:r>
             <a:pPr algn="l" indent="0" marL="0">
               <a:buNone/>
@@ -6088,7 +6088,7 @@
                 <a:ea typeface="Calibri" pitchFamily="34" charset="-122"/>
                 <a:cs typeface="Calibri" pitchFamily="34" charset="-120"/>
               </a:rPr>
-              <a:t>cloudless</a:t>
+              <a:t>thundercloud</a:t>
             </a:r>
             <a:pPr algn="l" indent="0" marL="0">
               <a:buNone/>
@@ -6102,7 +6102,7 @@
                 <a:ea typeface="Calibri" pitchFamily="34" charset="-122"/>
                 <a:cs typeface="Calibri" pitchFamily="34" charset="-120"/>
               </a:rPr>
-              <a:t> afternoon was perfect!</a:t>
+              <a:t> moved slowly over our school.</a:t>
             </a:r>
             <a:endParaRPr lang="en-US" sz="1800" dirty="0"/>
           </a:p>
@@ -6385,7 +6385,7 @@
                 <a:ea typeface="Trebuchet MS" pitchFamily="34" charset="-122"/>
                 <a:cs typeface="Trebuchet MS" pitchFamily="34" charset="-120"/>
               </a:rPr>
-              <a:t>cloudless</a:t>
+              <a:t>thundercloud</a:t>
             </a:r>
             <a:endParaRPr lang="en-US" sz="1400" dirty="0"/>
           </a:p>
@@ -7972,7 +7972,7 @@
                 <a:ea typeface="Calibri" pitchFamily="34" charset="-122"/>
                 <a:cs typeface="Calibri" pitchFamily="34" charset="-120"/>
               </a:rPr>
-              <a:t>having the quality of</a:t>
+              <a:t>full of, having the quality of</a:t>
             </a:r>
             <a:endParaRPr lang="en-US" sz="850" dirty="0"/>
           </a:p>
@@ -8957,7 +8957,7 @@
                 <a:ea typeface="Calibri" pitchFamily="34" charset="-122"/>
                 <a:cs typeface="Calibri" pitchFamily="34" charset="-120"/>
               </a:rPr>
-              <a:t>having the quality of</a:t>
+              <a:t>full of, having the quality of</a:t>
             </a:r>
             <a:endParaRPr lang="en-US" sz="850" dirty="0"/>
           </a:p>
@@ -9116,7 +9116,7 @@
                 <a:ea typeface="Trebuchet MS" pitchFamily="34" charset="-122"/>
                 <a:cs typeface="Trebuchet MS" pitchFamily="34" charset="-120"/>
               </a:rPr>
-              <a:t>clou</a:t>
+              <a:t>cloud</a:t>
             </a:r>
             <a:endParaRPr lang="en-US" sz="1400" dirty="0"/>
           </a:p>
@@ -9221,7 +9221,7 @@
                 <a:ea typeface="Trebuchet MS" pitchFamily="34" charset="-122"/>
                 <a:cs typeface="Trebuchet MS" pitchFamily="34" charset="-120"/>
               </a:rPr>
-              <a:t>dy</a:t>
+              <a:t>y</a:t>
             </a:r>
             <a:endParaRPr lang="en-US" sz="1400" dirty="0"/>
           </a:p>
@@ -10074,7 +10074,7 @@
                 <a:ea typeface="Calibri" pitchFamily="34" charset="-122"/>
                 <a:cs typeface="Calibri" pitchFamily="34" charset="-120"/>
               </a:rPr>
-              <a:t>having the quality of</a:t>
+              <a:t>full of, having the quality of</a:t>
             </a:r>
             <a:endParaRPr lang="en-US" sz="850" dirty="0"/>
           </a:p>
@@ -10233,7 +10233,7 @@
                 <a:ea typeface="Trebuchet MS" pitchFamily="34" charset="-122"/>
                 <a:cs typeface="Trebuchet MS" pitchFamily="34" charset="-120"/>
               </a:rPr>
-              <a:t>clou</a:t>
+              <a:t>cloud</a:t>
             </a:r>
             <a:endParaRPr lang="en-US" sz="1400" dirty="0"/>
           </a:p>
@@ -10338,7 +10338,7 @@
                 <a:ea typeface="Trebuchet MS" pitchFamily="34" charset="-122"/>
                 <a:cs typeface="Trebuchet MS" pitchFamily="34" charset="-120"/>
               </a:rPr>
-              <a:t>dy</a:t>
+              <a:t>y</a:t>
             </a:r>
             <a:endParaRPr lang="en-US" sz="1400" dirty="0"/>
           </a:p>
@@ -11126,7 +11126,7 @@
                 <a:ea typeface="Trebuchet MS" pitchFamily="34" charset="-122"/>
                 <a:cs typeface="Trebuchet MS" pitchFamily="34" charset="-120"/>
               </a:rPr>
-              <a:t>cloudless</a:t>
+              <a:t>thundercloud</a:t>
             </a:r>
             <a:endParaRPr lang="en-US" sz="2800" dirty="0"/>
           </a:p>
@@ -11953,7 +11953,7 @@
                 <a:ea typeface="Trebuchet MS" pitchFamily="34" charset="-122"/>
                 <a:cs typeface="Trebuchet MS" pitchFamily="34" charset="-120"/>
               </a:rPr>
-              <a:t>cloudless</a:t>
+              <a:t>thundercloud</a:t>
             </a:r>
             <a:endParaRPr lang="en-US" sz="2800" dirty="0"/>
           </a:p>
@@ -12042,11 +12042,11 @@
             </a:avLst>
           </a:prstGeom>
           <a:solidFill>
-            <a:srgbClr val="CCFBF1"/>
+            <a:srgbClr val="DDD6FE"/>
           </a:solidFill>
           <a:ln w="19050">
             <a:solidFill>
-              <a:srgbClr val="0D9488"/>
+              <a:srgbClr val="7C3AED"/>
             </a:solidFill>
             <a:prstDash val="solid"/>
           </a:ln>
@@ -12086,13 +12086,13 @@
             <a:r>
               <a:rPr lang="en-US" sz="1300" b="1" dirty="0">
                 <a:solidFill>
-                  <a:srgbClr val="0F766E"/>
+                  <a:srgbClr val="4C1D95"/>
                 </a:solidFill>
                 <a:latin typeface="Trebuchet MS" pitchFamily="34" charset="0"/>
                 <a:ea typeface="Trebuchet MS" pitchFamily="34" charset="-122"/>
                 <a:cs typeface="Trebuchet MS" pitchFamily="34" charset="-120"/>
               </a:rPr>
-              <a:t>cloud</a:t>
+              <a:t>thunder</a:t>
             </a:r>
             <a:endParaRPr lang="en-US" sz="1300" dirty="0"/>
           </a:p>
@@ -12131,7 +12131,7 @@
                 <a:ea typeface="Calibri" pitchFamily="34" charset="-122"/>
                 <a:cs typeface="Calibri" pitchFamily="34" charset="-120"/>
               </a:rPr>
-              <a:t>mass of water vapour</a:t>
+              <a:t>loud rumbling sound in a storm</a:t>
             </a:r>
             <a:endParaRPr lang="en-US" sz="850" dirty="0"/>
           </a:p>
@@ -12154,11 +12154,11 @@
             </a:avLst>
           </a:prstGeom>
           <a:solidFill>
-            <a:srgbClr val="DDD6FE"/>
+            <a:srgbClr val="CCFBF1"/>
           </a:solidFill>
           <a:ln w="19050">
             <a:solidFill>
-              <a:srgbClr val="7C3AED"/>
+              <a:srgbClr val="0D9488"/>
             </a:solidFill>
             <a:prstDash val="solid"/>
           </a:ln>
@@ -12198,13 +12198,13 @@
             <a:r>
               <a:rPr lang="en-US" sz="1300" b="1" dirty="0">
                 <a:solidFill>
-                  <a:srgbClr val="4C1D95"/>
+                  <a:srgbClr val="0F766E"/>
                 </a:solidFill>
                 <a:latin typeface="Trebuchet MS" pitchFamily="34" charset="0"/>
                 <a:ea typeface="Trebuchet MS" pitchFamily="34" charset="-122"/>
                 <a:cs typeface="Trebuchet MS" pitchFamily="34" charset="-120"/>
               </a:rPr>
-              <a:t>less</a:t>
+              <a:t>cloud</a:t>
             </a:r>
             <a:endParaRPr lang="en-US" sz="1300" dirty="0"/>
           </a:p>
@@ -12243,7 +12243,7 @@
                 <a:ea typeface="Calibri" pitchFamily="34" charset="-122"/>
                 <a:cs typeface="Calibri" pitchFamily="34" charset="-120"/>
               </a:rPr>
-              <a:t>without</a:t>
+              <a:t>mass of water vapour</a:t>
             </a:r>
             <a:endParaRPr lang="en-US" sz="850" dirty="0"/>
           </a:p>
@@ -12938,7 +12938,7 @@
                 <a:ea typeface="Trebuchet MS" pitchFamily="34" charset="-122"/>
                 <a:cs typeface="Trebuchet MS" pitchFamily="34" charset="-120"/>
               </a:rPr>
-              <a:t>cloudless</a:t>
+              <a:t>thundercloud</a:t>
             </a:r>
             <a:endParaRPr lang="en-US" sz="2800" dirty="0"/>
           </a:p>
@@ -13027,11 +13027,11 @@
             </a:avLst>
           </a:prstGeom>
           <a:solidFill>
-            <a:srgbClr val="CCFBF1"/>
+            <a:srgbClr val="DDD6FE"/>
           </a:solidFill>
           <a:ln w="19050">
             <a:solidFill>
-              <a:srgbClr val="0D9488"/>
+              <a:srgbClr val="7C3AED"/>
             </a:solidFill>
             <a:prstDash val="solid"/>
           </a:ln>
@@ -13071,13 +13071,13 @@
             <a:r>
               <a:rPr lang="en-US" sz="1300" b="1" dirty="0">
                 <a:solidFill>
-                  <a:srgbClr val="0F766E"/>
+                  <a:srgbClr val="4C1D95"/>
                 </a:solidFill>
                 <a:latin typeface="Trebuchet MS" pitchFamily="34" charset="0"/>
                 <a:ea typeface="Trebuchet MS" pitchFamily="34" charset="-122"/>
                 <a:cs typeface="Trebuchet MS" pitchFamily="34" charset="-120"/>
               </a:rPr>
-              <a:t>cloud</a:t>
+              <a:t>thunder</a:t>
             </a:r>
             <a:endParaRPr lang="en-US" sz="1300" dirty="0"/>
           </a:p>
@@ -13116,7 +13116,7 @@
                 <a:ea typeface="Calibri" pitchFamily="34" charset="-122"/>
                 <a:cs typeface="Calibri" pitchFamily="34" charset="-120"/>
               </a:rPr>
-              <a:t>mass of water vapour</a:t>
+              <a:t>loud rumbling sound in a storm</a:t>
             </a:r>
             <a:endParaRPr lang="en-US" sz="850" dirty="0"/>
           </a:p>
@@ -13139,11 +13139,11 @@
             </a:avLst>
           </a:prstGeom>
           <a:solidFill>
-            <a:srgbClr val="DDD6FE"/>
+            <a:srgbClr val="CCFBF1"/>
           </a:solidFill>
           <a:ln w="19050">
             <a:solidFill>
-              <a:srgbClr val="7C3AED"/>
+              <a:srgbClr val="0D9488"/>
             </a:solidFill>
             <a:prstDash val="solid"/>
           </a:ln>
@@ -13183,13 +13183,13 @@
             <a:r>
               <a:rPr lang="en-US" sz="1300" b="1" dirty="0">
                 <a:solidFill>
-                  <a:srgbClr val="4C1D95"/>
+                  <a:srgbClr val="0F766E"/>
                 </a:solidFill>
                 <a:latin typeface="Trebuchet MS" pitchFamily="34" charset="0"/>
                 <a:ea typeface="Trebuchet MS" pitchFamily="34" charset="-122"/>
                 <a:cs typeface="Trebuchet MS" pitchFamily="34" charset="-120"/>
               </a:rPr>
-              <a:t>less</a:t>
+              <a:t>cloud</a:t>
             </a:r>
             <a:endParaRPr lang="en-US" sz="1300" dirty="0"/>
           </a:p>
@@ -13228,7 +13228,7 @@
                 <a:ea typeface="Calibri" pitchFamily="34" charset="-122"/>
                 <a:cs typeface="Calibri" pitchFamily="34" charset="-120"/>
               </a:rPr>
-              <a:t>without</a:t>
+              <a:t>mass of water vapour</a:t>
             </a:r>
             <a:endParaRPr lang="en-US" sz="850" dirty="0"/>
           </a:p>
@@ -13335,7 +13335,7 @@
         </p:nvSpPr>
         <p:spPr>
           <a:xfrm>
-            <a:off x="2999232" y="3364992"/>
+            <a:off x="2313432" y="3364992"/>
             <a:ext cx="1645920" cy="475488"/>
           </a:xfrm>
           <a:prstGeom prst="rect">
@@ -13362,7 +13362,7 @@
         </p:nvSpPr>
         <p:spPr>
           <a:xfrm>
-            <a:off x="2999232" y="3364992"/>
+            <a:off x="2313432" y="3364992"/>
             <a:ext cx="1645920" cy="475488"/>
           </a:xfrm>
           <a:prstGeom prst="rect">
@@ -13387,7 +13387,7 @@
                 <a:ea typeface="Trebuchet MS" pitchFamily="34" charset="-122"/>
                 <a:cs typeface="Trebuchet MS" pitchFamily="34" charset="-120"/>
               </a:rPr>
-              <a:t>cloud</a:t>
+              <a:t>thun</a:t>
             </a:r>
             <a:endParaRPr lang="en-US" sz="1400" dirty="0"/>
           </a:p>
@@ -13401,8 +13401,8 @@
         </p:nvSpPr>
         <p:spPr>
           <a:xfrm>
-            <a:off x="4645152" y="3364992"/>
-            <a:ext cx="1097280" cy="475488"/>
+            <a:off x="3959352" y="3364992"/>
+            <a:ext cx="411480" cy="475488"/>
           </a:xfrm>
           <a:prstGeom prst="rect">
             <a:avLst/>
@@ -13440,7 +13440,7 @@
         </p:nvSpPr>
         <p:spPr>
           <a:xfrm>
-            <a:off x="5742432" y="3364992"/>
+            <a:off x="4370832" y="3364992"/>
             <a:ext cx="1645920" cy="475488"/>
           </a:xfrm>
           <a:prstGeom prst="rect">
@@ -13467,7 +13467,7 @@
         </p:nvSpPr>
         <p:spPr>
           <a:xfrm>
-            <a:off x="5742432" y="3364992"/>
+            <a:off x="4370832" y="3364992"/>
             <a:ext cx="1645920" cy="475488"/>
           </a:xfrm>
           <a:prstGeom prst="rect">
@@ -13492,7 +13492,7 @@
                 <a:ea typeface="Trebuchet MS" pitchFamily="34" charset="-122"/>
                 <a:cs typeface="Trebuchet MS" pitchFamily="34" charset="-120"/>
               </a:rPr>
-              <a:t>less</a:t>
+              <a:t>der</a:t>
             </a:r>
             <a:endParaRPr lang="en-US" sz="1400" dirty="0"/>
           </a:p>
@@ -13500,7 +13500,112 @@
       </p:sp>
       <p:sp>
         <p:nvSpPr>
-          <p:cNvPr id="30" name="Shape 28"/>
+          <p:cNvPr id="30" name="Text 28"/>
+          <p:cNvSpPr/>
+          <p:nvPr/>
+        </p:nvSpPr>
+        <p:spPr>
+          <a:xfrm>
+            <a:off x="6016752" y="3364992"/>
+            <a:ext cx="411480" cy="475488"/>
+          </a:xfrm>
+          <a:prstGeom prst="rect">
+            <a:avLst/>
+          </a:prstGeom>
+          <a:noFill/>
+          <a:ln/>
+        </p:spPr>
+        <p:txBody>
+          <a:bodyPr wrap="square" lIns="0" tIns="0" rIns="0" bIns="0" rtlCol="0" anchor="ctr"/>
+          <a:lstStyle/>
+          <a:p>
+            <a:pPr algn="ctr" indent="0" marL="0">
+              <a:buNone/>
+            </a:pPr>
+            <a:r>
+              <a:rPr lang="en-US" sz="1600" b="1" dirty="0">
+                <a:solidFill>
+                  <a:srgbClr val="0D9488"/>
+                </a:solidFill>
+                <a:latin typeface="Trebuchet MS" pitchFamily="34" charset="0"/>
+                <a:ea typeface="Trebuchet MS" pitchFamily="34" charset="-122"/>
+                <a:cs typeface="Trebuchet MS" pitchFamily="34" charset="-120"/>
+              </a:rPr>
+              <a:t>·</a:t>
+            </a:r>
+            <a:endParaRPr lang="en-US" sz="1600" dirty="0"/>
+          </a:p>
+        </p:txBody>
+      </p:sp>
+      <p:sp>
+        <p:nvSpPr>
+          <p:cNvPr id="31" name="Shape 29"/>
+          <p:cNvSpPr/>
+          <p:nvPr/>
+        </p:nvSpPr>
+        <p:spPr>
+          <a:xfrm>
+            <a:off x="6428232" y="3364992"/>
+            <a:ext cx="1645920" cy="475488"/>
+          </a:xfrm>
+          <a:prstGeom prst="rect">
+            <a:avLst>
+              <a:gd name="adj" fmla="val 9615"/>
+            </a:avLst>
+          </a:prstGeom>
+          <a:solidFill>
+            <a:srgbClr val="FFFFFF"/>
+          </a:solidFill>
+          <a:ln w="12700">
+            <a:solidFill>
+              <a:srgbClr val="0D9488"/>
+            </a:solidFill>
+            <a:prstDash val="solid"/>
+          </a:ln>
+        </p:spPr>
+      </p:sp>
+      <p:sp>
+        <p:nvSpPr>
+          <p:cNvPr id="32" name="Text 30"/>
+          <p:cNvSpPr/>
+          <p:nvPr/>
+        </p:nvSpPr>
+        <p:spPr>
+          <a:xfrm>
+            <a:off x="6428232" y="3364992"/>
+            <a:ext cx="1645920" cy="475488"/>
+          </a:xfrm>
+          <a:prstGeom prst="rect">
+            <a:avLst/>
+          </a:prstGeom>
+          <a:noFill/>
+          <a:ln/>
+        </p:spPr>
+        <p:txBody>
+          <a:bodyPr wrap="square" lIns="0" tIns="0" rIns="0" bIns="0" rtlCol="0" anchor="ctr"/>
+          <a:lstStyle/>
+          <a:p>
+            <a:pPr algn="ctr" indent="0" marL="0">
+              <a:buNone/>
+            </a:pPr>
+            <a:r>
+              <a:rPr lang="en-US" sz="1400" b="1" dirty="0">
+                <a:solidFill>
+                  <a:srgbClr val="0D9488"/>
+                </a:solidFill>
+                <a:latin typeface="Trebuchet MS" pitchFamily="34" charset="0"/>
+                <a:ea typeface="Trebuchet MS" pitchFamily="34" charset="-122"/>
+                <a:cs typeface="Trebuchet MS" pitchFamily="34" charset="-120"/>
+              </a:rPr>
+              <a:t>cloud</a:t>
+            </a:r>
+            <a:endParaRPr lang="en-US" sz="1400" dirty="0"/>
+          </a:p>
+        </p:txBody>
+      </p:sp>
+      <p:sp>
+        <p:nvSpPr>
+          <p:cNvPr id="33" name="Shape 31"/>
           <p:cNvSpPr/>
           <p:nvPr/>
         </p:nvSpPr>
@@ -13527,7 +13632,7 @@
       </p:sp>
       <p:sp>
         <p:nvSpPr>
-          <p:cNvPr id="31" name="Text 29"/>
+          <p:cNvPr id="34" name="Text 32"/>
           <p:cNvSpPr/>
           <p:nvPr/>
         </p:nvSpPr>
@@ -13566,7 +13671,7 @@
       </p:sp>
       <p:sp>
         <p:nvSpPr>
-          <p:cNvPr id="32" name="Shape 30"/>
+          <p:cNvPr id="35" name="Shape 33"/>
           <p:cNvSpPr/>
           <p:nvPr/>
         </p:nvSpPr>
@@ -13593,7 +13698,7 @@
       </p:sp>
       <p:sp>
         <p:nvSpPr>
-          <p:cNvPr id="33" name="Text 31"/>
+          <p:cNvPr id="36" name="Text 34"/>
           <p:cNvSpPr/>
           <p:nvPr/>
         </p:nvSpPr>
@@ -14320,7 +14425,7 @@
                 <a:ea typeface="Trebuchet MS" pitchFamily="34" charset="-122"/>
                 <a:cs typeface="Trebuchet MS" pitchFamily="34" charset="-120"/>
               </a:rPr>
-              <a:t>cloudless</a:t>
+              <a:t>thundercloud</a:t>
             </a:r>
             <a:endParaRPr lang="en-US" sz="2800" dirty="0"/>
           </a:p>
@@ -14409,11 +14514,11 @@
             </a:avLst>
           </a:prstGeom>
           <a:solidFill>
-            <a:srgbClr val="CCFBF1"/>
+            <a:srgbClr val="DDD6FE"/>
           </a:solidFill>
           <a:ln w="19050">
             <a:solidFill>
-              <a:srgbClr val="0D9488"/>
+              <a:srgbClr val="7C3AED"/>
             </a:solidFill>
             <a:prstDash val="solid"/>
           </a:ln>
@@ -14453,13 +14558,13 @@
             <a:r>
               <a:rPr lang="en-US" sz="1300" b="1" dirty="0">
                 <a:solidFill>
-                  <a:srgbClr val="0F766E"/>
+                  <a:srgbClr val="4C1D95"/>
                 </a:solidFill>
                 <a:latin typeface="Trebuchet MS" pitchFamily="34" charset="0"/>
                 <a:ea typeface="Trebuchet MS" pitchFamily="34" charset="-122"/>
                 <a:cs typeface="Trebuchet MS" pitchFamily="34" charset="-120"/>
               </a:rPr>
-              <a:t>cloud</a:t>
+              <a:t>thunder</a:t>
             </a:r>
             <a:endParaRPr lang="en-US" sz="1300" dirty="0"/>
           </a:p>
@@ -14498,7 +14603,7 @@
                 <a:ea typeface="Calibri" pitchFamily="34" charset="-122"/>
                 <a:cs typeface="Calibri" pitchFamily="34" charset="-120"/>
               </a:rPr>
-              <a:t>mass of water vapour</a:t>
+              <a:t>loud rumbling sound in a storm</a:t>
             </a:r>
             <a:endParaRPr lang="en-US" sz="850" dirty="0"/>
           </a:p>
@@ -14521,11 +14626,11 @@
             </a:avLst>
           </a:prstGeom>
           <a:solidFill>
-            <a:srgbClr val="DDD6FE"/>
+            <a:srgbClr val="CCFBF1"/>
           </a:solidFill>
           <a:ln w="19050">
             <a:solidFill>
-              <a:srgbClr val="7C3AED"/>
+              <a:srgbClr val="0D9488"/>
             </a:solidFill>
             <a:prstDash val="solid"/>
           </a:ln>
@@ -14565,13 +14670,13 @@
             <a:r>
               <a:rPr lang="en-US" sz="1300" b="1" dirty="0">
                 <a:solidFill>
-                  <a:srgbClr val="4C1D95"/>
+                  <a:srgbClr val="0F766E"/>
                 </a:solidFill>
                 <a:latin typeface="Trebuchet MS" pitchFamily="34" charset="0"/>
                 <a:ea typeface="Trebuchet MS" pitchFamily="34" charset="-122"/>
                 <a:cs typeface="Trebuchet MS" pitchFamily="34" charset="-120"/>
               </a:rPr>
-              <a:t>less</a:t>
+              <a:t>cloud</a:t>
             </a:r>
             <a:endParaRPr lang="en-US" sz="1300" dirty="0"/>
           </a:p>
@@ -14610,7 +14715,7 @@
                 <a:ea typeface="Calibri" pitchFamily="34" charset="-122"/>
                 <a:cs typeface="Calibri" pitchFamily="34" charset="-120"/>
               </a:rPr>
-              <a:t>without</a:t>
+              <a:t>mass of water vapour</a:t>
             </a:r>
             <a:endParaRPr lang="en-US" sz="850" dirty="0"/>
           </a:p>
@@ -14717,7 +14822,7 @@
         </p:nvSpPr>
         <p:spPr>
           <a:xfrm>
-            <a:off x="2999232" y="3364992"/>
+            <a:off x="2313432" y="3364992"/>
             <a:ext cx="1645920" cy="475488"/>
           </a:xfrm>
           <a:prstGeom prst="rect">
@@ -14744,7 +14849,7 @@
         </p:nvSpPr>
         <p:spPr>
           <a:xfrm>
-            <a:off x="2999232" y="3364992"/>
+            <a:off x="2313432" y="3364992"/>
             <a:ext cx="1645920" cy="475488"/>
           </a:xfrm>
           <a:prstGeom prst="rect">
@@ -14769,7 +14874,7 @@
                 <a:ea typeface="Trebuchet MS" pitchFamily="34" charset="-122"/>
                 <a:cs typeface="Trebuchet MS" pitchFamily="34" charset="-120"/>
               </a:rPr>
-              <a:t>cloud</a:t>
+              <a:t>thun</a:t>
             </a:r>
             <a:endParaRPr lang="en-US" sz="1400" dirty="0"/>
           </a:p>
@@ -14783,8 +14888,8 @@
         </p:nvSpPr>
         <p:spPr>
           <a:xfrm>
-            <a:off x="4645152" y="3364992"/>
-            <a:ext cx="1097280" cy="475488"/>
+            <a:off x="3959352" y="3364992"/>
+            <a:ext cx="411480" cy="475488"/>
           </a:xfrm>
           <a:prstGeom prst="rect">
             <a:avLst/>
@@ -14822,7 +14927,7 @@
         </p:nvSpPr>
         <p:spPr>
           <a:xfrm>
-            <a:off x="5742432" y="3364992"/>
+            <a:off x="4370832" y="3364992"/>
             <a:ext cx="1645920" cy="475488"/>
           </a:xfrm>
           <a:prstGeom prst="rect">
@@ -14849,7 +14954,7 @@
         </p:nvSpPr>
         <p:spPr>
           <a:xfrm>
-            <a:off x="5742432" y="3364992"/>
+            <a:off x="4370832" y="3364992"/>
             <a:ext cx="1645920" cy="475488"/>
           </a:xfrm>
           <a:prstGeom prst="rect">
@@ -14874,7 +14979,7 @@
                 <a:ea typeface="Trebuchet MS" pitchFamily="34" charset="-122"/>
                 <a:cs typeface="Trebuchet MS" pitchFamily="34" charset="-120"/>
               </a:rPr>
-              <a:t>less</a:t>
+              <a:t>der</a:t>
             </a:r>
             <a:endParaRPr lang="en-US" sz="1400" dirty="0"/>
           </a:p>
@@ -14882,7 +14987,112 @@
       </p:sp>
       <p:sp>
         <p:nvSpPr>
-          <p:cNvPr id="30" name="Shape 28"/>
+          <p:cNvPr id="30" name="Text 28"/>
+          <p:cNvSpPr/>
+          <p:nvPr/>
+        </p:nvSpPr>
+        <p:spPr>
+          <a:xfrm>
+            <a:off x="6016752" y="3364992"/>
+            <a:ext cx="411480" cy="475488"/>
+          </a:xfrm>
+          <a:prstGeom prst="rect">
+            <a:avLst/>
+          </a:prstGeom>
+          <a:noFill/>
+          <a:ln/>
+        </p:spPr>
+        <p:txBody>
+          <a:bodyPr wrap="square" lIns="0" tIns="0" rIns="0" bIns="0" rtlCol="0" anchor="ctr"/>
+          <a:lstStyle/>
+          <a:p>
+            <a:pPr algn="ctr" indent="0" marL="0">
+              <a:buNone/>
+            </a:pPr>
+            <a:r>
+              <a:rPr lang="en-US" sz="1600" b="1" dirty="0">
+                <a:solidFill>
+                  <a:srgbClr val="0D9488"/>
+                </a:solidFill>
+                <a:latin typeface="Trebuchet MS" pitchFamily="34" charset="0"/>
+                <a:ea typeface="Trebuchet MS" pitchFamily="34" charset="-122"/>
+                <a:cs typeface="Trebuchet MS" pitchFamily="34" charset="-120"/>
+              </a:rPr>
+              <a:t>·</a:t>
+            </a:r>
+            <a:endParaRPr lang="en-US" sz="1600" dirty="0"/>
+          </a:p>
+        </p:txBody>
+      </p:sp>
+      <p:sp>
+        <p:nvSpPr>
+          <p:cNvPr id="31" name="Shape 29"/>
+          <p:cNvSpPr/>
+          <p:nvPr/>
+        </p:nvSpPr>
+        <p:spPr>
+          <a:xfrm>
+            <a:off x="6428232" y="3364992"/>
+            <a:ext cx="1645920" cy="475488"/>
+          </a:xfrm>
+          <a:prstGeom prst="rect">
+            <a:avLst>
+              <a:gd name="adj" fmla="val 9615"/>
+            </a:avLst>
+          </a:prstGeom>
+          <a:solidFill>
+            <a:srgbClr val="FFFFFF"/>
+          </a:solidFill>
+          <a:ln w="12700">
+            <a:solidFill>
+              <a:srgbClr val="0D9488"/>
+            </a:solidFill>
+            <a:prstDash val="solid"/>
+          </a:ln>
+        </p:spPr>
+      </p:sp>
+      <p:sp>
+        <p:nvSpPr>
+          <p:cNvPr id="32" name="Text 30"/>
+          <p:cNvSpPr/>
+          <p:nvPr/>
+        </p:nvSpPr>
+        <p:spPr>
+          <a:xfrm>
+            <a:off x="6428232" y="3364992"/>
+            <a:ext cx="1645920" cy="475488"/>
+          </a:xfrm>
+          <a:prstGeom prst="rect">
+            <a:avLst/>
+          </a:prstGeom>
+          <a:noFill/>
+          <a:ln/>
+        </p:spPr>
+        <p:txBody>
+          <a:bodyPr wrap="square" lIns="0" tIns="0" rIns="0" bIns="0" rtlCol="0" anchor="ctr"/>
+          <a:lstStyle/>
+          <a:p>
+            <a:pPr algn="ctr" indent="0" marL="0">
+              <a:buNone/>
+            </a:pPr>
+            <a:r>
+              <a:rPr lang="en-US" sz="1400" b="1" dirty="0">
+                <a:solidFill>
+                  <a:srgbClr val="0D9488"/>
+                </a:solidFill>
+                <a:latin typeface="Trebuchet MS" pitchFamily="34" charset="0"/>
+                <a:ea typeface="Trebuchet MS" pitchFamily="34" charset="-122"/>
+                <a:cs typeface="Trebuchet MS" pitchFamily="34" charset="-120"/>
+              </a:rPr>
+              <a:t>cloud</a:t>
+            </a:r>
+            <a:endParaRPr lang="en-US" sz="1400" dirty="0"/>
+          </a:p>
+        </p:txBody>
+      </p:sp>
+      <p:sp>
+        <p:nvSpPr>
+          <p:cNvPr id="33" name="Shape 31"/>
           <p:cNvSpPr/>
           <p:nvPr/>
         </p:nvSpPr>
@@ -14909,7 +15119,7 @@
       </p:sp>
       <p:sp>
         <p:nvSpPr>
-          <p:cNvPr id="31" name="Text 29"/>
+          <p:cNvPr id="34" name="Text 32"/>
           <p:cNvSpPr/>
           <p:nvPr/>
         </p:nvSpPr>
@@ -14948,7 +15158,7 @@
       </p:sp>
       <p:sp>
         <p:nvSpPr>
-          <p:cNvPr id="32" name="Shape 30"/>
+          <p:cNvPr id="35" name="Shape 33"/>
           <p:cNvSpPr/>
           <p:nvPr/>
         </p:nvSpPr>
@@ -14975,13 +15185,13 @@
       </p:sp>
       <p:sp>
         <p:nvSpPr>
-          <p:cNvPr id="33" name="Shape 31"/>
-          <p:cNvSpPr/>
-          <p:nvPr/>
-        </p:nvSpPr>
-        <p:spPr>
-          <a:xfrm>
-            <a:off x="2254649" y="4169664"/>
+          <p:cNvPr id="36" name="Shape 34"/>
+          <p:cNvSpPr/>
+          <p:nvPr/>
+        </p:nvSpPr>
+        <p:spPr>
+          <a:xfrm>
+            <a:off x="2023872" y="4169664"/>
             <a:ext cx="685800" cy="475488"/>
           </a:xfrm>
           <a:prstGeom prst="rect">
@@ -15002,13 +15212,13 @@
       </p:sp>
       <p:sp>
         <p:nvSpPr>
-          <p:cNvPr id="34" name="Text 32"/>
-          <p:cNvSpPr/>
-          <p:nvPr/>
-        </p:nvSpPr>
-        <p:spPr>
-          <a:xfrm>
-            <a:off x="2254649" y="4169664"/>
+          <p:cNvPr id="37" name="Text 35"/>
+          <p:cNvSpPr/>
+          <p:nvPr/>
+        </p:nvSpPr>
+        <p:spPr>
+          <a:xfrm>
+            <a:off x="2023872" y="4169664"/>
             <a:ext cx="685800" cy="475488"/>
           </a:xfrm>
           <a:prstGeom prst="rect">
@@ -15033,7 +15243,7 @@
                 <a:ea typeface="Trebuchet MS" pitchFamily="34" charset="-122"/>
                 <a:cs typeface="Trebuchet MS" pitchFamily="34" charset="-120"/>
               </a:rPr>
-              <a:t>cl</a:t>
+              <a:t>th</a:t>
             </a:r>
             <a:endParaRPr lang="en-US" sz="900" dirty="0"/>
           </a:p>
@@ -15041,13 +15251,13 @@
       </p:sp>
       <p:sp>
         <p:nvSpPr>
-          <p:cNvPr id="35" name="Shape 33"/>
-          <p:cNvSpPr/>
-          <p:nvPr/>
-        </p:nvSpPr>
-        <p:spPr>
-          <a:xfrm>
-            <a:off x="3293146" y="4169664"/>
+          <p:cNvPr id="38" name="Shape 36"/>
+          <p:cNvSpPr/>
+          <p:nvPr/>
+        </p:nvSpPr>
+        <p:spPr>
+          <a:xfrm>
+            <a:off x="2831592" y="4169664"/>
             <a:ext cx="685800" cy="475488"/>
           </a:xfrm>
           <a:prstGeom prst="rect">
@@ -15068,13 +15278,13 @@
       </p:sp>
       <p:sp>
         <p:nvSpPr>
-          <p:cNvPr id="36" name="Text 34"/>
-          <p:cNvSpPr/>
-          <p:nvPr/>
-        </p:nvSpPr>
-        <p:spPr>
-          <a:xfrm>
-            <a:off x="3293146" y="4169664"/>
+          <p:cNvPr id="39" name="Text 37"/>
+          <p:cNvSpPr/>
+          <p:nvPr/>
+        </p:nvSpPr>
+        <p:spPr>
+          <a:xfrm>
+            <a:off x="2831592" y="4169664"/>
             <a:ext cx="685800" cy="475488"/>
           </a:xfrm>
           <a:prstGeom prst="rect">
@@ -15099,7 +15309,7 @@
                 <a:ea typeface="Trebuchet MS" pitchFamily="34" charset="-122"/>
                 <a:cs typeface="Trebuchet MS" pitchFamily="34" charset="-120"/>
               </a:rPr>
-              <a:t>ou</a:t>
+              <a:t>u</a:t>
             </a:r>
             <a:endParaRPr lang="en-US" sz="900" dirty="0"/>
           </a:p>
@@ -15107,13 +15317,13 @@
       </p:sp>
       <p:sp>
         <p:nvSpPr>
-          <p:cNvPr id="37" name="Shape 35"/>
-          <p:cNvSpPr/>
-          <p:nvPr/>
-        </p:nvSpPr>
-        <p:spPr>
-          <a:xfrm>
-            <a:off x="4331643" y="4169664"/>
+          <p:cNvPr id="40" name="Shape 38"/>
+          <p:cNvSpPr/>
+          <p:nvPr/>
+        </p:nvSpPr>
+        <p:spPr>
+          <a:xfrm>
+            <a:off x="3639312" y="4169664"/>
             <a:ext cx="685800" cy="475488"/>
           </a:xfrm>
           <a:prstGeom prst="rect">
@@ -15134,13 +15344,13 @@
       </p:sp>
       <p:sp>
         <p:nvSpPr>
-          <p:cNvPr id="38" name="Text 36"/>
-          <p:cNvSpPr/>
-          <p:nvPr/>
-        </p:nvSpPr>
-        <p:spPr>
-          <a:xfrm>
-            <a:off x="4331643" y="4169664"/>
+          <p:cNvPr id="41" name="Text 39"/>
+          <p:cNvSpPr/>
+          <p:nvPr/>
+        </p:nvSpPr>
+        <p:spPr>
+          <a:xfrm>
+            <a:off x="3639312" y="4169664"/>
             <a:ext cx="685800" cy="475488"/>
           </a:xfrm>
           <a:prstGeom prst="rect">
@@ -15165,7 +15375,7 @@
                 <a:ea typeface="Trebuchet MS" pitchFamily="34" charset="-122"/>
                 <a:cs typeface="Trebuchet MS" pitchFamily="34" charset="-120"/>
               </a:rPr>
-              <a:t>d</a:t>
+              <a:t>n</a:t>
             </a:r>
             <a:endParaRPr lang="en-US" sz="900" dirty="0"/>
           </a:p>
@@ -15173,13 +15383,13 @@
       </p:sp>
       <p:sp>
         <p:nvSpPr>
-          <p:cNvPr id="39" name="Shape 37"/>
-          <p:cNvSpPr/>
-          <p:nvPr/>
-        </p:nvSpPr>
-        <p:spPr>
-          <a:xfrm>
-            <a:off x="5370141" y="4169664"/>
+          <p:cNvPr id="42" name="Shape 40"/>
+          <p:cNvSpPr/>
+          <p:nvPr/>
+        </p:nvSpPr>
+        <p:spPr>
+          <a:xfrm>
+            <a:off x="4447032" y="4169664"/>
             <a:ext cx="685800" cy="475488"/>
           </a:xfrm>
           <a:prstGeom prst="rect">
@@ -15200,13 +15410,13 @@
       </p:sp>
       <p:sp>
         <p:nvSpPr>
-          <p:cNvPr id="40" name="Text 38"/>
-          <p:cNvSpPr/>
-          <p:nvPr/>
-        </p:nvSpPr>
-        <p:spPr>
-          <a:xfrm>
-            <a:off x="5370141" y="4169664"/>
+          <p:cNvPr id="43" name="Text 41"/>
+          <p:cNvSpPr/>
+          <p:nvPr/>
+        </p:nvSpPr>
+        <p:spPr>
+          <a:xfrm>
+            <a:off x="4447032" y="4169664"/>
             <a:ext cx="685800" cy="475488"/>
           </a:xfrm>
           <a:prstGeom prst="rect">
@@ -15231,7 +15441,7 @@
                 <a:ea typeface="Trebuchet MS" pitchFamily="34" charset="-122"/>
                 <a:cs typeface="Trebuchet MS" pitchFamily="34" charset="-120"/>
               </a:rPr>
-              <a:t>l</a:t>
+              <a:t>d</a:t>
             </a:r>
             <a:endParaRPr lang="en-US" sz="900" dirty="0"/>
           </a:p>
@@ -15239,13 +15449,13 @@
       </p:sp>
       <p:sp>
         <p:nvSpPr>
-          <p:cNvPr id="41" name="Shape 39"/>
-          <p:cNvSpPr/>
-          <p:nvPr/>
-        </p:nvSpPr>
-        <p:spPr>
-          <a:xfrm>
-            <a:off x="6408638" y="4169664"/>
+          <p:cNvPr id="44" name="Shape 42"/>
+          <p:cNvSpPr/>
+          <p:nvPr/>
+        </p:nvSpPr>
+        <p:spPr>
+          <a:xfrm>
+            <a:off x="5254752" y="4169664"/>
             <a:ext cx="685800" cy="475488"/>
           </a:xfrm>
           <a:prstGeom prst="rect">
@@ -15266,13 +15476,13 @@
       </p:sp>
       <p:sp>
         <p:nvSpPr>
-          <p:cNvPr id="42" name="Text 40"/>
-          <p:cNvSpPr/>
-          <p:nvPr/>
-        </p:nvSpPr>
-        <p:spPr>
-          <a:xfrm>
-            <a:off x="6408638" y="4169664"/>
+          <p:cNvPr id="45" name="Text 43"/>
+          <p:cNvSpPr/>
+          <p:nvPr/>
+        </p:nvSpPr>
+        <p:spPr>
+          <a:xfrm>
+            <a:off x="5254752" y="4169664"/>
             <a:ext cx="685800" cy="475488"/>
           </a:xfrm>
           <a:prstGeom prst="rect">
@@ -15297,7 +15507,7 @@
                 <a:ea typeface="Trebuchet MS" pitchFamily="34" charset="-122"/>
                 <a:cs typeface="Trebuchet MS" pitchFamily="34" charset="-120"/>
               </a:rPr>
-              <a:t>e</a:t>
+              <a:t>er</a:t>
             </a:r>
             <a:endParaRPr lang="en-US" sz="900" dirty="0"/>
           </a:p>
@@ -15305,13 +15515,13 @@
       </p:sp>
       <p:sp>
         <p:nvSpPr>
-          <p:cNvPr id="43" name="Shape 41"/>
-          <p:cNvSpPr/>
-          <p:nvPr/>
-        </p:nvSpPr>
-        <p:spPr>
-          <a:xfrm>
-            <a:off x="7447135" y="4169664"/>
+          <p:cNvPr id="46" name="Shape 44"/>
+          <p:cNvSpPr/>
+          <p:nvPr/>
+        </p:nvSpPr>
+        <p:spPr>
+          <a:xfrm>
+            <a:off x="6062472" y="4169664"/>
             <a:ext cx="685800" cy="475488"/>
           </a:xfrm>
           <a:prstGeom prst="rect">
@@ -15332,13 +15542,13 @@
       </p:sp>
       <p:sp>
         <p:nvSpPr>
-          <p:cNvPr id="44" name="Text 42"/>
-          <p:cNvSpPr/>
-          <p:nvPr/>
-        </p:nvSpPr>
-        <p:spPr>
-          <a:xfrm>
-            <a:off x="7447135" y="4169664"/>
+          <p:cNvPr id="47" name="Text 45"/>
+          <p:cNvSpPr/>
+          <p:nvPr/>
+        </p:nvSpPr>
+        <p:spPr>
+          <a:xfrm>
+            <a:off x="6062472" y="4169664"/>
             <a:ext cx="685800" cy="475488"/>
           </a:xfrm>
           <a:prstGeom prst="rect">
@@ -15363,7 +15573,139 @@
                 <a:ea typeface="Trebuchet MS" pitchFamily="34" charset="-122"/>
                 <a:cs typeface="Trebuchet MS" pitchFamily="34" charset="-120"/>
               </a:rPr>
-              <a:t>ss</a:t>
+              <a:t>cl</a:t>
+            </a:r>
+            <a:endParaRPr lang="en-US" sz="900" dirty="0"/>
+          </a:p>
+        </p:txBody>
+      </p:sp>
+      <p:sp>
+        <p:nvSpPr>
+          <p:cNvPr id="48" name="Shape 46"/>
+          <p:cNvSpPr/>
+          <p:nvPr/>
+        </p:nvSpPr>
+        <p:spPr>
+          <a:xfrm>
+            <a:off x="6870192" y="4169664"/>
+            <a:ext cx="685800" cy="475488"/>
+          </a:xfrm>
+          <a:prstGeom prst="rect">
+            <a:avLst>
+              <a:gd name="adj" fmla="val 7692"/>
+            </a:avLst>
+          </a:prstGeom>
+          <a:solidFill>
+            <a:srgbClr val="FFFFFF"/>
+          </a:solidFill>
+          <a:ln w="12700">
+            <a:solidFill>
+              <a:srgbClr val="DB2777"/>
+            </a:solidFill>
+            <a:prstDash val="solid"/>
+          </a:ln>
+        </p:spPr>
+      </p:sp>
+      <p:sp>
+        <p:nvSpPr>
+          <p:cNvPr id="49" name="Text 47"/>
+          <p:cNvSpPr/>
+          <p:nvPr/>
+        </p:nvSpPr>
+        <p:spPr>
+          <a:xfrm>
+            <a:off x="6870192" y="4169664"/>
+            <a:ext cx="685800" cy="475488"/>
+          </a:xfrm>
+          <a:prstGeom prst="rect">
+            <a:avLst/>
+          </a:prstGeom>
+          <a:noFill/>
+          <a:ln/>
+        </p:spPr>
+        <p:txBody>
+          <a:bodyPr wrap="square" lIns="0" tIns="0" rIns="0" bIns="0" rtlCol="0" anchor="ctr"/>
+          <a:lstStyle/>
+          <a:p>
+            <a:pPr algn="ctr" indent="0" marL="0">
+              <a:buNone/>
+            </a:pPr>
+            <a:r>
+              <a:rPr lang="en-US" sz="900" b="1" dirty="0">
+                <a:solidFill>
+                  <a:srgbClr val="9D174D"/>
+                </a:solidFill>
+                <a:latin typeface="Trebuchet MS" pitchFamily="34" charset="0"/>
+                <a:ea typeface="Trebuchet MS" pitchFamily="34" charset="-122"/>
+                <a:cs typeface="Trebuchet MS" pitchFamily="34" charset="-120"/>
+              </a:rPr>
+              <a:t>ou</a:t>
+            </a:r>
+            <a:endParaRPr lang="en-US" sz="900" dirty="0"/>
+          </a:p>
+        </p:txBody>
+      </p:sp>
+      <p:sp>
+        <p:nvSpPr>
+          <p:cNvPr id="50" name="Shape 48"/>
+          <p:cNvSpPr/>
+          <p:nvPr/>
+        </p:nvSpPr>
+        <p:spPr>
+          <a:xfrm>
+            <a:off x="7677912" y="4169664"/>
+            <a:ext cx="685800" cy="475488"/>
+          </a:xfrm>
+          <a:prstGeom prst="rect">
+            <a:avLst>
+              <a:gd name="adj" fmla="val 7692"/>
+            </a:avLst>
+          </a:prstGeom>
+          <a:solidFill>
+            <a:srgbClr val="FFFFFF"/>
+          </a:solidFill>
+          <a:ln w="12700">
+            <a:solidFill>
+              <a:srgbClr val="DB2777"/>
+            </a:solidFill>
+            <a:prstDash val="solid"/>
+          </a:ln>
+        </p:spPr>
+      </p:sp>
+      <p:sp>
+        <p:nvSpPr>
+          <p:cNvPr id="51" name="Text 49"/>
+          <p:cNvSpPr/>
+          <p:nvPr/>
+        </p:nvSpPr>
+        <p:spPr>
+          <a:xfrm>
+            <a:off x="7677912" y="4169664"/>
+            <a:ext cx="685800" cy="475488"/>
+          </a:xfrm>
+          <a:prstGeom prst="rect">
+            <a:avLst/>
+          </a:prstGeom>
+          <a:noFill/>
+          <a:ln/>
+        </p:spPr>
+        <p:txBody>
+          <a:bodyPr wrap="square" lIns="0" tIns="0" rIns="0" bIns="0" rtlCol="0" anchor="ctr"/>
+          <a:lstStyle/>
+          <a:p>
+            <a:pPr algn="ctr" indent="0" marL="0">
+              <a:buNone/>
+            </a:pPr>
+            <a:r>
+              <a:rPr lang="en-US" sz="900" b="1" dirty="0">
+                <a:solidFill>
+                  <a:srgbClr val="9D174D"/>
+                </a:solidFill>
+                <a:latin typeface="Trebuchet MS" pitchFamily="34" charset="0"/>
+                <a:ea typeface="Trebuchet MS" pitchFamily="34" charset="-122"/>
+                <a:cs typeface="Trebuchet MS" pitchFamily="34" charset="-120"/>
+              </a:rPr>
+              <a:t>d</a:t>
             </a:r>
             <a:endParaRPr lang="en-US" sz="900" dirty="0"/>
           </a:p>
@@ -16689,7 +17031,7 @@
                 <a:ea typeface="Calibri" pitchFamily="34" charset="-122"/>
                 <a:cs typeface="Calibri" pitchFamily="34" charset="-120"/>
               </a:rPr>
-              <a:t>The </a:t>
+              <a:t>After the </a:t>
             </a:r>
             <a:pPr algn="l" indent="0" marL="0">
               <a:buNone/>
@@ -16706,7 +17048,7 @@
                 <a:ea typeface="Calibri" pitchFamily="34" charset="-122"/>
                 <a:cs typeface="Calibri" pitchFamily="34" charset="-120"/>
               </a:rPr>
-              <a:t>overclouded</a:t>
+              <a:t>cloudburst</a:t>
             </a:r>
             <a:pPr algn="l" indent="0" marL="0">
               <a:buNone/>
@@ -16720,7 +17062,7 @@
                 <a:ea typeface="Calibri" pitchFamily="34" charset="-122"/>
                 <a:cs typeface="Calibri" pitchFamily="34" charset="-120"/>
               </a:rPr>
-              <a:t> hills looked dramatic, but by noon the </a:t>
+              <a:t>, the </a:t>
             </a:r>
             <a:pPr algn="l" indent="0" marL="0">
               <a:buNone/>
@@ -16737,7 +17079,7 @@
                 <a:ea typeface="Calibri" pitchFamily="34" charset="-122"/>
                 <a:cs typeface="Calibri" pitchFamily="34" charset="-120"/>
               </a:rPr>
-              <a:t>clouding</a:t>
+              <a:t>cloudless</a:t>
             </a:r>
             <a:pPr algn="l" indent="0" marL="0">
               <a:buNone/>
@@ -16751,7 +17093,7 @@
                 <a:ea typeface="Calibri" pitchFamily="34" charset="-122"/>
                 <a:cs typeface="Calibri" pitchFamily="34" charset="-120"/>
               </a:rPr>
-              <a:t> had cleared and we spotted a </a:t>
+              <a:t> sky returned, but the ground was still </a:t>
             </a:r>
             <a:pPr algn="l" indent="0" marL="0">
               <a:buNone/>
@@ -16768,7 +17110,7 @@
                 <a:ea typeface="Calibri" pitchFamily="34" charset="-122"/>
                 <a:cs typeface="Calibri" pitchFamily="34" charset="-120"/>
               </a:rPr>
-              <a:t>cloudless</a:t>
+              <a:t>covered</a:t>
             </a:r>
             <a:pPr algn="l" indent="0" marL="0">
               <a:buNone/>
@@ -16782,7 +17124,7 @@
                 <a:ea typeface="Calibri" pitchFamily="34" charset="-122"/>
                 <a:cs typeface="Calibri" pitchFamily="34" charset="-120"/>
               </a:rPr>
-              <a:t> peak!</a:t>
+              <a:t> in puddles.</a:t>
             </a:r>
             <a:endParaRPr lang="en-US" sz="1800" dirty="0"/>
           </a:p>
@@ -16937,7 +17279,7 @@
                 <a:ea typeface="Trebuchet MS" pitchFamily="34" charset="-122"/>
                 <a:cs typeface="Trebuchet MS" pitchFamily="34" charset="-120"/>
               </a:rPr>
-              <a:t>overclouded</a:t>
+              <a:t>cloudburst</a:t>
             </a:r>
             <a:endParaRPr lang="en-US" sz="1400" dirty="0"/>
           </a:p>
@@ -17065,7 +17407,7 @@
                 <a:ea typeface="Trebuchet MS" pitchFamily="34" charset="-122"/>
                 <a:cs typeface="Trebuchet MS" pitchFamily="34" charset="-120"/>
               </a:rPr>
-              <a:t>clouding</a:t>
+              <a:t>cloudless</a:t>
             </a:r>
             <a:endParaRPr lang="en-US" sz="1400" dirty="0"/>
           </a:p>
@@ -17193,7 +17535,7 @@
                 <a:ea typeface="Trebuchet MS" pitchFamily="34" charset="-122"/>
                 <a:cs typeface="Trebuchet MS" pitchFamily="34" charset="-120"/>
               </a:rPr>
-              <a:t>cloudless</a:t>
+              <a:t>covered</a:t>
             </a:r>
             <a:endParaRPr lang="en-US" sz="1400" dirty="0"/>
           </a:p>
@@ -17663,7 +18005,7 @@
                 <a:ea typeface="Trebuchet MS" pitchFamily="34" charset="-122"/>
                 <a:cs typeface="Trebuchet MS" pitchFamily="34" charset="-120"/>
               </a:rPr>
-              <a:t>overclouded</a:t>
+              <a:t>cloudburst</a:t>
             </a:r>
             <a:endParaRPr lang="en-US" sz="2800" dirty="0"/>
           </a:p>
@@ -18490,7 +18832,7 @@
                 <a:ea typeface="Trebuchet MS" pitchFamily="34" charset="-122"/>
                 <a:cs typeface="Trebuchet MS" pitchFamily="34" charset="-120"/>
               </a:rPr>
-              <a:t>overclouded</a:t>
+              <a:t>cloudburst</a:t>
             </a:r>
             <a:endParaRPr lang="en-US" sz="2800" dirty="0"/>
           </a:p>
@@ -18570,7 +18912,7 @@
         </p:nvSpPr>
         <p:spPr>
           <a:xfrm>
-            <a:off x="2221992" y="2258568"/>
+            <a:off x="2938272" y="2258568"/>
             <a:ext cx="1828800" cy="292608"/>
           </a:xfrm>
           <a:prstGeom prst="rect">
@@ -18579,11 +18921,11 @@
             </a:avLst>
           </a:prstGeom>
           <a:solidFill>
-            <a:srgbClr val="DDD6FE"/>
+            <a:srgbClr val="CCFBF1"/>
           </a:solidFill>
           <a:ln w="19050">
             <a:solidFill>
-              <a:srgbClr val="7C3AED"/>
+              <a:srgbClr val="0D9488"/>
             </a:solidFill>
             <a:prstDash val="solid"/>
           </a:ln>
@@ -18604,7 +18946,7 @@
         </p:nvSpPr>
         <p:spPr>
           <a:xfrm>
-            <a:off x="2221992" y="2258568"/>
+            <a:off x="2938272" y="2258568"/>
             <a:ext cx="1828800" cy="292608"/>
           </a:xfrm>
           <a:prstGeom prst="rect">
@@ -18623,13 +18965,13 @@
             <a:r>
               <a:rPr lang="en-US" sz="1300" b="1" dirty="0">
                 <a:solidFill>
-                  <a:srgbClr val="4C1D95"/>
+                  <a:srgbClr val="0F766E"/>
                 </a:solidFill>
                 <a:latin typeface="Trebuchet MS" pitchFamily="34" charset="0"/>
                 <a:ea typeface="Trebuchet MS" pitchFamily="34" charset="-122"/>
                 <a:cs typeface="Trebuchet MS" pitchFamily="34" charset="-120"/>
               </a:rPr>
-              <a:t>over</a:t>
+              <a:t>cloud</a:t>
             </a:r>
             <a:endParaRPr lang="en-US" sz="1300" dirty="0"/>
           </a:p>
@@ -18643,7 +18985,7 @@
         </p:nvSpPr>
         <p:spPr>
           <a:xfrm>
-            <a:off x="2221992" y="2569464"/>
+            <a:off x="2938272" y="2569464"/>
             <a:ext cx="1828800" cy="201168"/>
           </a:xfrm>
           <a:prstGeom prst="rect">
@@ -18668,7 +19010,7 @@
                 <a:ea typeface="Calibri" pitchFamily="34" charset="-122"/>
                 <a:cs typeface="Calibri" pitchFamily="34" charset="-120"/>
               </a:rPr>
-              <a:t>above or too much</a:t>
+              <a:t>mass of water vapour</a:t>
             </a:r>
             <a:endParaRPr lang="en-US" sz="850" dirty="0"/>
           </a:p>
@@ -18682,7 +19024,7 @@
         </p:nvSpPr>
         <p:spPr>
           <a:xfrm>
-            <a:off x="4370832" y="2258568"/>
+            <a:off x="5803392" y="2258568"/>
             <a:ext cx="1828800" cy="292608"/>
           </a:xfrm>
           <a:prstGeom prst="rect">
@@ -18691,11 +19033,11 @@
             </a:avLst>
           </a:prstGeom>
           <a:solidFill>
-            <a:srgbClr val="CCFBF1"/>
+            <a:srgbClr val="FCE7F3"/>
           </a:solidFill>
           <a:ln w="19050">
             <a:solidFill>
-              <a:srgbClr val="0D9488"/>
+              <a:srgbClr val="DB2777"/>
             </a:solidFill>
             <a:prstDash val="solid"/>
           </a:ln>
@@ -18716,7 +19058,7 @@
         </p:nvSpPr>
         <p:spPr>
           <a:xfrm>
-            <a:off x="4370832" y="2258568"/>
+            <a:off x="5803392" y="2258568"/>
             <a:ext cx="1828800" cy="292608"/>
           </a:xfrm>
           <a:prstGeom prst="rect">
@@ -18735,13 +19077,13 @@
             <a:r>
               <a:rPr lang="en-US" sz="1300" b="1" dirty="0">
                 <a:solidFill>
-                  <a:srgbClr val="0F766E"/>
+                  <a:srgbClr val="9D174D"/>
                 </a:solidFill>
                 <a:latin typeface="Trebuchet MS" pitchFamily="34" charset="0"/>
                 <a:ea typeface="Trebuchet MS" pitchFamily="34" charset="-122"/>
                 <a:cs typeface="Trebuchet MS" pitchFamily="34" charset="-120"/>
               </a:rPr>
-              <a:t>cloud</a:t>
+              <a:t>burst</a:t>
             </a:r>
             <a:endParaRPr lang="en-US" sz="1300" dirty="0"/>
           </a:p>
@@ -18755,7 +19097,7 @@
         </p:nvSpPr>
         <p:spPr>
           <a:xfrm>
-            <a:off x="4370832" y="2569464"/>
+            <a:off x="5803392" y="2569464"/>
             <a:ext cx="1828800" cy="201168"/>
           </a:xfrm>
           <a:prstGeom prst="rect">
@@ -18780,7 +19122,7 @@
                 <a:ea typeface="Calibri" pitchFamily="34" charset="-122"/>
                 <a:cs typeface="Calibri" pitchFamily="34" charset="-120"/>
               </a:rPr>
-              <a:t>mass of water vapour</a:t>
+              <a:t>a sudden breaking out or release</a:t>
             </a:r>
             <a:endParaRPr lang="en-US" sz="850" dirty="0"/>
           </a:p>
@@ -18794,30 +19136,23 @@
         </p:nvSpPr>
         <p:spPr>
           <a:xfrm>
-            <a:off x="6519672" y="2258568"/>
-            <a:ext cx="1828800" cy="292608"/>
+            <a:off x="365760" y="3273552"/>
+            <a:ext cx="1371600" cy="658368"/>
           </a:xfrm>
           <a:prstGeom prst="rect">
             <a:avLst>
-              <a:gd name="adj" fmla="val 25000"/>
+              <a:gd name="adj" fmla="val 8333"/>
             </a:avLst>
           </a:prstGeom>
           <a:solidFill>
-            <a:srgbClr val="FCE7F3"/>
-          </a:solidFill>
-          <a:ln w="19050">
-            <a:solidFill>
-              <a:srgbClr val="DB2777"/>
-            </a:solidFill>
-            <a:prstDash val="solid"/>
-          </a:ln>
-          <a:effectLst>
-            <a:outerShdw sx="100000" sy="100000" kx="0" ky="0" algn="bl" rotWithShape="0" blurRad="101600" dist="38100" dir="8100000">
-              <a:srgbClr val="000000">
-                <a:alpha val="12000"/>
-              </a:srgbClr>
-            </a:outerShdw>
-          </a:effectLst>
+            <a:srgbClr val="E2E8F0"/>
+          </a:solidFill>
+          <a:ln w="12700">
+            <a:solidFill>
+              <a:srgbClr val="E2E8F0"/>
+            </a:solidFill>
+            <a:prstDash val="solid"/>
+          </a:ln>
         </p:spPr>
       </p:sp>
       <p:sp>
@@ -18828,8 +19163,8 @@
         </p:nvSpPr>
         <p:spPr>
           <a:xfrm>
-            <a:off x="6519672" y="2258568"/>
-            <a:ext cx="1828800" cy="292608"/>
+            <a:off x="365760" y="3273552"/>
+            <a:ext cx="1371600" cy="658368"/>
           </a:xfrm>
           <a:prstGeom prst="rect">
             <a:avLst/>
@@ -18845,73 +19180,100 @@
               <a:buNone/>
             </a:pPr>
             <a:r>
-              <a:rPr lang="en-US" sz="1300" b="1" dirty="0">
-                <a:solidFill>
-                  <a:srgbClr val="9D174D"/>
+              <a:rPr lang="en-US" sz="1100" b="1" dirty="0">
+                <a:solidFill>
+                  <a:srgbClr val="475569"/>
                 </a:solidFill>
                 <a:latin typeface="Trebuchet MS" pitchFamily="34" charset="0"/>
                 <a:ea typeface="Trebuchet MS" pitchFamily="34" charset="-122"/>
                 <a:cs typeface="Trebuchet MS" pitchFamily="34" charset="-120"/>
               </a:rPr>
-              <a:t>ed</a:t>
-            </a:r>
-            <a:endParaRPr lang="en-US" sz="1300" dirty="0"/>
-          </a:p>
-        </p:txBody>
-      </p:sp>
-      <p:sp>
-        <p:nvSpPr>
-          <p:cNvPr id="24" name="Text 22"/>
-          <p:cNvSpPr/>
-          <p:nvPr/>
-        </p:nvSpPr>
-        <p:spPr>
-          <a:xfrm>
-            <a:off x="6519672" y="2569464"/>
-            <a:ext cx="1828800" cy="201168"/>
-          </a:xfrm>
-          <a:prstGeom prst="rect">
-            <a:avLst/>
-          </a:prstGeom>
-          <a:noFill/>
-          <a:ln/>
-        </p:spPr>
-        <p:txBody>
-          <a:bodyPr wrap="square" lIns="0" tIns="0" rIns="0" bIns="0" rtlCol="0" anchor="t"/>
-          <a:lstStyle/>
-          <a:p>
-            <a:pPr algn="ctr" indent="0" marL="0">
-              <a:buNone/>
-            </a:pPr>
-            <a:r>
-              <a:rPr lang="en-US" sz="850" dirty="0">
-                <a:solidFill>
-                  <a:srgbClr val="475569"/>
+              <a:t>Syllables</a:t>
+            </a:r>
+            <a:endParaRPr lang="en-US" sz="1100" dirty="0"/>
+          </a:p>
+        </p:txBody>
+      </p:sp>
+      <p:sp>
+        <p:nvSpPr>
+          <p:cNvPr id="24" name="Shape 22"/>
+          <p:cNvSpPr/>
+          <p:nvPr/>
+        </p:nvSpPr>
+        <p:spPr>
+          <a:xfrm>
+            <a:off x="1874520" y="3273552"/>
+            <a:ext cx="6903720" cy="658368"/>
+          </a:xfrm>
+          <a:prstGeom prst="rect">
+            <a:avLst>
+              <a:gd name="adj" fmla="val 8333"/>
+            </a:avLst>
+          </a:prstGeom>
+          <a:solidFill>
+            <a:srgbClr val="F8FAFC"/>
+          </a:solidFill>
+          <a:ln w="12700">
+            <a:solidFill>
+              <a:srgbClr val="E2E8F0"/>
+            </a:solidFill>
+            <a:prstDash val="dash"/>
+          </a:ln>
+        </p:spPr>
+      </p:sp>
+      <p:sp>
+        <p:nvSpPr>
+          <p:cNvPr id="25" name="Text 23"/>
+          <p:cNvSpPr/>
+          <p:nvPr/>
+        </p:nvSpPr>
+        <p:spPr>
+          <a:xfrm>
+            <a:off x="1874520" y="3273552"/>
+            <a:ext cx="6903720" cy="658368"/>
+          </a:xfrm>
+          <a:prstGeom prst="rect">
+            <a:avLst/>
+          </a:prstGeom>
+          <a:noFill/>
+          <a:ln/>
+        </p:spPr>
+        <p:txBody>
+          <a:bodyPr wrap="square" rtlCol="0" anchor="ctr"/>
+          <a:lstStyle/>
+          <a:p>
+            <a:pPr algn="ctr" indent="0" marL="0">
+              <a:buNone/>
+            </a:pPr>
+            <a:r>
+              <a:rPr lang="en-US" sz="1100" i="1" dirty="0">
+                <a:solidFill>
+                  <a:srgbClr val="CBD5E1"/>
                 </a:solidFill>
                 <a:latin typeface="Calibri" pitchFamily="34" charset="0"/>
                 <a:ea typeface="Calibri" pitchFamily="34" charset="-122"/>
                 <a:cs typeface="Calibri" pitchFamily="34" charset="-120"/>
               </a:rPr>
-              <a:t>past tense or completed action</a:t>
-            </a:r>
-            <a:endParaRPr lang="en-US" sz="850" dirty="0"/>
-          </a:p>
-        </p:txBody>
-      </p:sp>
-      <p:sp>
-        <p:nvSpPr>
-          <p:cNvPr id="25" name="Shape 23"/>
-          <p:cNvSpPr/>
-          <p:nvPr/>
-        </p:nvSpPr>
-        <p:spPr>
-          <a:xfrm>
-            <a:off x="365760" y="3273552"/>
-            <a:ext cx="1371600" cy="658368"/>
+              <a:t>Write here...</a:t>
+            </a:r>
+            <a:endParaRPr lang="en-US" sz="1100" dirty="0"/>
+          </a:p>
+        </p:txBody>
+      </p:sp>
+      <p:sp>
+        <p:nvSpPr>
+          <p:cNvPr id="26" name="Shape 24"/>
+          <p:cNvSpPr/>
+          <p:nvPr/>
+        </p:nvSpPr>
+        <p:spPr>
+          <a:xfrm>
+            <a:off x="365760" y="4096512"/>
+            <a:ext cx="1371600" cy="804672"/>
           </a:xfrm>
           <a:prstGeom prst="rect">
             <a:avLst>
-              <a:gd name="adj" fmla="val 8333"/>
+              <a:gd name="adj" fmla="val 6818"/>
             </a:avLst>
           </a:prstGeom>
           <a:solidFill>
@@ -18927,14 +19289,14 @@
       </p:sp>
       <p:sp>
         <p:nvSpPr>
-          <p:cNvPr id="26" name="Text 24"/>
-          <p:cNvSpPr/>
-          <p:nvPr/>
-        </p:nvSpPr>
-        <p:spPr>
-          <a:xfrm>
-            <a:off x="365760" y="3273552"/>
-            <a:ext cx="1371600" cy="658368"/>
+          <p:cNvPr id="27" name="Text 25"/>
+          <p:cNvSpPr/>
+          <p:nvPr/>
+        </p:nvSpPr>
+        <p:spPr>
+          <a:xfrm>
+            <a:off x="365760" y="4096512"/>
+            <a:ext cx="1371600" cy="804672"/>
           </a:xfrm>
           <a:prstGeom prst="rect">
             <a:avLst/>
@@ -18958,7 +19320,7 @@
                 <a:ea typeface="Trebuchet MS" pitchFamily="34" charset="-122"/>
                 <a:cs typeface="Trebuchet MS" pitchFamily="34" charset="-120"/>
               </a:rPr>
-              <a:t>Syllables</a:t>
+              <a:t>Phonemes</a:t>
             </a:r>
             <a:endParaRPr lang="en-US" sz="1100" dirty="0"/>
           </a:p>
@@ -18966,80 +19328,14 @@
       </p:sp>
       <p:sp>
         <p:nvSpPr>
-          <p:cNvPr id="27" name="Shape 25"/>
-          <p:cNvSpPr/>
-          <p:nvPr/>
-        </p:nvSpPr>
-        <p:spPr>
-          <a:xfrm>
-            <a:off x="1874520" y="3273552"/>
-            <a:ext cx="6903720" cy="658368"/>
-          </a:xfrm>
-          <a:prstGeom prst="rect">
-            <a:avLst>
-              <a:gd name="adj" fmla="val 8333"/>
-            </a:avLst>
-          </a:prstGeom>
-          <a:solidFill>
-            <a:srgbClr val="F8FAFC"/>
-          </a:solidFill>
-          <a:ln w="12700">
-            <a:solidFill>
-              <a:srgbClr val="E2E8F0"/>
-            </a:solidFill>
-            <a:prstDash val="dash"/>
-          </a:ln>
-        </p:spPr>
-      </p:sp>
-      <p:sp>
-        <p:nvSpPr>
-          <p:cNvPr id="28" name="Text 26"/>
-          <p:cNvSpPr/>
-          <p:nvPr/>
-        </p:nvSpPr>
-        <p:spPr>
-          <a:xfrm>
-            <a:off x="1874520" y="3273552"/>
-            <a:ext cx="6903720" cy="658368"/>
-          </a:xfrm>
-          <a:prstGeom prst="rect">
-            <a:avLst/>
-          </a:prstGeom>
-          <a:noFill/>
-          <a:ln/>
-        </p:spPr>
-        <p:txBody>
-          <a:bodyPr wrap="square" rtlCol="0" anchor="ctr"/>
-          <a:lstStyle/>
-          <a:p>
-            <a:pPr algn="ctr" indent="0" marL="0">
-              <a:buNone/>
-            </a:pPr>
-            <a:r>
-              <a:rPr lang="en-US" sz="1100" i="1" dirty="0">
-                <a:solidFill>
-                  <a:srgbClr val="CBD5E1"/>
-                </a:solidFill>
-                <a:latin typeface="Calibri" pitchFamily="34" charset="0"/>
-                <a:ea typeface="Calibri" pitchFamily="34" charset="-122"/>
-                <a:cs typeface="Calibri" pitchFamily="34" charset="-120"/>
-              </a:rPr>
-              <a:t>Write here...</a:t>
-            </a:r>
-            <a:endParaRPr lang="en-US" sz="1100" dirty="0"/>
-          </a:p>
-        </p:txBody>
-      </p:sp>
-      <p:sp>
-        <p:nvSpPr>
-          <p:cNvPr id="29" name="Shape 27"/>
-          <p:cNvSpPr/>
-          <p:nvPr/>
-        </p:nvSpPr>
-        <p:spPr>
-          <a:xfrm>
-            <a:off x="365760" y="4096512"/>
-            <a:ext cx="1371600" cy="804672"/>
+          <p:cNvPr id="28" name="Shape 26"/>
+          <p:cNvSpPr/>
+          <p:nvPr/>
+        </p:nvSpPr>
+        <p:spPr>
+          <a:xfrm>
+            <a:off x="1874520" y="4096512"/>
+            <a:ext cx="6903720" cy="804672"/>
           </a:xfrm>
           <a:prstGeom prst="rect">
             <a:avLst>
@@ -19047,85 +19343,19 @@
             </a:avLst>
           </a:prstGeom>
           <a:solidFill>
-            <a:srgbClr val="E2E8F0"/>
+            <a:srgbClr val="F8FAFC"/>
           </a:solidFill>
           <a:ln w="12700">
             <a:solidFill>
               <a:srgbClr val="E2E8F0"/>
             </a:solidFill>
-            <a:prstDash val="solid"/>
-          </a:ln>
-        </p:spPr>
-      </p:sp>
-      <p:sp>
-        <p:nvSpPr>
-          <p:cNvPr id="30" name="Text 28"/>
-          <p:cNvSpPr/>
-          <p:nvPr/>
-        </p:nvSpPr>
-        <p:spPr>
-          <a:xfrm>
-            <a:off x="365760" y="4096512"/>
-            <a:ext cx="1371600" cy="804672"/>
-          </a:xfrm>
-          <a:prstGeom prst="rect">
-            <a:avLst/>
-          </a:prstGeom>
-          <a:noFill/>
-          <a:ln/>
-        </p:spPr>
-        <p:txBody>
-          <a:bodyPr wrap="square" lIns="0" tIns="0" rIns="0" bIns="0" rtlCol="0" anchor="ctr"/>
-          <a:lstStyle/>
-          <a:p>
-            <a:pPr algn="ctr" indent="0" marL="0">
-              <a:buNone/>
-            </a:pPr>
-            <a:r>
-              <a:rPr lang="en-US" sz="1100" b="1" dirty="0">
-                <a:solidFill>
-                  <a:srgbClr val="475569"/>
-                </a:solidFill>
-                <a:latin typeface="Trebuchet MS" pitchFamily="34" charset="0"/>
-                <a:ea typeface="Trebuchet MS" pitchFamily="34" charset="-122"/>
-                <a:cs typeface="Trebuchet MS" pitchFamily="34" charset="-120"/>
-              </a:rPr>
-              <a:t>Phonemes</a:t>
-            </a:r>
-            <a:endParaRPr lang="en-US" sz="1100" dirty="0"/>
-          </a:p>
-        </p:txBody>
-      </p:sp>
-      <p:sp>
-        <p:nvSpPr>
-          <p:cNvPr id="31" name="Shape 29"/>
-          <p:cNvSpPr/>
-          <p:nvPr/>
-        </p:nvSpPr>
-        <p:spPr>
-          <a:xfrm>
-            <a:off x="1874520" y="4096512"/>
-            <a:ext cx="6903720" cy="804672"/>
-          </a:xfrm>
-          <a:prstGeom prst="rect">
-            <a:avLst>
-              <a:gd name="adj" fmla="val 6818"/>
-            </a:avLst>
-          </a:prstGeom>
-          <a:solidFill>
-            <a:srgbClr val="F8FAFC"/>
-          </a:solidFill>
-          <a:ln w="12700">
-            <a:solidFill>
-              <a:srgbClr val="E2E8F0"/>
-            </a:solidFill>
             <a:prstDash val="dash"/>
           </a:ln>
         </p:spPr>
       </p:sp>
       <p:sp>
         <p:nvSpPr>
-          <p:cNvPr id="32" name="Text 30"/>
+          <p:cNvPr id="29" name="Text 27"/>
           <p:cNvSpPr/>
           <p:nvPr/>
         </p:nvSpPr>
@@ -19587,7 +19817,7 @@
                 <a:ea typeface="Trebuchet MS" pitchFamily="34" charset="-122"/>
                 <a:cs typeface="Trebuchet MS" pitchFamily="34" charset="-120"/>
               </a:rPr>
-              <a:t>overclouded</a:t>
+              <a:t>cloudburst</a:t>
             </a:r>
             <a:endParaRPr lang="en-US" sz="2800" dirty="0"/>
           </a:p>
@@ -19667,7 +19897,7 @@
         </p:nvSpPr>
         <p:spPr>
           <a:xfrm>
-            <a:off x="2221992" y="2258568"/>
+            <a:off x="2938272" y="2258568"/>
             <a:ext cx="1828800" cy="292608"/>
           </a:xfrm>
           <a:prstGeom prst="rect">
@@ -19676,11 +19906,11 @@
             </a:avLst>
           </a:prstGeom>
           <a:solidFill>
-            <a:srgbClr val="DDD6FE"/>
+            <a:srgbClr val="CCFBF1"/>
           </a:solidFill>
           <a:ln w="19050">
             <a:solidFill>
-              <a:srgbClr val="7C3AED"/>
+              <a:srgbClr val="0D9488"/>
             </a:solidFill>
             <a:prstDash val="solid"/>
           </a:ln>
@@ -19701,7 +19931,7 @@
         </p:nvSpPr>
         <p:spPr>
           <a:xfrm>
-            <a:off x="2221992" y="2258568"/>
+            <a:off x="2938272" y="2258568"/>
             <a:ext cx="1828800" cy="292608"/>
           </a:xfrm>
           <a:prstGeom prst="rect">
@@ -19720,13 +19950,13 @@
             <a:r>
               <a:rPr lang="en-US" sz="1300" b="1" dirty="0">
                 <a:solidFill>
-                  <a:srgbClr val="4C1D95"/>
+                  <a:srgbClr val="0F766E"/>
                 </a:solidFill>
                 <a:latin typeface="Trebuchet MS" pitchFamily="34" charset="0"/>
                 <a:ea typeface="Trebuchet MS" pitchFamily="34" charset="-122"/>
                 <a:cs typeface="Trebuchet MS" pitchFamily="34" charset="-120"/>
               </a:rPr>
-              <a:t>over</a:t>
+              <a:t>cloud</a:t>
             </a:r>
             <a:endParaRPr lang="en-US" sz="1300" dirty="0"/>
           </a:p>
@@ -19740,7 +19970,7 @@
         </p:nvSpPr>
         <p:spPr>
           <a:xfrm>
-            <a:off x="2221992" y="2569464"/>
+            <a:off x="2938272" y="2569464"/>
             <a:ext cx="1828800" cy="201168"/>
           </a:xfrm>
           <a:prstGeom prst="rect">
@@ -19765,7 +19995,7 @@
                 <a:ea typeface="Calibri" pitchFamily="34" charset="-122"/>
                 <a:cs typeface="Calibri" pitchFamily="34" charset="-120"/>
               </a:rPr>
-              <a:t>above or too much</a:t>
+              <a:t>mass of water vapour</a:t>
             </a:r>
             <a:endParaRPr lang="en-US" sz="850" dirty="0"/>
           </a:p>
@@ -19779,7 +20009,7 @@
         </p:nvSpPr>
         <p:spPr>
           <a:xfrm>
-            <a:off x="4370832" y="2258568"/>
+            <a:off x="5803392" y="2258568"/>
             <a:ext cx="1828800" cy="292608"/>
           </a:xfrm>
           <a:prstGeom prst="rect">
@@ -19788,11 +20018,11 @@
             </a:avLst>
           </a:prstGeom>
           <a:solidFill>
-            <a:srgbClr val="CCFBF1"/>
+            <a:srgbClr val="FCE7F3"/>
           </a:solidFill>
           <a:ln w="19050">
             <a:solidFill>
-              <a:srgbClr val="0D9488"/>
+              <a:srgbClr val="DB2777"/>
             </a:solidFill>
             <a:prstDash val="solid"/>
           </a:ln>
@@ -19813,7 +20043,7 @@
         </p:nvSpPr>
         <p:spPr>
           <a:xfrm>
-            <a:off x="4370832" y="2258568"/>
+            <a:off x="5803392" y="2258568"/>
             <a:ext cx="1828800" cy="292608"/>
           </a:xfrm>
           <a:prstGeom prst="rect">
@@ -19832,13 +20062,13 @@
             <a:r>
               <a:rPr lang="en-US" sz="1300" b="1" dirty="0">
                 <a:solidFill>
-                  <a:srgbClr val="0F766E"/>
+                  <a:srgbClr val="9D174D"/>
                 </a:solidFill>
                 <a:latin typeface="Trebuchet MS" pitchFamily="34" charset="0"/>
                 <a:ea typeface="Trebuchet MS" pitchFamily="34" charset="-122"/>
                 <a:cs typeface="Trebuchet MS" pitchFamily="34" charset="-120"/>
               </a:rPr>
-              <a:t>cloud</a:t>
+              <a:t>burst</a:t>
             </a:r>
             <a:endParaRPr lang="en-US" sz="1300" dirty="0"/>
           </a:p>
@@ -19852,7 +20082,7 @@
         </p:nvSpPr>
         <p:spPr>
           <a:xfrm>
-            <a:off x="4370832" y="2569464"/>
+            <a:off x="5803392" y="2569464"/>
             <a:ext cx="1828800" cy="201168"/>
           </a:xfrm>
           <a:prstGeom prst="rect">
@@ -19877,7 +20107,7 @@
                 <a:ea typeface="Calibri" pitchFamily="34" charset="-122"/>
                 <a:cs typeface="Calibri" pitchFamily="34" charset="-120"/>
               </a:rPr>
-              <a:t>mass of water vapour</a:t>
+              <a:t>a sudden breaking out or release</a:t>
             </a:r>
             <a:endParaRPr lang="en-US" sz="850" dirty="0"/>
           </a:p>
@@ -19891,30 +20121,23 @@
         </p:nvSpPr>
         <p:spPr>
           <a:xfrm>
-            <a:off x="6519672" y="2258568"/>
-            <a:ext cx="1828800" cy="292608"/>
+            <a:off x="365760" y="3273552"/>
+            <a:ext cx="1371600" cy="658368"/>
           </a:xfrm>
           <a:prstGeom prst="rect">
             <a:avLst>
-              <a:gd name="adj" fmla="val 25000"/>
+              <a:gd name="adj" fmla="val 8333"/>
             </a:avLst>
           </a:prstGeom>
           <a:solidFill>
-            <a:srgbClr val="FCE7F3"/>
-          </a:solidFill>
-          <a:ln w="19050">
-            <a:solidFill>
-              <a:srgbClr val="DB2777"/>
-            </a:solidFill>
-            <a:prstDash val="solid"/>
-          </a:ln>
-          <a:effectLst>
-            <a:outerShdw sx="100000" sy="100000" kx="0" ky="0" algn="bl" rotWithShape="0" blurRad="101600" dist="38100" dir="8100000">
-              <a:srgbClr val="000000">
-                <a:alpha val="12000"/>
-              </a:srgbClr>
-            </a:outerShdw>
-          </a:effectLst>
+            <a:srgbClr val="E2E8F0"/>
+          </a:solidFill>
+          <a:ln w="12700">
+            <a:solidFill>
+              <a:srgbClr val="E2E8F0"/>
+            </a:solidFill>
+            <a:prstDash val="solid"/>
+          </a:ln>
         </p:spPr>
       </p:sp>
       <p:sp>
@@ -19925,8 +20148,8 @@
         </p:nvSpPr>
         <p:spPr>
           <a:xfrm>
-            <a:off x="6519672" y="2258568"/>
-            <a:ext cx="1828800" cy="292608"/>
+            <a:off x="365760" y="3273552"/>
+            <a:ext cx="1371600" cy="658368"/>
           </a:xfrm>
           <a:prstGeom prst="rect">
             <a:avLst/>
@@ -19942,69 +20165,30 @@
               <a:buNone/>
             </a:pPr>
             <a:r>
-              <a:rPr lang="en-US" sz="1300" b="1" dirty="0">
-                <a:solidFill>
-                  <a:srgbClr val="9D174D"/>
+              <a:rPr lang="en-US" sz="1100" b="1" dirty="0">
+                <a:solidFill>
+                  <a:srgbClr val="475569"/>
                 </a:solidFill>
                 <a:latin typeface="Trebuchet MS" pitchFamily="34" charset="0"/>
                 <a:ea typeface="Trebuchet MS" pitchFamily="34" charset="-122"/>
                 <a:cs typeface="Trebuchet MS" pitchFamily="34" charset="-120"/>
               </a:rPr>
-              <a:t>ed</a:t>
-            </a:r>
-            <a:endParaRPr lang="en-US" sz="1300" dirty="0"/>
-          </a:p>
-        </p:txBody>
-      </p:sp>
-      <p:sp>
-        <p:nvSpPr>
-          <p:cNvPr id="24" name="Text 22"/>
-          <p:cNvSpPr/>
-          <p:nvPr/>
-        </p:nvSpPr>
-        <p:spPr>
-          <a:xfrm>
-            <a:off x="6519672" y="2569464"/>
-            <a:ext cx="1828800" cy="201168"/>
-          </a:xfrm>
-          <a:prstGeom prst="rect">
-            <a:avLst/>
-          </a:prstGeom>
-          <a:noFill/>
-          <a:ln/>
-        </p:spPr>
-        <p:txBody>
-          <a:bodyPr wrap="square" lIns="0" tIns="0" rIns="0" bIns="0" rtlCol="0" anchor="t"/>
-          <a:lstStyle/>
-          <a:p>
-            <a:pPr algn="ctr" indent="0" marL="0">
-              <a:buNone/>
-            </a:pPr>
-            <a:r>
-              <a:rPr lang="en-US" sz="850" dirty="0">
-                <a:solidFill>
-                  <a:srgbClr val="475569"/>
-                </a:solidFill>
-                <a:latin typeface="Calibri" pitchFamily="34" charset="0"/>
-                <a:ea typeface="Calibri" pitchFamily="34" charset="-122"/>
-                <a:cs typeface="Calibri" pitchFamily="34" charset="-120"/>
-              </a:rPr>
-              <a:t>past tense or completed action</a:t>
-            </a:r>
-            <a:endParaRPr lang="en-US" sz="850" dirty="0"/>
-          </a:p>
-        </p:txBody>
-      </p:sp>
-      <p:sp>
-        <p:nvSpPr>
-          <p:cNvPr id="25" name="Shape 23"/>
-          <p:cNvSpPr/>
-          <p:nvPr/>
-        </p:nvSpPr>
-        <p:spPr>
-          <a:xfrm>
-            <a:off x="365760" y="3273552"/>
-            <a:ext cx="1371600" cy="658368"/>
+              <a:t>Syllables</a:t>
+            </a:r>
+            <a:endParaRPr lang="en-US" sz="1100" dirty="0"/>
+          </a:p>
+        </p:txBody>
+      </p:sp>
+      <p:sp>
+        <p:nvSpPr>
+          <p:cNvPr id="24" name="Shape 22"/>
+          <p:cNvSpPr/>
+          <p:nvPr/>
+        </p:nvSpPr>
+        <p:spPr>
+          <a:xfrm>
+            <a:off x="1874520" y="3273552"/>
+            <a:ext cx="6903720" cy="658368"/>
           </a:xfrm>
           <a:prstGeom prst="rect">
             <a:avLst>
@@ -20012,11 +20196,38 @@
             </a:avLst>
           </a:prstGeom>
           <a:solidFill>
-            <a:srgbClr val="E2E8F0"/>
-          </a:solidFill>
-          <a:ln w="12700">
-            <a:solidFill>
-              <a:srgbClr val="E2E8F0"/>
+            <a:srgbClr val="CCFBF1"/>
+          </a:solidFill>
+          <a:ln w="12700">
+            <a:solidFill>
+              <a:srgbClr val="0D9488"/>
+            </a:solidFill>
+            <a:prstDash val="solid"/>
+          </a:ln>
+        </p:spPr>
+      </p:sp>
+      <p:sp>
+        <p:nvSpPr>
+          <p:cNvPr id="25" name="Shape 23"/>
+          <p:cNvSpPr/>
+          <p:nvPr/>
+        </p:nvSpPr>
+        <p:spPr>
+          <a:xfrm>
+            <a:off x="2999232" y="3364992"/>
+            <a:ext cx="1645920" cy="475488"/>
+          </a:xfrm>
+          <a:prstGeom prst="rect">
+            <a:avLst>
+              <a:gd name="adj" fmla="val 9615"/>
+            </a:avLst>
+          </a:prstGeom>
+          <a:solidFill>
+            <a:srgbClr val="FFFFFF"/>
+          </a:solidFill>
+          <a:ln w="12700">
+            <a:solidFill>
+              <a:srgbClr val="0D9488"/>
             </a:solidFill>
             <a:prstDash val="solid"/>
           </a:ln>
@@ -20030,8 +20241,8 @@
         </p:nvSpPr>
         <p:spPr>
           <a:xfrm>
-            <a:off x="365760" y="3273552"/>
-            <a:ext cx="1371600" cy="658368"/>
+            <a:off x="2999232" y="3364992"/>
+            <a:ext cx="1645920" cy="475488"/>
           </a:xfrm>
           <a:prstGeom prst="rect">
             <a:avLst/>
@@ -20047,46 +20258,58 @@
               <a:buNone/>
             </a:pPr>
             <a:r>
-              <a:rPr lang="en-US" sz="1100" b="1" dirty="0">
-                <a:solidFill>
-                  <a:srgbClr val="475569"/>
+              <a:rPr lang="en-US" sz="1400" b="1" dirty="0">
+                <a:solidFill>
+                  <a:srgbClr val="0D9488"/>
                 </a:solidFill>
                 <a:latin typeface="Trebuchet MS" pitchFamily="34" charset="0"/>
                 <a:ea typeface="Trebuchet MS" pitchFamily="34" charset="-122"/>
                 <a:cs typeface="Trebuchet MS" pitchFamily="34" charset="-120"/>
               </a:rPr>
-              <a:t>Syllables</a:t>
-            </a:r>
-            <a:endParaRPr lang="en-US" sz="1100" dirty="0"/>
-          </a:p>
-        </p:txBody>
-      </p:sp>
-      <p:sp>
-        <p:nvSpPr>
-          <p:cNvPr id="27" name="Shape 25"/>
-          <p:cNvSpPr/>
-          <p:nvPr/>
-        </p:nvSpPr>
-        <p:spPr>
-          <a:xfrm>
-            <a:off x="1874520" y="3273552"/>
-            <a:ext cx="6903720" cy="658368"/>
-          </a:xfrm>
-          <a:prstGeom prst="rect">
-            <a:avLst>
-              <a:gd name="adj" fmla="val 8333"/>
-            </a:avLst>
-          </a:prstGeom>
-          <a:solidFill>
-            <a:srgbClr val="CCFBF1"/>
-          </a:solidFill>
-          <a:ln w="12700">
-            <a:solidFill>
-              <a:srgbClr val="0D9488"/>
-            </a:solidFill>
-            <a:prstDash val="solid"/>
-          </a:ln>
-        </p:spPr>
+              <a:t>cloud</a:t>
+            </a:r>
+            <a:endParaRPr lang="en-US" sz="1400" dirty="0"/>
+          </a:p>
+        </p:txBody>
+      </p:sp>
+      <p:sp>
+        <p:nvSpPr>
+          <p:cNvPr id="27" name="Text 25"/>
+          <p:cNvSpPr/>
+          <p:nvPr/>
+        </p:nvSpPr>
+        <p:spPr>
+          <a:xfrm>
+            <a:off x="4645152" y="3364992"/>
+            <a:ext cx="1097280" cy="475488"/>
+          </a:xfrm>
+          <a:prstGeom prst="rect">
+            <a:avLst/>
+          </a:prstGeom>
+          <a:noFill/>
+          <a:ln/>
+        </p:spPr>
+        <p:txBody>
+          <a:bodyPr wrap="square" lIns="0" tIns="0" rIns="0" bIns="0" rtlCol="0" anchor="ctr"/>
+          <a:lstStyle/>
+          <a:p>
+            <a:pPr algn="ctr" indent="0" marL="0">
+              <a:buNone/>
+            </a:pPr>
+            <a:r>
+              <a:rPr lang="en-US" sz="1600" b="1" dirty="0">
+                <a:solidFill>
+                  <a:srgbClr val="0D9488"/>
+                </a:solidFill>
+                <a:latin typeface="Trebuchet MS" pitchFamily="34" charset="0"/>
+                <a:ea typeface="Trebuchet MS" pitchFamily="34" charset="-122"/>
+                <a:cs typeface="Trebuchet MS" pitchFamily="34" charset="-120"/>
+              </a:rPr>
+              <a:t>·</a:t>
+            </a:r>
+            <a:endParaRPr lang="en-US" sz="1600" dirty="0"/>
+          </a:p>
+        </p:txBody>
       </p:sp>
       <p:sp>
         <p:nvSpPr>
@@ -20096,8 +20319,8 @@
         </p:nvSpPr>
         <p:spPr>
           <a:xfrm>
-            <a:off x="1975104" y="3364992"/>
-            <a:ext cx="1554480" cy="475488"/>
+            <a:off x="5742432" y="3364992"/>
+            <a:ext cx="1645920" cy="475488"/>
           </a:xfrm>
           <a:prstGeom prst="rect">
             <a:avLst>
@@ -20123,8 +20346,8 @@
         </p:nvSpPr>
         <p:spPr>
           <a:xfrm>
-            <a:off x="1975104" y="3364992"/>
-            <a:ext cx="1554480" cy="475488"/>
+            <a:off x="5742432" y="3364992"/>
+            <a:ext cx="1645920" cy="475488"/>
           </a:xfrm>
           <a:prstGeom prst="rect">
             <a:avLst/>
@@ -20148,7 +20371,7 @@
                 <a:ea typeface="Trebuchet MS" pitchFamily="34" charset="-122"/>
                 <a:cs typeface="Trebuchet MS" pitchFamily="34" charset="-120"/>
               </a:rPr>
-              <a:t>o</a:t>
+              <a:t>burst</a:t>
             </a:r>
             <a:endParaRPr lang="en-US" sz="1400" dirty="0"/>
           </a:p>
@@ -20156,14 +20379,41 @@
       </p:sp>
       <p:sp>
         <p:nvSpPr>
-          <p:cNvPr id="30" name="Text 28"/>
-          <p:cNvSpPr/>
-          <p:nvPr/>
-        </p:nvSpPr>
-        <p:spPr>
-          <a:xfrm>
-            <a:off x="3529584" y="3364992"/>
-            <a:ext cx="73152" cy="475488"/>
+          <p:cNvPr id="30" name="Shape 28"/>
+          <p:cNvSpPr/>
+          <p:nvPr/>
+        </p:nvSpPr>
+        <p:spPr>
+          <a:xfrm>
+            <a:off x="365760" y="4096512"/>
+            <a:ext cx="1371600" cy="804672"/>
+          </a:xfrm>
+          <a:prstGeom prst="rect">
+            <a:avLst>
+              <a:gd name="adj" fmla="val 6818"/>
+            </a:avLst>
+          </a:prstGeom>
+          <a:solidFill>
+            <a:srgbClr val="E2E8F0"/>
+          </a:solidFill>
+          <a:ln w="12700">
+            <a:solidFill>
+              <a:srgbClr val="E2E8F0"/>
+            </a:solidFill>
+            <a:prstDash val="solid"/>
+          </a:ln>
+        </p:spPr>
+      </p:sp>
+      <p:sp>
+        <p:nvSpPr>
+          <p:cNvPr id="31" name="Text 29"/>
+          <p:cNvSpPr/>
+          <p:nvPr/>
+        </p:nvSpPr>
+        <p:spPr>
+          <a:xfrm>
+            <a:off x="365760" y="4096512"/>
+            <a:ext cx="1371600" cy="804672"/>
           </a:xfrm>
           <a:prstGeom prst="rect">
             <a:avLst/>
@@ -20179,306 +20429,30 @@
               <a:buNone/>
             </a:pPr>
             <a:r>
-              <a:rPr lang="en-US" sz="1600" b="1" dirty="0">
-                <a:solidFill>
-                  <a:srgbClr val="0D9488"/>
+              <a:rPr lang="en-US" sz="1100" b="1" dirty="0">
+                <a:solidFill>
+                  <a:srgbClr val="475569"/>
                 </a:solidFill>
                 <a:latin typeface="Trebuchet MS" pitchFamily="34" charset="0"/>
                 <a:ea typeface="Trebuchet MS" pitchFamily="34" charset="-122"/>
                 <a:cs typeface="Trebuchet MS" pitchFamily="34" charset="-120"/>
               </a:rPr>
-              <a:t>·</a:t>
-            </a:r>
-            <a:endParaRPr lang="en-US" sz="1600" dirty="0"/>
-          </a:p>
-        </p:txBody>
-      </p:sp>
-      <p:sp>
-        <p:nvSpPr>
-          <p:cNvPr id="31" name="Shape 29"/>
-          <p:cNvSpPr/>
-          <p:nvPr/>
-        </p:nvSpPr>
-        <p:spPr>
-          <a:xfrm>
-            <a:off x="3602736" y="3364992"/>
-            <a:ext cx="1554480" cy="475488"/>
-          </a:xfrm>
-          <a:prstGeom prst="rect">
-            <a:avLst>
-              <a:gd name="adj" fmla="val 9615"/>
-            </a:avLst>
-          </a:prstGeom>
-          <a:solidFill>
-            <a:srgbClr val="FFFFFF"/>
-          </a:solidFill>
-          <a:ln w="12700">
-            <a:solidFill>
-              <a:srgbClr val="0D9488"/>
-            </a:solidFill>
-            <a:prstDash val="solid"/>
-          </a:ln>
-        </p:spPr>
-      </p:sp>
-      <p:sp>
-        <p:nvSpPr>
-          <p:cNvPr id="32" name="Text 30"/>
-          <p:cNvSpPr/>
-          <p:nvPr/>
-        </p:nvSpPr>
-        <p:spPr>
-          <a:xfrm>
-            <a:off x="3602736" y="3364992"/>
-            <a:ext cx="1554480" cy="475488"/>
-          </a:xfrm>
-          <a:prstGeom prst="rect">
-            <a:avLst/>
-          </a:prstGeom>
-          <a:noFill/>
-          <a:ln/>
-        </p:spPr>
-        <p:txBody>
-          <a:bodyPr wrap="square" lIns="0" tIns="0" rIns="0" bIns="0" rtlCol="0" anchor="ctr"/>
-          <a:lstStyle/>
-          <a:p>
-            <a:pPr algn="ctr" indent="0" marL="0">
-              <a:buNone/>
-            </a:pPr>
-            <a:r>
-              <a:rPr lang="en-US" sz="1400" b="1" dirty="0">
-                <a:solidFill>
-                  <a:srgbClr val="0D9488"/>
-                </a:solidFill>
-                <a:latin typeface="Trebuchet MS" pitchFamily="34" charset="0"/>
-                <a:ea typeface="Trebuchet MS" pitchFamily="34" charset="-122"/>
-                <a:cs typeface="Trebuchet MS" pitchFamily="34" charset="-120"/>
-              </a:rPr>
-              <a:t>ver</a:t>
-            </a:r>
-            <a:endParaRPr lang="en-US" sz="1400" dirty="0"/>
-          </a:p>
-        </p:txBody>
-      </p:sp>
-      <p:sp>
-        <p:nvSpPr>
-          <p:cNvPr id="33" name="Text 31"/>
-          <p:cNvSpPr/>
-          <p:nvPr/>
-        </p:nvSpPr>
-        <p:spPr>
-          <a:xfrm>
-            <a:off x="5157216" y="3364992"/>
-            <a:ext cx="73152" cy="475488"/>
-          </a:xfrm>
-          <a:prstGeom prst="rect">
-            <a:avLst/>
-          </a:prstGeom>
-          <a:noFill/>
-          <a:ln/>
-        </p:spPr>
-        <p:txBody>
-          <a:bodyPr wrap="square" lIns="0" tIns="0" rIns="0" bIns="0" rtlCol="0" anchor="ctr"/>
-          <a:lstStyle/>
-          <a:p>
-            <a:pPr algn="ctr" indent="0" marL="0">
-              <a:buNone/>
-            </a:pPr>
-            <a:r>
-              <a:rPr lang="en-US" sz="1600" b="1" dirty="0">
-                <a:solidFill>
-                  <a:srgbClr val="0D9488"/>
-                </a:solidFill>
-                <a:latin typeface="Trebuchet MS" pitchFamily="34" charset="0"/>
-                <a:ea typeface="Trebuchet MS" pitchFamily="34" charset="-122"/>
-                <a:cs typeface="Trebuchet MS" pitchFamily="34" charset="-120"/>
-              </a:rPr>
-              <a:t>·</a:t>
-            </a:r>
-            <a:endParaRPr lang="en-US" sz="1600" dirty="0"/>
-          </a:p>
-        </p:txBody>
-      </p:sp>
-      <p:sp>
-        <p:nvSpPr>
-          <p:cNvPr id="34" name="Shape 32"/>
-          <p:cNvSpPr/>
-          <p:nvPr/>
-        </p:nvSpPr>
-        <p:spPr>
-          <a:xfrm>
-            <a:off x="5230368" y="3364992"/>
-            <a:ext cx="1554480" cy="475488"/>
-          </a:xfrm>
-          <a:prstGeom prst="rect">
-            <a:avLst>
-              <a:gd name="adj" fmla="val 9615"/>
-            </a:avLst>
-          </a:prstGeom>
-          <a:solidFill>
-            <a:srgbClr val="FFFFFF"/>
-          </a:solidFill>
-          <a:ln w="12700">
-            <a:solidFill>
-              <a:srgbClr val="0D9488"/>
-            </a:solidFill>
-            <a:prstDash val="solid"/>
-          </a:ln>
-        </p:spPr>
-      </p:sp>
-      <p:sp>
-        <p:nvSpPr>
-          <p:cNvPr id="35" name="Text 33"/>
-          <p:cNvSpPr/>
-          <p:nvPr/>
-        </p:nvSpPr>
-        <p:spPr>
-          <a:xfrm>
-            <a:off x="5230368" y="3364992"/>
-            <a:ext cx="1554480" cy="475488"/>
-          </a:xfrm>
-          <a:prstGeom prst="rect">
-            <a:avLst/>
-          </a:prstGeom>
-          <a:noFill/>
-          <a:ln/>
-        </p:spPr>
-        <p:txBody>
-          <a:bodyPr wrap="square" lIns="0" tIns="0" rIns="0" bIns="0" rtlCol="0" anchor="ctr"/>
-          <a:lstStyle/>
-          <a:p>
-            <a:pPr algn="ctr" indent="0" marL="0">
-              <a:buNone/>
-            </a:pPr>
-            <a:r>
-              <a:rPr lang="en-US" sz="1400" b="1" dirty="0">
-                <a:solidFill>
-                  <a:srgbClr val="0D9488"/>
-                </a:solidFill>
-                <a:latin typeface="Trebuchet MS" pitchFamily="34" charset="0"/>
-                <a:ea typeface="Trebuchet MS" pitchFamily="34" charset="-122"/>
-                <a:cs typeface="Trebuchet MS" pitchFamily="34" charset="-120"/>
-              </a:rPr>
-              <a:t>cloud</a:t>
-            </a:r>
-            <a:endParaRPr lang="en-US" sz="1400" dirty="0"/>
-          </a:p>
-        </p:txBody>
-      </p:sp>
-      <p:sp>
-        <p:nvSpPr>
-          <p:cNvPr id="36" name="Text 34"/>
-          <p:cNvSpPr/>
-          <p:nvPr/>
-        </p:nvSpPr>
-        <p:spPr>
-          <a:xfrm>
-            <a:off x="6784848" y="3364992"/>
-            <a:ext cx="73152" cy="475488"/>
-          </a:xfrm>
-          <a:prstGeom prst="rect">
-            <a:avLst/>
-          </a:prstGeom>
-          <a:noFill/>
-          <a:ln/>
-        </p:spPr>
-        <p:txBody>
-          <a:bodyPr wrap="square" lIns="0" tIns="0" rIns="0" bIns="0" rtlCol="0" anchor="ctr"/>
-          <a:lstStyle/>
-          <a:p>
-            <a:pPr algn="ctr" indent="0" marL="0">
-              <a:buNone/>
-            </a:pPr>
-            <a:r>
-              <a:rPr lang="en-US" sz="1600" b="1" dirty="0">
-                <a:solidFill>
-                  <a:srgbClr val="0D9488"/>
-                </a:solidFill>
-                <a:latin typeface="Trebuchet MS" pitchFamily="34" charset="0"/>
-                <a:ea typeface="Trebuchet MS" pitchFamily="34" charset="-122"/>
-                <a:cs typeface="Trebuchet MS" pitchFamily="34" charset="-120"/>
-              </a:rPr>
-              <a:t>·</a:t>
-            </a:r>
-            <a:endParaRPr lang="en-US" sz="1600" dirty="0"/>
-          </a:p>
-        </p:txBody>
-      </p:sp>
-      <p:sp>
-        <p:nvSpPr>
-          <p:cNvPr id="37" name="Shape 35"/>
-          <p:cNvSpPr/>
-          <p:nvPr/>
-        </p:nvSpPr>
-        <p:spPr>
-          <a:xfrm>
-            <a:off x="6858000" y="3364992"/>
-            <a:ext cx="1554480" cy="475488"/>
-          </a:xfrm>
-          <a:prstGeom prst="rect">
-            <a:avLst>
-              <a:gd name="adj" fmla="val 9615"/>
-            </a:avLst>
-          </a:prstGeom>
-          <a:solidFill>
-            <a:srgbClr val="FFFFFF"/>
-          </a:solidFill>
-          <a:ln w="12700">
-            <a:solidFill>
-              <a:srgbClr val="0D9488"/>
-            </a:solidFill>
-            <a:prstDash val="solid"/>
-          </a:ln>
-        </p:spPr>
-      </p:sp>
-      <p:sp>
-        <p:nvSpPr>
-          <p:cNvPr id="38" name="Text 36"/>
-          <p:cNvSpPr/>
-          <p:nvPr/>
-        </p:nvSpPr>
-        <p:spPr>
-          <a:xfrm>
-            <a:off x="6858000" y="3364992"/>
-            <a:ext cx="1554480" cy="475488"/>
-          </a:xfrm>
-          <a:prstGeom prst="rect">
-            <a:avLst/>
-          </a:prstGeom>
-          <a:noFill/>
-          <a:ln/>
-        </p:spPr>
-        <p:txBody>
-          <a:bodyPr wrap="square" lIns="0" tIns="0" rIns="0" bIns="0" rtlCol="0" anchor="ctr"/>
-          <a:lstStyle/>
-          <a:p>
-            <a:pPr algn="ctr" indent="0" marL="0">
-              <a:buNone/>
-            </a:pPr>
-            <a:r>
-              <a:rPr lang="en-US" sz="1400" b="1" dirty="0">
-                <a:solidFill>
-                  <a:srgbClr val="0D9488"/>
-                </a:solidFill>
-                <a:latin typeface="Trebuchet MS" pitchFamily="34" charset="0"/>
-                <a:ea typeface="Trebuchet MS" pitchFamily="34" charset="-122"/>
-                <a:cs typeface="Trebuchet MS" pitchFamily="34" charset="-120"/>
-              </a:rPr>
-              <a:t>ed</a:t>
-            </a:r>
-            <a:endParaRPr lang="en-US" sz="1400" dirty="0"/>
-          </a:p>
-        </p:txBody>
-      </p:sp>
-      <p:sp>
-        <p:nvSpPr>
-          <p:cNvPr id="39" name="Shape 37"/>
-          <p:cNvSpPr/>
-          <p:nvPr/>
-        </p:nvSpPr>
-        <p:spPr>
-          <a:xfrm>
-            <a:off x="365760" y="4096512"/>
-            <a:ext cx="1371600" cy="804672"/>
+              <a:t>Phonemes</a:t>
+            </a:r>
+            <a:endParaRPr lang="en-US" sz="1100" dirty="0"/>
+          </a:p>
+        </p:txBody>
+      </p:sp>
+      <p:sp>
+        <p:nvSpPr>
+          <p:cNvPr id="32" name="Shape 30"/>
+          <p:cNvSpPr/>
+          <p:nvPr/>
+        </p:nvSpPr>
+        <p:spPr>
+          <a:xfrm>
+            <a:off x="1874520" y="4096512"/>
+            <a:ext cx="6903720" cy="804672"/>
           </a:xfrm>
           <a:prstGeom prst="rect">
             <a:avLst>
@@ -20486,85 +20460,19 @@
             </a:avLst>
           </a:prstGeom>
           <a:solidFill>
-            <a:srgbClr val="E2E8F0"/>
+            <a:srgbClr val="F8FAFC"/>
           </a:solidFill>
           <a:ln w="12700">
             <a:solidFill>
               <a:srgbClr val="E2E8F0"/>
             </a:solidFill>
-            <a:prstDash val="solid"/>
-          </a:ln>
-        </p:spPr>
-      </p:sp>
-      <p:sp>
-        <p:nvSpPr>
-          <p:cNvPr id="40" name="Text 38"/>
-          <p:cNvSpPr/>
-          <p:nvPr/>
-        </p:nvSpPr>
-        <p:spPr>
-          <a:xfrm>
-            <a:off x="365760" y="4096512"/>
-            <a:ext cx="1371600" cy="804672"/>
-          </a:xfrm>
-          <a:prstGeom prst="rect">
-            <a:avLst/>
-          </a:prstGeom>
-          <a:noFill/>
-          <a:ln/>
-        </p:spPr>
-        <p:txBody>
-          <a:bodyPr wrap="square" lIns="0" tIns="0" rIns="0" bIns="0" rtlCol="0" anchor="ctr"/>
-          <a:lstStyle/>
-          <a:p>
-            <a:pPr algn="ctr" indent="0" marL="0">
-              <a:buNone/>
-            </a:pPr>
-            <a:r>
-              <a:rPr lang="en-US" sz="1100" b="1" dirty="0">
-                <a:solidFill>
-                  <a:srgbClr val="475569"/>
-                </a:solidFill>
-                <a:latin typeface="Trebuchet MS" pitchFamily="34" charset="0"/>
-                <a:ea typeface="Trebuchet MS" pitchFamily="34" charset="-122"/>
-                <a:cs typeface="Trebuchet MS" pitchFamily="34" charset="-120"/>
-              </a:rPr>
-              <a:t>Phonemes</a:t>
-            </a:r>
-            <a:endParaRPr lang="en-US" sz="1100" dirty="0"/>
-          </a:p>
-        </p:txBody>
-      </p:sp>
-      <p:sp>
-        <p:nvSpPr>
-          <p:cNvPr id="41" name="Shape 39"/>
-          <p:cNvSpPr/>
-          <p:nvPr/>
-        </p:nvSpPr>
-        <p:spPr>
-          <a:xfrm>
-            <a:off x="1874520" y="4096512"/>
-            <a:ext cx="6903720" cy="804672"/>
-          </a:xfrm>
-          <a:prstGeom prst="rect">
-            <a:avLst>
-              <a:gd name="adj" fmla="val 6818"/>
-            </a:avLst>
-          </a:prstGeom>
-          <a:solidFill>
-            <a:srgbClr val="F8FAFC"/>
-          </a:solidFill>
-          <a:ln w="12700">
-            <a:solidFill>
-              <a:srgbClr val="E2E8F0"/>
-            </a:solidFill>
             <a:prstDash val="dash"/>
           </a:ln>
         </p:spPr>
       </p:sp>
       <p:sp>
         <p:nvSpPr>
-          <p:cNvPr id="42" name="Text 40"/>
+          <p:cNvPr id="33" name="Text 31"/>
           <p:cNvSpPr/>
           <p:nvPr/>
         </p:nvSpPr>
@@ -21026,7 +20934,7 @@
                 <a:ea typeface="Trebuchet MS" pitchFamily="34" charset="-122"/>
                 <a:cs typeface="Trebuchet MS" pitchFamily="34" charset="-120"/>
               </a:rPr>
-              <a:t>overclouded</a:t>
+              <a:t>cloudburst</a:t>
             </a:r>
             <a:endParaRPr lang="en-US" sz="2800" dirty="0"/>
           </a:p>
@@ -21106,7 +21014,7 @@
         </p:nvSpPr>
         <p:spPr>
           <a:xfrm>
-            <a:off x="2221992" y="2258568"/>
+            <a:off x="2938272" y="2258568"/>
             <a:ext cx="1828800" cy="292608"/>
           </a:xfrm>
           <a:prstGeom prst="rect">
@@ -21115,11 +21023,11 @@
             </a:avLst>
           </a:prstGeom>
           <a:solidFill>
-            <a:srgbClr val="DDD6FE"/>
+            <a:srgbClr val="CCFBF1"/>
           </a:solidFill>
           <a:ln w="19050">
             <a:solidFill>
-              <a:srgbClr val="7C3AED"/>
+              <a:srgbClr val="0D9488"/>
             </a:solidFill>
             <a:prstDash val="solid"/>
           </a:ln>
@@ -21140,7 +21048,7 @@
         </p:nvSpPr>
         <p:spPr>
           <a:xfrm>
-            <a:off x="2221992" y="2258568"/>
+            <a:off x="2938272" y="2258568"/>
             <a:ext cx="1828800" cy="292608"/>
           </a:xfrm>
           <a:prstGeom prst="rect">
@@ -21159,13 +21067,13 @@
             <a:r>
               <a:rPr lang="en-US" sz="1300" b="1" dirty="0">
                 <a:solidFill>
-                  <a:srgbClr val="4C1D95"/>
+                  <a:srgbClr val="0F766E"/>
                 </a:solidFill>
                 <a:latin typeface="Trebuchet MS" pitchFamily="34" charset="0"/>
                 <a:ea typeface="Trebuchet MS" pitchFamily="34" charset="-122"/>
                 <a:cs typeface="Trebuchet MS" pitchFamily="34" charset="-120"/>
               </a:rPr>
-              <a:t>over</a:t>
+              <a:t>cloud</a:t>
             </a:r>
             <a:endParaRPr lang="en-US" sz="1300" dirty="0"/>
           </a:p>
@@ -21179,7 +21087,7 @@
         </p:nvSpPr>
         <p:spPr>
           <a:xfrm>
-            <a:off x="2221992" y="2569464"/>
+            <a:off x="2938272" y="2569464"/>
             <a:ext cx="1828800" cy="201168"/>
           </a:xfrm>
           <a:prstGeom prst="rect">
@@ -21204,7 +21112,7 @@
                 <a:ea typeface="Calibri" pitchFamily="34" charset="-122"/>
                 <a:cs typeface="Calibri" pitchFamily="34" charset="-120"/>
               </a:rPr>
-              <a:t>above or too much</a:t>
+              <a:t>mass of water vapour</a:t>
             </a:r>
             <a:endParaRPr lang="en-US" sz="850" dirty="0"/>
           </a:p>
@@ -21218,7 +21126,7 @@
         </p:nvSpPr>
         <p:spPr>
           <a:xfrm>
-            <a:off x="4370832" y="2258568"/>
+            <a:off x="5803392" y="2258568"/>
             <a:ext cx="1828800" cy="292608"/>
           </a:xfrm>
           <a:prstGeom prst="rect">
@@ -21227,11 +21135,11 @@
             </a:avLst>
           </a:prstGeom>
           <a:solidFill>
-            <a:srgbClr val="CCFBF1"/>
+            <a:srgbClr val="FCE7F3"/>
           </a:solidFill>
           <a:ln w="19050">
             <a:solidFill>
-              <a:srgbClr val="0D9488"/>
+              <a:srgbClr val="DB2777"/>
             </a:solidFill>
             <a:prstDash val="solid"/>
           </a:ln>
@@ -21252,7 +21160,7 @@
         </p:nvSpPr>
         <p:spPr>
           <a:xfrm>
-            <a:off x="4370832" y="2258568"/>
+            <a:off x="5803392" y="2258568"/>
             <a:ext cx="1828800" cy="292608"/>
           </a:xfrm>
           <a:prstGeom prst="rect">
@@ -21271,13 +21179,13 @@
             <a:r>
               <a:rPr lang="en-US" sz="1300" b="1" dirty="0">
                 <a:solidFill>
-                  <a:srgbClr val="0F766E"/>
+                  <a:srgbClr val="9D174D"/>
                 </a:solidFill>
                 <a:latin typeface="Trebuchet MS" pitchFamily="34" charset="0"/>
                 <a:ea typeface="Trebuchet MS" pitchFamily="34" charset="-122"/>
                 <a:cs typeface="Trebuchet MS" pitchFamily="34" charset="-120"/>
               </a:rPr>
-              <a:t>cloud</a:t>
+              <a:t>burst</a:t>
             </a:r>
             <a:endParaRPr lang="en-US" sz="1300" dirty="0"/>
           </a:p>
@@ -21291,7 +21199,7 @@
         </p:nvSpPr>
         <p:spPr>
           <a:xfrm>
-            <a:off x="4370832" y="2569464"/>
+            <a:off x="5803392" y="2569464"/>
             <a:ext cx="1828800" cy="201168"/>
           </a:xfrm>
           <a:prstGeom prst="rect">
@@ -21316,7 +21224,7 @@
                 <a:ea typeface="Calibri" pitchFamily="34" charset="-122"/>
                 <a:cs typeface="Calibri" pitchFamily="34" charset="-120"/>
               </a:rPr>
-              <a:t>mass of water vapour</a:t>
+              <a:t>a sudden breaking out or release</a:t>
             </a:r>
             <a:endParaRPr lang="en-US" sz="850" dirty="0"/>
           </a:p>
@@ -21330,30 +21238,23 @@
         </p:nvSpPr>
         <p:spPr>
           <a:xfrm>
-            <a:off x="6519672" y="2258568"/>
-            <a:ext cx="1828800" cy="292608"/>
+            <a:off x="365760" y="3273552"/>
+            <a:ext cx="1371600" cy="658368"/>
           </a:xfrm>
           <a:prstGeom prst="rect">
             <a:avLst>
-              <a:gd name="adj" fmla="val 25000"/>
+              <a:gd name="adj" fmla="val 8333"/>
             </a:avLst>
           </a:prstGeom>
           <a:solidFill>
-            <a:srgbClr val="FCE7F3"/>
-          </a:solidFill>
-          <a:ln w="19050">
-            <a:solidFill>
-              <a:srgbClr val="DB2777"/>
-            </a:solidFill>
-            <a:prstDash val="solid"/>
-          </a:ln>
-          <a:effectLst>
-            <a:outerShdw sx="100000" sy="100000" kx="0" ky="0" algn="bl" rotWithShape="0" blurRad="101600" dist="38100" dir="8100000">
-              <a:srgbClr val="000000">
-                <a:alpha val="12000"/>
-              </a:srgbClr>
-            </a:outerShdw>
-          </a:effectLst>
+            <a:srgbClr val="E2E8F0"/>
+          </a:solidFill>
+          <a:ln w="12700">
+            <a:solidFill>
+              <a:srgbClr val="E2E8F0"/>
+            </a:solidFill>
+            <a:prstDash val="solid"/>
+          </a:ln>
         </p:spPr>
       </p:sp>
       <p:sp>
@@ -21364,8 +21265,8 @@
         </p:nvSpPr>
         <p:spPr>
           <a:xfrm>
-            <a:off x="6519672" y="2258568"/>
-            <a:ext cx="1828800" cy="292608"/>
+            <a:off x="365760" y="3273552"/>
+            <a:ext cx="1371600" cy="658368"/>
           </a:xfrm>
           <a:prstGeom prst="rect">
             <a:avLst/>
@@ -21381,69 +21282,30 @@
               <a:buNone/>
             </a:pPr>
             <a:r>
-              <a:rPr lang="en-US" sz="1300" b="1" dirty="0">
-                <a:solidFill>
-                  <a:srgbClr val="9D174D"/>
+              <a:rPr lang="en-US" sz="1100" b="1" dirty="0">
+                <a:solidFill>
+                  <a:srgbClr val="475569"/>
                 </a:solidFill>
                 <a:latin typeface="Trebuchet MS" pitchFamily="34" charset="0"/>
                 <a:ea typeface="Trebuchet MS" pitchFamily="34" charset="-122"/>
                 <a:cs typeface="Trebuchet MS" pitchFamily="34" charset="-120"/>
               </a:rPr>
-              <a:t>ed</a:t>
-            </a:r>
-            <a:endParaRPr lang="en-US" sz="1300" dirty="0"/>
-          </a:p>
-        </p:txBody>
-      </p:sp>
-      <p:sp>
-        <p:nvSpPr>
-          <p:cNvPr id="24" name="Text 22"/>
-          <p:cNvSpPr/>
-          <p:nvPr/>
-        </p:nvSpPr>
-        <p:spPr>
-          <a:xfrm>
-            <a:off x="6519672" y="2569464"/>
-            <a:ext cx="1828800" cy="201168"/>
-          </a:xfrm>
-          <a:prstGeom prst="rect">
-            <a:avLst/>
-          </a:prstGeom>
-          <a:noFill/>
-          <a:ln/>
-        </p:spPr>
-        <p:txBody>
-          <a:bodyPr wrap="square" lIns="0" tIns="0" rIns="0" bIns="0" rtlCol="0" anchor="t"/>
-          <a:lstStyle/>
-          <a:p>
-            <a:pPr algn="ctr" indent="0" marL="0">
-              <a:buNone/>
-            </a:pPr>
-            <a:r>
-              <a:rPr lang="en-US" sz="850" dirty="0">
-                <a:solidFill>
-                  <a:srgbClr val="475569"/>
-                </a:solidFill>
-                <a:latin typeface="Calibri" pitchFamily="34" charset="0"/>
-                <a:ea typeface="Calibri" pitchFamily="34" charset="-122"/>
-                <a:cs typeface="Calibri" pitchFamily="34" charset="-120"/>
-              </a:rPr>
-              <a:t>past tense or completed action</a:t>
-            </a:r>
-            <a:endParaRPr lang="en-US" sz="850" dirty="0"/>
-          </a:p>
-        </p:txBody>
-      </p:sp>
-      <p:sp>
-        <p:nvSpPr>
-          <p:cNvPr id="25" name="Shape 23"/>
-          <p:cNvSpPr/>
-          <p:nvPr/>
-        </p:nvSpPr>
-        <p:spPr>
-          <a:xfrm>
-            <a:off x="365760" y="3273552"/>
-            <a:ext cx="1371600" cy="658368"/>
+              <a:t>Syllables</a:t>
+            </a:r>
+            <a:endParaRPr lang="en-US" sz="1100" dirty="0"/>
+          </a:p>
+        </p:txBody>
+      </p:sp>
+      <p:sp>
+        <p:nvSpPr>
+          <p:cNvPr id="24" name="Shape 22"/>
+          <p:cNvSpPr/>
+          <p:nvPr/>
+        </p:nvSpPr>
+        <p:spPr>
+          <a:xfrm>
+            <a:off x="1874520" y="3273552"/>
+            <a:ext cx="6903720" cy="658368"/>
           </a:xfrm>
           <a:prstGeom prst="rect">
             <a:avLst>
@@ -21451,11 +21313,38 @@
             </a:avLst>
           </a:prstGeom>
           <a:solidFill>
-            <a:srgbClr val="E2E8F0"/>
-          </a:solidFill>
-          <a:ln w="12700">
-            <a:solidFill>
-              <a:srgbClr val="E2E8F0"/>
+            <a:srgbClr val="CCFBF1"/>
+          </a:solidFill>
+          <a:ln w="12700">
+            <a:solidFill>
+              <a:srgbClr val="0D9488"/>
+            </a:solidFill>
+            <a:prstDash val="solid"/>
+          </a:ln>
+        </p:spPr>
+      </p:sp>
+      <p:sp>
+        <p:nvSpPr>
+          <p:cNvPr id="25" name="Shape 23"/>
+          <p:cNvSpPr/>
+          <p:nvPr/>
+        </p:nvSpPr>
+        <p:spPr>
+          <a:xfrm>
+            <a:off x="2999232" y="3364992"/>
+            <a:ext cx="1645920" cy="475488"/>
+          </a:xfrm>
+          <a:prstGeom prst="rect">
+            <a:avLst>
+              <a:gd name="adj" fmla="val 9615"/>
+            </a:avLst>
+          </a:prstGeom>
+          <a:solidFill>
+            <a:srgbClr val="FFFFFF"/>
+          </a:solidFill>
+          <a:ln w="12700">
+            <a:solidFill>
+              <a:srgbClr val="0D9488"/>
             </a:solidFill>
             <a:prstDash val="solid"/>
           </a:ln>
@@ -21469,8 +21358,8 @@
         </p:nvSpPr>
         <p:spPr>
           <a:xfrm>
-            <a:off x="365760" y="3273552"/>
-            <a:ext cx="1371600" cy="658368"/>
+            <a:off x="2999232" y="3364992"/>
+            <a:ext cx="1645920" cy="475488"/>
           </a:xfrm>
           <a:prstGeom prst="rect">
             <a:avLst/>
@@ -21486,15 +21375,186 @@
               <a:buNone/>
             </a:pPr>
             <a:r>
-              <a:rPr lang="en-US" sz="1100" b="1" dirty="0">
-                <a:solidFill>
-                  <a:srgbClr val="475569"/>
+              <a:rPr lang="en-US" sz="1400" b="1" dirty="0">
+                <a:solidFill>
+                  <a:srgbClr val="0D9488"/>
                 </a:solidFill>
                 <a:latin typeface="Trebuchet MS" pitchFamily="34" charset="0"/>
                 <a:ea typeface="Trebuchet MS" pitchFamily="34" charset="-122"/>
                 <a:cs typeface="Trebuchet MS" pitchFamily="34" charset="-120"/>
               </a:rPr>
-              <a:t>Syllables</a:t>
+              <a:t>cloud</a:t>
+            </a:r>
+            <a:endParaRPr lang="en-US" sz="1400" dirty="0"/>
+          </a:p>
+        </p:txBody>
+      </p:sp>
+      <p:sp>
+        <p:nvSpPr>
+          <p:cNvPr id="27" name="Text 25"/>
+          <p:cNvSpPr/>
+          <p:nvPr/>
+        </p:nvSpPr>
+        <p:spPr>
+          <a:xfrm>
+            <a:off x="4645152" y="3364992"/>
+            <a:ext cx="1097280" cy="475488"/>
+          </a:xfrm>
+          <a:prstGeom prst="rect">
+            <a:avLst/>
+          </a:prstGeom>
+          <a:noFill/>
+          <a:ln/>
+        </p:spPr>
+        <p:txBody>
+          <a:bodyPr wrap="square" lIns="0" tIns="0" rIns="0" bIns="0" rtlCol="0" anchor="ctr"/>
+          <a:lstStyle/>
+          <a:p>
+            <a:pPr algn="ctr" indent="0" marL="0">
+              <a:buNone/>
+            </a:pPr>
+            <a:r>
+              <a:rPr lang="en-US" sz="1600" b="1" dirty="0">
+                <a:solidFill>
+                  <a:srgbClr val="0D9488"/>
+                </a:solidFill>
+                <a:latin typeface="Trebuchet MS" pitchFamily="34" charset="0"/>
+                <a:ea typeface="Trebuchet MS" pitchFamily="34" charset="-122"/>
+                <a:cs typeface="Trebuchet MS" pitchFamily="34" charset="-120"/>
+              </a:rPr>
+              <a:t>·</a:t>
+            </a:r>
+            <a:endParaRPr lang="en-US" sz="1600" dirty="0"/>
+          </a:p>
+        </p:txBody>
+      </p:sp>
+      <p:sp>
+        <p:nvSpPr>
+          <p:cNvPr id="28" name="Shape 26"/>
+          <p:cNvSpPr/>
+          <p:nvPr/>
+        </p:nvSpPr>
+        <p:spPr>
+          <a:xfrm>
+            <a:off x="5742432" y="3364992"/>
+            <a:ext cx="1645920" cy="475488"/>
+          </a:xfrm>
+          <a:prstGeom prst="rect">
+            <a:avLst>
+              <a:gd name="adj" fmla="val 9615"/>
+            </a:avLst>
+          </a:prstGeom>
+          <a:solidFill>
+            <a:srgbClr val="FFFFFF"/>
+          </a:solidFill>
+          <a:ln w="12700">
+            <a:solidFill>
+              <a:srgbClr val="0D9488"/>
+            </a:solidFill>
+            <a:prstDash val="solid"/>
+          </a:ln>
+        </p:spPr>
+      </p:sp>
+      <p:sp>
+        <p:nvSpPr>
+          <p:cNvPr id="29" name="Text 27"/>
+          <p:cNvSpPr/>
+          <p:nvPr/>
+        </p:nvSpPr>
+        <p:spPr>
+          <a:xfrm>
+            <a:off x="5742432" y="3364992"/>
+            <a:ext cx="1645920" cy="475488"/>
+          </a:xfrm>
+          <a:prstGeom prst="rect">
+            <a:avLst/>
+          </a:prstGeom>
+          <a:noFill/>
+          <a:ln/>
+        </p:spPr>
+        <p:txBody>
+          <a:bodyPr wrap="square" lIns="0" tIns="0" rIns="0" bIns="0" rtlCol="0" anchor="ctr"/>
+          <a:lstStyle/>
+          <a:p>
+            <a:pPr algn="ctr" indent="0" marL="0">
+              <a:buNone/>
+            </a:pPr>
+            <a:r>
+              <a:rPr lang="en-US" sz="1400" b="1" dirty="0">
+                <a:solidFill>
+                  <a:srgbClr val="0D9488"/>
+                </a:solidFill>
+                <a:latin typeface="Trebuchet MS" pitchFamily="34" charset="0"/>
+                <a:ea typeface="Trebuchet MS" pitchFamily="34" charset="-122"/>
+                <a:cs typeface="Trebuchet MS" pitchFamily="34" charset="-120"/>
+              </a:rPr>
+              <a:t>burst</a:t>
+            </a:r>
+            <a:endParaRPr lang="en-US" sz="1400" dirty="0"/>
+          </a:p>
+        </p:txBody>
+      </p:sp>
+      <p:sp>
+        <p:nvSpPr>
+          <p:cNvPr id="30" name="Shape 28"/>
+          <p:cNvSpPr/>
+          <p:nvPr/>
+        </p:nvSpPr>
+        <p:spPr>
+          <a:xfrm>
+            <a:off x="365760" y="4096512"/>
+            <a:ext cx="1371600" cy="804672"/>
+          </a:xfrm>
+          <a:prstGeom prst="rect">
+            <a:avLst>
+              <a:gd name="adj" fmla="val 6818"/>
+            </a:avLst>
+          </a:prstGeom>
+          <a:solidFill>
+            <a:srgbClr val="E2E8F0"/>
+          </a:solidFill>
+          <a:ln w="12700">
+            <a:solidFill>
+              <a:srgbClr val="E2E8F0"/>
+            </a:solidFill>
+            <a:prstDash val="solid"/>
+          </a:ln>
+        </p:spPr>
+      </p:sp>
+      <p:sp>
+        <p:nvSpPr>
+          <p:cNvPr id="31" name="Text 29"/>
+          <p:cNvSpPr/>
+          <p:nvPr/>
+        </p:nvSpPr>
+        <p:spPr>
+          <a:xfrm>
+            <a:off x="365760" y="4096512"/>
+            <a:ext cx="1371600" cy="804672"/>
+          </a:xfrm>
+          <a:prstGeom prst="rect">
+            <a:avLst/>
+          </a:prstGeom>
+          <a:noFill/>
+          <a:ln/>
+        </p:spPr>
+        <p:txBody>
+          <a:bodyPr wrap="square" lIns="0" tIns="0" rIns="0" bIns="0" rtlCol="0" anchor="ctr"/>
+          <a:lstStyle/>
+          <a:p>
+            <a:pPr algn="ctr" indent="0" marL="0">
+              <a:buNone/>
+            </a:pPr>
+            <a:r>
+              <a:rPr lang="en-US" sz="1100" b="1" dirty="0">
+                <a:solidFill>
+                  <a:srgbClr val="475569"/>
+                </a:solidFill>
+                <a:latin typeface="Trebuchet MS" pitchFamily="34" charset="0"/>
+                <a:ea typeface="Trebuchet MS" pitchFamily="34" charset="-122"/>
+                <a:cs typeface="Trebuchet MS" pitchFamily="34" charset="-120"/>
+              </a:rPr>
+              <a:t>Phonemes</a:t>
             </a:r>
             <a:endParaRPr lang="en-US" sz="1100" dirty="0"/>
           </a:p>
@@ -21502,13 +21562,13 @@
       </p:sp>
       <p:sp>
         <p:nvSpPr>
-          <p:cNvPr id="27" name="Shape 25"/>
-          <p:cNvSpPr/>
-          <p:nvPr/>
-        </p:nvSpPr>
-        <p:spPr>
-          <a:xfrm>
-            <a:off x="1874520" y="3273552"/>
+          <p:cNvPr id="32" name="Shape 30"/>
+          <p:cNvSpPr/>
+          <p:nvPr/>
+        </p:nvSpPr>
+        <p:spPr>
+          <a:xfrm>
+            <a:off x="1874520" y="4096512"/>
             <a:ext cx="6903720" cy="658368"/>
           </a:xfrm>
           <a:prstGeom prst="rect">
@@ -21517,30 +21577,30 @@
             </a:avLst>
           </a:prstGeom>
           <a:solidFill>
-            <a:srgbClr val="CCFBF1"/>
-          </a:solidFill>
-          <a:ln w="12700">
-            <a:solidFill>
-              <a:srgbClr val="0D9488"/>
-            </a:solidFill>
-            <a:prstDash val="solid"/>
-          </a:ln>
-        </p:spPr>
-      </p:sp>
-      <p:sp>
-        <p:nvSpPr>
-          <p:cNvPr id="28" name="Shape 26"/>
-          <p:cNvSpPr/>
-          <p:nvPr/>
-        </p:nvSpPr>
-        <p:spPr>
-          <a:xfrm>
-            <a:off x="1975104" y="3364992"/>
-            <a:ext cx="1554480" cy="475488"/>
+            <a:srgbClr val="FCE7F3"/>
+          </a:solidFill>
+          <a:ln w="12700">
+            <a:solidFill>
+              <a:srgbClr val="DB2777"/>
+            </a:solidFill>
+            <a:prstDash val="solid"/>
+          </a:ln>
+        </p:spPr>
+      </p:sp>
+      <p:sp>
+        <p:nvSpPr>
+          <p:cNvPr id="33" name="Shape 31"/>
+          <p:cNvSpPr/>
+          <p:nvPr/>
+        </p:nvSpPr>
+        <p:spPr>
+          <a:xfrm>
+            <a:off x="2124837" y="4169664"/>
+            <a:ext cx="685800" cy="475488"/>
           </a:xfrm>
           <a:prstGeom prst="rect">
             <a:avLst>
-              <a:gd name="adj" fmla="val 9615"/>
+              <a:gd name="adj" fmla="val 7692"/>
             </a:avLst>
           </a:prstGeom>
           <a:solidFill>
@@ -21548,22 +21608,22 @@
           </a:solidFill>
           <a:ln w="12700">
             <a:solidFill>
-              <a:srgbClr val="0D9488"/>
-            </a:solidFill>
-            <a:prstDash val="solid"/>
-          </a:ln>
-        </p:spPr>
-      </p:sp>
-      <p:sp>
-        <p:nvSpPr>
-          <p:cNvPr id="29" name="Text 27"/>
-          <p:cNvSpPr/>
-          <p:nvPr/>
-        </p:nvSpPr>
-        <p:spPr>
-          <a:xfrm>
-            <a:off x="1975104" y="3364992"/>
-            <a:ext cx="1554480" cy="475488"/>
+              <a:srgbClr val="DB2777"/>
+            </a:solidFill>
+            <a:prstDash val="solid"/>
+          </a:ln>
+        </p:spPr>
+      </p:sp>
+      <p:sp>
+        <p:nvSpPr>
+          <p:cNvPr id="34" name="Text 32"/>
+          <p:cNvSpPr/>
+          <p:nvPr/>
+        </p:nvSpPr>
+        <p:spPr>
+          <a:xfrm>
+            <a:off x="2124837" y="4169664"/>
+            <a:ext cx="685800" cy="475488"/>
           </a:xfrm>
           <a:prstGeom prst="rect">
             <a:avLst/>
@@ -21579,30 +21639,57 @@
               <a:buNone/>
             </a:pPr>
             <a:r>
-              <a:rPr lang="en-US" sz="1400" b="1" dirty="0">
-                <a:solidFill>
-                  <a:srgbClr val="0D9488"/>
+              <a:rPr lang="en-US" sz="900" b="1" dirty="0">
+                <a:solidFill>
+                  <a:srgbClr val="9D174D"/>
                 </a:solidFill>
                 <a:latin typeface="Trebuchet MS" pitchFamily="34" charset="0"/>
                 <a:ea typeface="Trebuchet MS" pitchFamily="34" charset="-122"/>
                 <a:cs typeface="Trebuchet MS" pitchFamily="34" charset="-120"/>
               </a:rPr>
-              <a:t>o</a:t>
-            </a:r>
-            <a:endParaRPr lang="en-US" sz="1400" dirty="0"/>
-          </a:p>
-        </p:txBody>
-      </p:sp>
-      <p:sp>
-        <p:nvSpPr>
-          <p:cNvPr id="30" name="Text 28"/>
-          <p:cNvSpPr/>
-          <p:nvPr/>
-        </p:nvSpPr>
-        <p:spPr>
-          <a:xfrm>
-            <a:off x="3529584" y="3364992"/>
-            <a:ext cx="73152" cy="475488"/>
+              <a:t>cl</a:t>
+            </a:r>
+            <a:endParaRPr lang="en-US" sz="900" dirty="0"/>
+          </a:p>
+        </p:txBody>
+      </p:sp>
+      <p:sp>
+        <p:nvSpPr>
+          <p:cNvPr id="35" name="Shape 33"/>
+          <p:cNvSpPr/>
+          <p:nvPr/>
+        </p:nvSpPr>
+        <p:spPr>
+          <a:xfrm>
+            <a:off x="3033522" y="4169664"/>
+            <a:ext cx="685800" cy="475488"/>
+          </a:xfrm>
+          <a:prstGeom prst="rect">
+            <a:avLst>
+              <a:gd name="adj" fmla="val 7692"/>
+            </a:avLst>
+          </a:prstGeom>
+          <a:solidFill>
+            <a:srgbClr val="FFFFFF"/>
+          </a:solidFill>
+          <a:ln w="12700">
+            <a:solidFill>
+              <a:srgbClr val="DB2777"/>
+            </a:solidFill>
+            <a:prstDash val="solid"/>
+          </a:ln>
+        </p:spPr>
+      </p:sp>
+      <p:sp>
+        <p:nvSpPr>
+          <p:cNvPr id="36" name="Text 34"/>
+          <p:cNvSpPr/>
+          <p:nvPr/>
+        </p:nvSpPr>
+        <p:spPr>
+          <a:xfrm>
+            <a:off x="3033522" y="4169664"/>
+            <a:ext cx="685800" cy="475488"/>
           </a:xfrm>
           <a:prstGeom prst="rect">
             <a:avLst/>
@@ -21618,34 +21705,34 @@
               <a:buNone/>
             </a:pPr>
             <a:r>
-              <a:rPr lang="en-US" sz="1600" b="1" dirty="0">
-                <a:solidFill>
-                  <a:srgbClr val="0D9488"/>
+              <a:rPr lang="en-US" sz="900" b="1" dirty="0">
+                <a:solidFill>
+                  <a:srgbClr val="9D174D"/>
                 </a:solidFill>
                 <a:latin typeface="Trebuchet MS" pitchFamily="34" charset="0"/>
                 <a:ea typeface="Trebuchet MS" pitchFamily="34" charset="-122"/>
                 <a:cs typeface="Trebuchet MS" pitchFamily="34" charset="-120"/>
               </a:rPr>
-              <a:t>·</a:t>
-            </a:r>
-            <a:endParaRPr lang="en-US" sz="1600" dirty="0"/>
-          </a:p>
-        </p:txBody>
-      </p:sp>
-      <p:sp>
-        <p:nvSpPr>
-          <p:cNvPr id="31" name="Shape 29"/>
-          <p:cNvSpPr/>
-          <p:nvPr/>
-        </p:nvSpPr>
-        <p:spPr>
-          <a:xfrm>
-            <a:off x="3602736" y="3364992"/>
-            <a:ext cx="1554480" cy="475488"/>
+              <a:t>ou</a:t>
+            </a:r>
+            <a:endParaRPr lang="en-US" sz="900" dirty="0"/>
+          </a:p>
+        </p:txBody>
+      </p:sp>
+      <p:sp>
+        <p:nvSpPr>
+          <p:cNvPr id="37" name="Shape 35"/>
+          <p:cNvSpPr/>
+          <p:nvPr/>
+        </p:nvSpPr>
+        <p:spPr>
+          <a:xfrm>
+            <a:off x="3942207" y="4169664"/>
+            <a:ext cx="685800" cy="475488"/>
           </a:xfrm>
           <a:prstGeom prst="rect">
             <a:avLst>
-              <a:gd name="adj" fmla="val 9615"/>
+              <a:gd name="adj" fmla="val 7692"/>
             </a:avLst>
           </a:prstGeom>
           <a:solidFill>
@@ -21653,22 +21740,22 @@
           </a:solidFill>
           <a:ln w="12700">
             <a:solidFill>
-              <a:srgbClr val="0D9488"/>
-            </a:solidFill>
-            <a:prstDash val="solid"/>
-          </a:ln>
-        </p:spPr>
-      </p:sp>
-      <p:sp>
-        <p:nvSpPr>
-          <p:cNvPr id="32" name="Text 30"/>
-          <p:cNvSpPr/>
-          <p:nvPr/>
-        </p:nvSpPr>
-        <p:spPr>
-          <a:xfrm>
-            <a:off x="3602736" y="3364992"/>
-            <a:ext cx="1554480" cy="475488"/>
+              <a:srgbClr val="DB2777"/>
+            </a:solidFill>
+            <a:prstDash val="solid"/>
+          </a:ln>
+        </p:spPr>
+      </p:sp>
+      <p:sp>
+        <p:nvSpPr>
+          <p:cNvPr id="38" name="Text 36"/>
+          <p:cNvSpPr/>
+          <p:nvPr/>
+        </p:nvSpPr>
+        <p:spPr>
+          <a:xfrm>
+            <a:off x="3942207" y="4169664"/>
+            <a:ext cx="685800" cy="475488"/>
           </a:xfrm>
           <a:prstGeom prst="rect">
             <a:avLst/>
@@ -21684,30 +21771,57 @@
               <a:buNone/>
             </a:pPr>
             <a:r>
-              <a:rPr lang="en-US" sz="1400" b="1" dirty="0">
-                <a:solidFill>
-                  <a:srgbClr val="0D9488"/>
+              <a:rPr lang="en-US" sz="900" b="1" dirty="0">
+                <a:solidFill>
+                  <a:srgbClr val="9D174D"/>
                 </a:solidFill>
                 <a:latin typeface="Trebuchet MS" pitchFamily="34" charset="0"/>
                 <a:ea typeface="Trebuchet MS" pitchFamily="34" charset="-122"/>
                 <a:cs typeface="Trebuchet MS" pitchFamily="34" charset="-120"/>
               </a:rPr>
-              <a:t>ver</a:t>
-            </a:r>
-            <a:endParaRPr lang="en-US" sz="1400" dirty="0"/>
-          </a:p>
-        </p:txBody>
-      </p:sp>
-      <p:sp>
-        <p:nvSpPr>
-          <p:cNvPr id="33" name="Text 31"/>
-          <p:cNvSpPr/>
-          <p:nvPr/>
-        </p:nvSpPr>
-        <p:spPr>
-          <a:xfrm>
-            <a:off x="5157216" y="3364992"/>
-            <a:ext cx="73152" cy="475488"/>
+              <a:t>d</a:t>
+            </a:r>
+            <a:endParaRPr lang="en-US" sz="900" dirty="0"/>
+          </a:p>
+        </p:txBody>
+      </p:sp>
+      <p:sp>
+        <p:nvSpPr>
+          <p:cNvPr id="39" name="Shape 37"/>
+          <p:cNvSpPr/>
+          <p:nvPr/>
+        </p:nvSpPr>
+        <p:spPr>
+          <a:xfrm>
+            <a:off x="4850892" y="4169664"/>
+            <a:ext cx="685800" cy="475488"/>
+          </a:xfrm>
+          <a:prstGeom prst="rect">
+            <a:avLst>
+              <a:gd name="adj" fmla="val 7692"/>
+            </a:avLst>
+          </a:prstGeom>
+          <a:solidFill>
+            <a:srgbClr val="FFFFFF"/>
+          </a:solidFill>
+          <a:ln w="12700">
+            <a:solidFill>
+              <a:srgbClr val="DB2777"/>
+            </a:solidFill>
+            <a:prstDash val="solid"/>
+          </a:ln>
+        </p:spPr>
+      </p:sp>
+      <p:sp>
+        <p:nvSpPr>
+          <p:cNvPr id="40" name="Text 38"/>
+          <p:cNvSpPr/>
+          <p:nvPr/>
+        </p:nvSpPr>
+        <p:spPr>
+          <a:xfrm>
+            <a:off x="4850892" y="4169664"/>
+            <a:ext cx="685800" cy="475488"/>
           </a:xfrm>
           <a:prstGeom prst="rect">
             <a:avLst/>
@@ -21723,34 +21837,34 @@
               <a:buNone/>
             </a:pPr>
             <a:r>
-              <a:rPr lang="en-US" sz="1600" b="1" dirty="0">
-                <a:solidFill>
-                  <a:srgbClr val="0D9488"/>
+              <a:rPr lang="en-US" sz="900" b="1" dirty="0">
+                <a:solidFill>
+                  <a:srgbClr val="9D174D"/>
                 </a:solidFill>
                 <a:latin typeface="Trebuchet MS" pitchFamily="34" charset="0"/>
                 <a:ea typeface="Trebuchet MS" pitchFamily="34" charset="-122"/>
                 <a:cs typeface="Trebuchet MS" pitchFamily="34" charset="-120"/>
               </a:rPr>
-              <a:t>·</a:t>
-            </a:r>
-            <a:endParaRPr lang="en-US" sz="1600" dirty="0"/>
-          </a:p>
-        </p:txBody>
-      </p:sp>
-      <p:sp>
-        <p:nvSpPr>
-          <p:cNvPr id="34" name="Shape 32"/>
-          <p:cNvSpPr/>
-          <p:nvPr/>
-        </p:nvSpPr>
-        <p:spPr>
-          <a:xfrm>
-            <a:off x="5230368" y="3364992"/>
-            <a:ext cx="1554480" cy="475488"/>
+              <a:t>b</a:t>
+            </a:r>
+            <a:endParaRPr lang="en-US" sz="900" dirty="0"/>
+          </a:p>
+        </p:txBody>
+      </p:sp>
+      <p:sp>
+        <p:nvSpPr>
+          <p:cNvPr id="41" name="Shape 39"/>
+          <p:cNvSpPr/>
+          <p:nvPr/>
+        </p:nvSpPr>
+        <p:spPr>
+          <a:xfrm>
+            <a:off x="5759577" y="4169664"/>
+            <a:ext cx="685800" cy="475488"/>
           </a:xfrm>
           <a:prstGeom prst="rect">
             <a:avLst>
-              <a:gd name="adj" fmla="val 9615"/>
+              <a:gd name="adj" fmla="val 7692"/>
             </a:avLst>
           </a:prstGeom>
           <a:solidFill>
@@ -21758,22 +21872,22 @@
           </a:solidFill>
           <a:ln w="12700">
             <a:solidFill>
-              <a:srgbClr val="0D9488"/>
-            </a:solidFill>
-            <a:prstDash val="solid"/>
-          </a:ln>
-        </p:spPr>
-      </p:sp>
-      <p:sp>
-        <p:nvSpPr>
-          <p:cNvPr id="35" name="Text 33"/>
-          <p:cNvSpPr/>
-          <p:nvPr/>
-        </p:nvSpPr>
-        <p:spPr>
-          <a:xfrm>
-            <a:off x="5230368" y="3364992"/>
-            <a:ext cx="1554480" cy="475488"/>
+              <a:srgbClr val="DB2777"/>
+            </a:solidFill>
+            <a:prstDash val="solid"/>
+          </a:ln>
+        </p:spPr>
+      </p:sp>
+      <p:sp>
+        <p:nvSpPr>
+          <p:cNvPr id="42" name="Text 40"/>
+          <p:cNvSpPr/>
+          <p:nvPr/>
+        </p:nvSpPr>
+        <p:spPr>
+          <a:xfrm>
+            <a:off x="5759577" y="4169664"/>
+            <a:ext cx="685800" cy="475488"/>
           </a:xfrm>
           <a:prstGeom prst="rect">
             <a:avLst/>
@@ -21789,30 +21903,57 @@
               <a:buNone/>
             </a:pPr>
             <a:r>
-              <a:rPr lang="en-US" sz="1400" b="1" dirty="0">
-                <a:solidFill>
-                  <a:srgbClr val="0D9488"/>
+              <a:rPr lang="en-US" sz="900" b="1" dirty="0">
+                <a:solidFill>
+                  <a:srgbClr val="9D174D"/>
                 </a:solidFill>
                 <a:latin typeface="Trebuchet MS" pitchFamily="34" charset="0"/>
                 <a:ea typeface="Trebuchet MS" pitchFamily="34" charset="-122"/>
                 <a:cs typeface="Trebuchet MS" pitchFamily="34" charset="-120"/>
               </a:rPr>
-              <a:t>cloud</a:t>
-            </a:r>
-            <a:endParaRPr lang="en-US" sz="1400" dirty="0"/>
-          </a:p>
-        </p:txBody>
-      </p:sp>
-      <p:sp>
-        <p:nvSpPr>
-          <p:cNvPr id="36" name="Text 34"/>
-          <p:cNvSpPr/>
-          <p:nvPr/>
-        </p:nvSpPr>
-        <p:spPr>
-          <a:xfrm>
-            <a:off x="6784848" y="3364992"/>
-            <a:ext cx="73152" cy="475488"/>
+              <a:t>ur</a:t>
+            </a:r>
+            <a:endParaRPr lang="en-US" sz="900" dirty="0"/>
+          </a:p>
+        </p:txBody>
+      </p:sp>
+      <p:sp>
+        <p:nvSpPr>
+          <p:cNvPr id="43" name="Shape 41"/>
+          <p:cNvSpPr/>
+          <p:nvPr/>
+        </p:nvSpPr>
+        <p:spPr>
+          <a:xfrm>
+            <a:off x="6668262" y="4169664"/>
+            <a:ext cx="685800" cy="475488"/>
+          </a:xfrm>
+          <a:prstGeom prst="rect">
+            <a:avLst>
+              <a:gd name="adj" fmla="val 7692"/>
+            </a:avLst>
+          </a:prstGeom>
+          <a:solidFill>
+            <a:srgbClr val="FFFFFF"/>
+          </a:solidFill>
+          <a:ln w="12700">
+            <a:solidFill>
+              <a:srgbClr val="DB2777"/>
+            </a:solidFill>
+            <a:prstDash val="solid"/>
+          </a:ln>
+        </p:spPr>
+      </p:sp>
+      <p:sp>
+        <p:nvSpPr>
+          <p:cNvPr id="44" name="Text 42"/>
+          <p:cNvSpPr/>
+          <p:nvPr/>
+        </p:nvSpPr>
+        <p:spPr>
+          <a:xfrm>
+            <a:off x="6668262" y="4169664"/>
+            <a:ext cx="685800" cy="475488"/>
           </a:xfrm>
           <a:prstGeom prst="rect">
             <a:avLst/>
@@ -21828,34 +21969,34 @@
               <a:buNone/>
             </a:pPr>
             <a:r>
-              <a:rPr lang="en-US" sz="1600" b="1" dirty="0">
-                <a:solidFill>
-                  <a:srgbClr val="0D9488"/>
+              <a:rPr lang="en-US" sz="900" b="1" dirty="0">
+                <a:solidFill>
+                  <a:srgbClr val="9D174D"/>
                 </a:solidFill>
                 <a:latin typeface="Trebuchet MS" pitchFamily="34" charset="0"/>
                 <a:ea typeface="Trebuchet MS" pitchFamily="34" charset="-122"/>
                 <a:cs typeface="Trebuchet MS" pitchFamily="34" charset="-120"/>
               </a:rPr>
-              <a:t>·</a:t>
-            </a:r>
-            <a:endParaRPr lang="en-US" sz="1600" dirty="0"/>
-          </a:p>
-        </p:txBody>
-      </p:sp>
-      <p:sp>
-        <p:nvSpPr>
-          <p:cNvPr id="37" name="Shape 35"/>
-          <p:cNvSpPr/>
-          <p:nvPr/>
-        </p:nvSpPr>
-        <p:spPr>
-          <a:xfrm>
-            <a:off x="6858000" y="3364992"/>
-            <a:ext cx="1554480" cy="475488"/>
+              <a:t>s</a:t>
+            </a:r>
+            <a:endParaRPr lang="en-US" sz="900" dirty="0"/>
+          </a:p>
+        </p:txBody>
+      </p:sp>
+      <p:sp>
+        <p:nvSpPr>
+          <p:cNvPr id="45" name="Shape 43"/>
+          <p:cNvSpPr/>
+          <p:nvPr/>
+        </p:nvSpPr>
+        <p:spPr>
+          <a:xfrm>
+            <a:off x="7576947" y="4169664"/>
+            <a:ext cx="685800" cy="475488"/>
           </a:xfrm>
           <a:prstGeom prst="rect">
             <a:avLst>
-              <a:gd name="adj" fmla="val 9615"/>
+              <a:gd name="adj" fmla="val 7692"/>
             </a:avLst>
           </a:prstGeom>
           <a:solidFill>
@@ -21863,22 +22004,22 @@
           </a:solidFill>
           <a:ln w="12700">
             <a:solidFill>
-              <a:srgbClr val="0D9488"/>
-            </a:solidFill>
-            <a:prstDash val="solid"/>
-          </a:ln>
-        </p:spPr>
-      </p:sp>
-      <p:sp>
-        <p:nvSpPr>
-          <p:cNvPr id="38" name="Text 36"/>
-          <p:cNvSpPr/>
-          <p:nvPr/>
-        </p:nvSpPr>
-        <p:spPr>
-          <a:xfrm>
-            <a:off x="6858000" y="3364992"/>
-            <a:ext cx="1554480" cy="475488"/>
+              <a:srgbClr val="DB2777"/>
+            </a:solidFill>
+            <a:prstDash val="solid"/>
+          </a:ln>
+        </p:spPr>
+      </p:sp>
+      <p:sp>
+        <p:nvSpPr>
+          <p:cNvPr id="46" name="Text 44"/>
+          <p:cNvSpPr/>
+          <p:nvPr/>
+        </p:nvSpPr>
+        <p:spPr>
+          <a:xfrm>
+            <a:off x="7576947" y="4169664"/>
+            <a:ext cx="685800" cy="475488"/>
           </a:xfrm>
           <a:prstGeom prst="rect">
             <a:avLst/>
@@ -21894,636 +22035,15 @@
               <a:buNone/>
             </a:pPr>
             <a:r>
-              <a:rPr lang="en-US" sz="1400" b="1" dirty="0">
-                <a:solidFill>
-                  <a:srgbClr val="0D9488"/>
+              <a:rPr lang="en-US" sz="900" b="1" dirty="0">
+                <a:solidFill>
+                  <a:srgbClr val="9D174D"/>
                 </a:solidFill>
                 <a:latin typeface="Trebuchet MS" pitchFamily="34" charset="0"/>
                 <a:ea typeface="Trebuchet MS" pitchFamily="34" charset="-122"/>
                 <a:cs typeface="Trebuchet MS" pitchFamily="34" charset="-120"/>
               </a:rPr>
-              <a:t>ed</a:t>
-            </a:r>
-            <a:endParaRPr lang="en-US" sz="1400" dirty="0"/>
-          </a:p>
-        </p:txBody>
-      </p:sp>
-      <p:sp>
-        <p:nvSpPr>
-          <p:cNvPr id="39" name="Shape 37"/>
-          <p:cNvSpPr/>
-          <p:nvPr/>
-        </p:nvSpPr>
-        <p:spPr>
-          <a:xfrm>
-            <a:off x="365760" y="4096512"/>
-            <a:ext cx="1371600" cy="804672"/>
-          </a:xfrm>
-          <a:prstGeom prst="rect">
-            <a:avLst>
-              <a:gd name="adj" fmla="val 6818"/>
-            </a:avLst>
-          </a:prstGeom>
-          <a:solidFill>
-            <a:srgbClr val="E2E8F0"/>
-          </a:solidFill>
-          <a:ln w="12700">
-            <a:solidFill>
-              <a:srgbClr val="E2E8F0"/>
-            </a:solidFill>
-            <a:prstDash val="solid"/>
-          </a:ln>
-        </p:spPr>
-      </p:sp>
-      <p:sp>
-        <p:nvSpPr>
-          <p:cNvPr id="40" name="Text 38"/>
-          <p:cNvSpPr/>
-          <p:nvPr/>
-        </p:nvSpPr>
-        <p:spPr>
-          <a:xfrm>
-            <a:off x="365760" y="4096512"/>
-            <a:ext cx="1371600" cy="804672"/>
-          </a:xfrm>
-          <a:prstGeom prst="rect">
-            <a:avLst/>
-          </a:prstGeom>
-          <a:noFill/>
-          <a:ln/>
-        </p:spPr>
-        <p:txBody>
-          <a:bodyPr wrap="square" lIns="0" tIns="0" rIns="0" bIns="0" rtlCol="0" anchor="ctr"/>
-          <a:lstStyle/>
-          <a:p>
-            <a:pPr algn="ctr" indent="0" marL="0">
-              <a:buNone/>
-            </a:pPr>
-            <a:r>
-              <a:rPr lang="en-US" sz="1100" b="1" dirty="0">
-                <a:solidFill>
-                  <a:srgbClr val="475569"/>
-                </a:solidFill>
-                <a:latin typeface="Trebuchet MS" pitchFamily="34" charset="0"/>
-                <a:ea typeface="Trebuchet MS" pitchFamily="34" charset="-122"/>
-                <a:cs typeface="Trebuchet MS" pitchFamily="34" charset="-120"/>
-              </a:rPr>
-              <a:t>Phonemes</a:t>
-            </a:r>
-            <a:endParaRPr lang="en-US" sz="1100" dirty="0"/>
-          </a:p>
-        </p:txBody>
-      </p:sp>
-      <p:sp>
-        <p:nvSpPr>
-          <p:cNvPr id="41" name="Shape 39"/>
-          <p:cNvSpPr/>
-          <p:nvPr/>
-        </p:nvSpPr>
-        <p:spPr>
-          <a:xfrm>
-            <a:off x="1874520" y="4096512"/>
-            <a:ext cx="6903720" cy="658368"/>
-          </a:xfrm>
-          <a:prstGeom prst="rect">
-            <a:avLst>
-              <a:gd name="adj" fmla="val 8333"/>
-            </a:avLst>
-          </a:prstGeom>
-          <a:solidFill>
-            <a:srgbClr val="FCE7F3"/>
-          </a:solidFill>
-          <a:ln w="12700">
-            <a:solidFill>
-              <a:srgbClr val="DB2777"/>
-            </a:solidFill>
-            <a:prstDash val="solid"/>
-          </a:ln>
-        </p:spPr>
-      </p:sp>
-      <p:sp>
-        <p:nvSpPr>
-          <p:cNvPr id="42" name="Shape 40"/>
-          <p:cNvSpPr/>
-          <p:nvPr/>
-        </p:nvSpPr>
-        <p:spPr>
-          <a:xfrm>
-            <a:off x="2023872" y="4169664"/>
-            <a:ext cx="685800" cy="475488"/>
-          </a:xfrm>
-          <a:prstGeom prst="rect">
-            <a:avLst>
-              <a:gd name="adj" fmla="val 7692"/>
-            </a:avLst>
-          </a:prstGeom>
-          <a:solidFill>
-            <a:srgbClr val="FFFFFF"/>
-          </a:solidFill>
-          <a:ln w="12700">
-            <a:solidFill>
-              <a:srgbClr val="DB2777"/>
-            </a:solidFill>
-            <a:prstDash val="solid"/>
-          </a:ln>
-        </p:spPr>
-      </p:sp>
-      <p:sp>
-        <p:nvSpPr>
-          <p:cNvPr id="43" name="Text 41"/>
-          <p:cNvSpPr/>
-          <p:nvPr/>
-        </p:nvSpPr>
-        <p:spPr>
-          <a:xfrm>
-            <a:off x="2023872" y="4169664"/>
-            <a:ext cx="685800" cy="475488"/>
-          </a:xfrm>
-          <a:prstGeom prst="rect">
-            <a:avLst/>
-          </a:prstGeom>
-          <a:noFill/>
-          <a:ln/>
-        </p:spPr>
-        <p:txBody>
-          <a:bodyPr wrap="square" lIns="0" tIns="0" rIns="0" bIns="0" rtlCol="0" anchor="ctr"/>
-          <a:lstStyle/>
-          <a:p>
-            <a:pPr algn="ctr" indent="0" marL="0">
-              <a:buNone/>
-            </a:pPr>
-            <a:r>
-              <a:rPr lang="en-US" sz="900" b="1" dirty="0">
-                <a:solidFill>
-                  <a:srgbClr val="9D174D"/>
-                </a:solidFill>
-                <a:latin typeface="Trebuchet MS" pitchFamily="34" charset="0"/>
-                <a:ea typeface="Trebuchet MS" pitchFamily="34" charset="-122"/>
-                <a:cs typeface="Trebuchet MS" pitchFamily="34" charset="-120"/>
-              </a:rPr>
-              <a:t>o</a:t>
-            </a:r>
-            <a:endParaRPr lang="en-US" sz="900" dirty="0"/>
-          </a:p>
-        </p:txBody>
-      </p:sp>
-      <p:sp>
-        <p:nvSpPr>
-          <p:cNvPr id="44" name="Shape 42"/>
-          <p:cNvSpPr/>
-          <p:nvPr/>
-        </p:nvSpPr>
-        <p:spPr>
-          <a:xfrm>
-            <a:off x="2831592" y="4169664"/>
-            <a:ext cx="685800" cy="475488"/>
-          </a:xfrm>
-          <a:prstGeom prst="rect">
-            <a:avLst>
-              <a:gd name="adj" fmla="val 7692"/>
-            </a:avLst>
-          </a:prstGeom>
-          <a:solidFill>
-            <a:srgbClr val="FFFFFF"/>
-          </a:solidFill>
-          <a:ln w="12700">
-            <a:solidFill>
-              <a:srgbClr val="DB2777"/>
-            </a:solidFill>
-            <a:prstDash val="solid"/>
-          </a:ln>
-        </p:spPr>
-      </p:sp>
-      <p:sp>
-        <p:nvSpPr>
-          <p:cNvPr id="45" name="Text 43"/>
-          <p:cNvSpPr/>
-          <p:nvPr/>
-        </p:nvSpPr>
-        <p:spPr>
-          <a:xfrm>
-            <a:off x="2831592" y="4169664"/>
-            <a:ext cx="685800" cy="475488"/>
-          </a:xfrm>
-          <a:prstGeom prst="rect">
-            <a:avLst/>
-          </a:prstGeom>
-          <a:noFill/>
-          <a:ln/>
-        </p:spPr>
-        <p:txBody>
-          <a:bodyPr wrap="square" lIns="0" tIns="0" rIns="0" bIns="0" rtlCol="0" anchor="ctr"/>
-          <a:lstStyle/>
-          <a:p>
-            <a:pPr algn="ctr" indent="0" marL="0">
-              <a:buNone/>
-            </a:pPr>
-            <a:r>
-              <a:rPr lang="en-US" sz="900" b="1" dirty="0">
-                <a:solidFill>
-                  <a:srgbClr val="9D174D"/>
-                </a:solidFill>
-                <a:latin typeface="Trebuchet MS" pitchFamily="34" charset="0"/>
-                <a:ea typeface="Trebuchet MS" pitchFamily="34" charset="-122"/>
-                <a:cs typeface="Trebuchet MS" pitchFamily="34" charset="-120"/>
-              </a:rPr>
-              <a:t>v</a:t>
-            </a:r>
-            <a:endParaRPr lang="en-US" sz="900" dirty="0"/>
-          </a:p>
-        </p:txBody>
-      </p:sp>
-      <p:sp>
-        <p:nvSpPr>
-          <p:cNvPr id="46" name="Shape 44"/>
-          <p:cNvSpPr/>
-          <p:nvPr/>
-        </p:nvSpPr>
-        <p:spPr>
-          <a:xfrm>
-            <a:off x="3639312" y="4169664"/>
-            <a:ext cx="685800" cy="475488"/>
-          </a:xfrm>
-          <a:prstGeom prst="rect">
-            <a:avLst>
-              <a:gd name="adj" fmla="val 7692"/>
-            </a:avLst>
-          </a:prstGeom>
-          <a:solidFill>
-            <a:srgbClr val="FFFFFF"/>
-          </a:solidFill>
-          <a:ln w="12700">
-            <a:solidFill>
-              <a:srgbClr val="DB2777"/>
-            </a:solidFill>
-            <a:prstDash val="solid"/>
-          </a:ln>
-        </p:spPr>
-      </p:sp>
-      <p:sp>
-        <p:nvSpPr>
-          <p:cNvPr id="47" name="Text 45"/>
-          <p:cNvSpPr/>
-          <p:nvPr/>
-        </p:nvSpPr>
-        <p:spPr>
-          <a:xfrm>
-            <a:off x="3639312" y="4169664"/>
-            <a:ext cx="685800" cy="475488"/>
-          </a:xfrm>
-          <a:prstGeom prst="rect">
-            <a:avLst/>
-          </a:prstGeom>
-          <a:noFill/>
-          <a:ln/>
-        </p:spPr>
-        <p:txBody>
-          <a:bodyPr wrap="square" lIns="0" tIns="0" rIns="0" bIns="0" rtlCol="0" anchor="ctr"/>
-          <a:lstStyle/>
-          <a:p>
-            <a:pPr algn="ctr" indent="0" marL="0">
-              <a:buNone/>
-            </a:pPr>
-            <a:r>
-              <a:rPr lang="en-US" sz="900" b="1" dirty="0">
-                <a:solidFill>
-                  <a:srgbClr val="9D174D"/>
-                </a:solidFill>
-                <a:latin typeface="Trebuchet MS" pitchFamily="34" charset="0"/>
-                <a:ea typeface="Trebuchet MS" pitchFamily="34" charset="-122"/>
-                <a:cs typeface="Trebuchet MS" pitchFamily="34" charset="-120"/>
-              </a:rPr>
-              <a:t>er</a:t>
-            </a:r>
-            <a:endParaRPr lang="en-US" sz="900" dirty="0"/>
-          </a:p>
-        </p:txBody>
-      </p:sp>
-      <p:sp>
-        <p:nvSpPr>
-          <p:cNvPr id="48" name="Shape 46"/>
-          <p:cNvSpPr/>
-          <p:nvPr/>
-        </p:nvSpPr>
-        <p:spPr>
-          <a:xfrm>
-            <a:off x="4447032" y="4169664"/>
-            <a:ext cx="685800" cy="475488"/>
-          </a:xfrm>
-          <a:prstGeom prst="rect">
-            <a:avLst>
-              <a:gd name="adj" fmla="val 7692"/>
-            </a:avLst>
-          </a:prstGeom>
-          <a:solidFill>
-            <a:srgbClr val="FFFFFF"/>
-          </a:solidFill>
-          <a:ln w="12700">
-            <a:solidFill>
-              <a:srgbClr val="DB2777"/>
-            </a:solidFill>
-            <a:prstDash val="solid"/>
-          </a:ln>
-        </p:spPr>
-      </p:sp>
-      <p:sp>
-        <p:nvSpPr>
-          <p:cNvPr id="49" name="Text 47"/>
-          <p:cNvSpPr/>
-          <p:nvPr/>
-        </p:nvSpPr>
-        <p:spPr>
-          <a:xfrm>
-            <a:off x="4447032" y="4169664"/>
-            <a:ext cx="685800" cy="475488"/>
-          </a:xfrm>
-          <a:prstGeom prst="rect">
-            <a:avLst/>
-          </a:prstGeom>
-          <a:noFill/>
-          <a:ln/>
-        </p:spPr>
-        <p:txBody>
-          <a:bodyPr wrap="square" lIns="0" tIns="0" rIns="0" bIns="0" rtlCol="0" anchor="ctr"/>
-          <a:lstStyle/>
-          <a:p>
-            <a:pPr algn="ctr" indent="0" marL="0">
-              <a:buNone/>
-            </a:pPr>
-            <a:r>
-              <a:rPr lang="en-US" sz="900" b="1" dirty="0">
-                <a:solidFill>
-                  <a:srgbClr val="9D174D"/>
-                </a:solidFill>
-                <a:latin typeface="Trebuchet MS" pitchFamily="34" charset="0"/>
-                <a:ea typeface="Trebuchet MS" pitchFamily="34" charset="-122"/>
-                <a:cs typeface="Trebuchet MS" pitchFamily="34" charset="-120"/>
-              </a:rPr>
-              <a:t>cl</a:t>
-            </a:r>
-            <a:endParaRPr lang="en-US" sz="900" dirty="0"/>
-          </a:p>
-        </p:txBody>
-      </p:sp>
-      <p:sp>
-        <p:nvSpPr>
-          <p:cNvPr id="50" name="Shape 48"/>
-          <p:cNvSpPr/>
-          <p:nvPr/>
-        </p:nvSpPr>
-        <p:spPr>
-          <a:xfrm>
-            <a:off x="5254752" y="4169664"/>
-            <a:ext cx="685800" cy="475488"/>
-          </a:xfrm>
-          <a:prstGeom prst="rect">
-            <a:avLst>
-              <a:gd name="adj" fmla="val 7692"/>
-            </a:avLst>
-          </a:prstGeom>
-          <a:solidFill>
-            <a:srgbClr val="FFFFFF"/>
-          </a:solidFill>
-          <a:ln w="12700">
-            <a:solidFill>
-              <a:srgbClr val="DB2777"/>
-            </a:solidFill>
-            <a:prstDash val="solid"/>
-          </a:ln>
-        </p:spPr>
-      </p:sp>
-      <p:sp>
-        <p:nvSpPr>
-          <p:cNvPr id="51" name="Text 49"/>
-          <p:cNvSpPr/>
-          <p:nvPr/>
-        </p:nvSpPr>
-        <p:spPr>
-          <a:xfrm>
-            <a:off x="5254752" y="4169664"/>
-            <a:ext cx="685800" cy="475488"/>
-          </a:xfrm>
-          <a:prstGeom prst="rect">
-            <a:avLst/>
-          </a:prstGeom>
-          <a:noFill/>
-          <a:ln/>
-        </p:spPr>
-        <p:txBody>
-          <a:bodyPr wrap="square" lIns="0" tIns="0" rIns="0" bIns="0" rtlCol="0" anchor="ctr"/>
-          <a:lstStyle/>
-          <a:p>
-            <a:pPr algn="ctr" indent="0" marL="0">
-              <a:buNone/>
-            </a:pPr>
-            <a:r>
-              <a:rPr lang="en-US" sz="900" b="1" dirty="0">
-                <a:solidFill>
-                  <a:srgbClr val="9D174D"/>
-                </a:solidFill>
-                <a:latin typeface="Trebuchet MS" pitchFamily="34" charset="0"/>
-                <a:ea typeface="Trebuchet MS" pitchFamily="34" charset="-122"/>
-                <a:cs typeface="Trebuchet MS" pitchFamily="34" charset="-120"/>
-              </a:rPr>
-              <a:t>ou</a:t>
-            </a:r>
-            <a:endParaRPr lang="en-US" sz="900" dirty="0"/>
-          </a:p>
-        </p:txBody>
-      </p:sp>
-      <p:sp>
-        <p:nvSpPr>
-          <p:cNvPr id="52" name="Shape 50"/>
-          <p:cNvSpPr/>
-          <p:nvPr/>
-        </p:nvSpPr>
-        <p:spPr>
-          <a:xfrm>
-            <a:off x="6062472" y="4169664"/>
-            <a:ext cx="685800" cy="475488"/>
-          </a:xfrm>
-          <a:prstGeom prst="rect">
-            <a:avLst>
-              <a:gd name="adj" fmla="val 7692"/>
-            </a:avLst>
-          </a:prstGeom>
-          <a:solidFill>
-            <a:srgbClr val="FFFFFF"/>
-          </a:solidFill>
-          <a:ln w="12700">
-            <a:solidFill>
-              <a:srgbClr val="DB2777"/>
-            </a:solidFill>
-            <a:prstDash val="solid"/>
-          </a:ln>
-        </p:spPr>
-      </p:sp>
-      <p:sp>
-        <p:nvSpPr>
-          <p:cNvPr id="53" name="Text 51"/>
-          <p:cNvSpPr/>
-          <p:nvPr/>
-        </p:nvSpPr>
-        <p:spPr>
-          <a:xfrm>
-            <a:off x="6062472" y="4169664"/>
-            <a:ext cx="685800" cy="475488"/>
-          </a:xfrm>
-          <a:prstGeom prst="rect">
-            <a:avLst/>
-          </a:prstGeom>
-          <a:noFill/>
-          <a:ln/>
-        </p:spPr>
-        <p:txBody>
-          <a:bodyPr wrap="square" lIns="0" tIns="0" rIns="0" bIns="0" rtlCol="0" anchor="ctr"/>
-          <a:lstStyle/>
-          <a:p>
-            <a:pPr algn="ctr" indent="0" marL="0">
-              <a:buNone/>
-            </a:pPr>
-            <a:r>
-              <a:rPr lang="en-US" sz="900" b="1" dirty="0">
-                <a:solidFill>
-                  <a:srgbClr val="9D174D"/>
-                </a:solidFill>
-                <a:latin typeface="Trebuchet MS" pitchFamily="34" charset="0"/>
-                <a:ea typeface="Trebuchet MS" pitchFamily="34" charset="-122"/>
-                <a:cs typeface="Trebuchet MS" pitchFamily="34" charset="-120"/>
-              </a:rPr>
-              <a:t>d</a:t>
-            </a:r>
-            <a:endParaRPr lang="en-US" sz="900" dirty="0"/>
-          </a:p>
-        </p:txBody>
-      </p:sp>
-      <p:sp>
-        <p:nvSpPr>
-          <p:cNvPr id="54" name="Shape 52"/>
-          <p:cNvSpPr/>
-          <p:nvPr/>
-        </p:nvSpPr>
-        <p:spPr>
-          <a:xfrm>
-            <a:off x="6870192" y="4169664"/>
-            <a:ext cx="685800" cy="475488"/>
-          </a:xfrm>
-          <a:prstGeom prst="rect">
-            <a:avLst>
-              <a:gd name="adj" fmla="val 7692"/>
-            </a:avLst>
-          </a:prstGeom>
-          <a:solidFill>
-            <a:srgbClr val="FFFFFF"/>
-          </a:solidFill>
-          <a:ln w="12700">
-            <a:solidFill>
-              <a:srgbClr val="DB2777"/>
-            </a:solidFill>
-            <a:prstDash val="solid"/>
-          </a:ln>
-        </p:spPr>
-      </p:sp>
-      <p:sp>
-        <p:nvSpPr>
-          <p:cNvPr id="55" name="Text 53"/>
-          <p:cNvSpPr/>
-          <p:nvPr/>
-        </p:nvSpPr>
-        <p:spPr>
-          <a:xfrm>
-            <a:off x="6870192" y="4169664"/>
-            <a:ext cx="685800" cy="475488"/>
-          </a:xfrm>
-          <a:prstGeom prst="rect">
-            <a:avLst/>
-          </a:prstGeom>
-          <a:noFill/>
-          <a:ln/>
-        </p:spPr>
-        <p:txBody>
-          <a:bodyPr wrap="square" lIns="0" tIns="0" rIns="0" bIns="0" rtlCol="0" anchor="ctr"/>
-          <a:lstStyle/>
-          <a:p>
-            <a:pPr algn="ctr" indent="0" marL="0">
-              <a:buNone/>
-            </a:pPr>
-            <a:r>
-              <a:rPr lang="en-US" sz="900" b="1" dirty="0">
-                <a:solidFill>
-                  <a:srgbClr val="9D174D"/>
-                </a:solidFill>
-                <a:latin typeface="Trebuchet MS" pitchFamily="34" charset="0"/>
-                <a:ea typeface="Trebuchet MS" pitchFamily="34" charset="-122"/>
-                <a:cs typeface="Trebuchet MS" pitchFamily="34" charset="-120"/>
-              </a:rPr>
-              <a:t>e</a:t>
-            </a:r>
-            <a:endParaRPr lang="en-US" sz="900" dirty="0"/>
-          </a:p>
-        </p:txBody>
-      </p:sp>
-      <p:sp>
-        <p:nvSpPr>
-          <p:cNvPr id="56" name="Shape 54"/>
-          <p:cNvSpPr/>
-          <p:nvPr/>
-        </p:nvSpPr>
-        <p:spPr>
-          <a:xfrm>
-            <a:off x="7677912" y="4169664"/>
-            <a:ext cx="685800" cy="475488"/>
-          </a:xfrm>
-          <a:prstGeom prst="rect">
-            <a:avLst>
-              <a:gd name="adj" fmla="val 7692"/>
-            </a:avLst>
-          </a:prstGeom>
-          <a:solidFill>
-            <a:srgbClr val="FFFFFF"/>
-          </a:solidFill>
-          <a:ln w="12700">
-            <a:solidFill>
-              <a:srgbClr val="DB2777"/>
-            </a:solidFill>
-            <a:prstDash val="solid"/>
-          </a:ln>
-        </p:spPr>
-      </p:sp>
-      <p:sp>
-        <p:nvSpPr>
-          <p:cNvPr id="57" name="Text 55"/>
-          <p:cNvSpPr/>
-          <p:nvPr/>
-        </p:nvSpPr>
-        <p:spPr>
-          <a:xfrm>
-            <a:off x="7677912" y="4169664"/>
-            <a:ext cx="685800" cy="475488"/>
-          </a:xfrm>
-          <a:prstGeom prst="rect">
-            <a:avLst/>
-          </a:prstGeom>
-          <a:noFill/>
-          <a:ln/>
-        </p:spPr>
-        <p:txBody>
-          <a:bodyPr wrap="square" lIns="0" tIns="0" rIns="0" bIns="0" rtlCol="0" anchor="ctr"/>
-          <a:lstStyle/>
-          <a:p>
-            <a:pPr algn="ctr" indent="0" marL="0">
-              <a:buNone/>
-            </a:pPr>
-            <a:r>
-              <a:rPr lang="en-US" sz="900" b="1" dirty="0">
-                <a:solidFill>
-                  <a:srgbClr val="9D174D"/>
-                </a:solidFill>
-                <a:latin typeface="Trebuchet MS" pitchFamily="34" charset="0"/>
-                <a:ea typeface="Trebuchet MS" pitchFamily="34" charset="-122"/>
-                <a:cs typeface="Trebuchet MS" pitchFamily="34" charset="-120"/>
-              </a:rPr>
-              <a:t>d</a:t>
+              <a:t>t</a:t>
             </a:r>
             <a:endParaRPr lang="en-US" sz="900" dirty="0"/>
           </a:p>
@@ -22954,7 +22474,7 @@
                 <a:ea typeface="Trebuchet MS" pitchFamily="34" charset="-122"/>
                 <a:cs typeface="Trebuchet MS" pitchFamily="34" charset="-120"/>
               </a:rPr>
-              <a:t>clouding</a:t>
+              <a:t>cloudless</a:t>
             </a:r>
             <a:endParaRPr lang="en-US" sz="2800" dirty="0"/>
           </a:p>
@@ -23781,7 +23301,7 @@
                 <a:ea typeface="Trebuchet MS" pitchFamily="34" charset="-122"/>
                 <a:cs typeface="Trebuchet MS" pitchFamily="34" charset="-120"/>
               </a:rPr>
-              <a:t>clouding</a:t>
+              <a:t>cloudless</a:t>
             </a:r>
             <a:endParaRPr lang="en-US" sz="2800" dirty="0"/>
           </a:p>
@@ -23982,11 +23502,11 @@
             </a:avLst>
           </a:prstGeom>
           <a:solidFill>
-            <a:srgbClr val="FCE7F3"/>
+            <a:srgbClr val="DDD6FE"/>
           </a:solidFill>
           <a:ln w="19050">
             <a:solidFill>
-              <a:srgbClr val="DB2777"/>
+              <a:srgbClr val="7C3AED"/>
             </a:solidFill>
             <a:prstDash val="solid"/>
           </a:ln>
@@ -24026,13 +23546,13 @@
             <a:r>
               <a:rPr lang="en-US" sz="1300" b="1" dirty="0">
                 <a:solidFill>
-                  <a:srgbClr val="9D174D"/>
+                  <a:srgbClr val="4C1D95"/>
                 </a:solidFill>
                 <a:latin typeface="Trebuchet MS" pitchFamily="34" charset="0"/>
                 <a:ea typeface="Trebuchet MS" pitchFamily="34" charset="-122"/>
                 <a:cs typeface="Trebuchet MS" pitchFamily="34" charset="-120"/>
               </a:rPr>
-              <a:t>ing</a:t>
+              <a:t>less</a:t>
             </a:r>
             <a:endParaRPr lang="en-US" sz="1300" dirty="0"/>
           </a:p>
@@ -24071,7 +23591,7 @@
                 <a:ea typeface="Calibri" pitchFamily="34" charset="-122"/>
                 <a:cs typeface="Calibri" pitchFamily="34" charset="-120"/>
               </a:rPr>
-              <a:t>action happening now</a:t>
+              <a:t>without</a:t>
             </a:r>
             <a:endParaRPr lang="en-US" sz="850" dirty="0"/>
           </a:p>
@@ -25485,7 +25005,7 @@
                 <a:ea typeface="Trebuchet MS" pitchFamily="34" charset="-122"/>
                 <a:cs typeface="Trebuchet MS" pitchFamily="34" charset="-120"/>
               </a:rPr>
-              <a:t>clouding</a:t>
+              <a:t>cloudless</a:t>
             </a:r>
             <a:endParaRPr lang="en-US" sz="2800" dirty="0"/>
           </a:p>
@@ -25686,11 +25206,11 @@
             </a:avLst>
           </a:prstGeom>
           <a:solidFill>
-            <a:srgbClr val="FCE7F3"/>
+            <a:srgbClr val="DDD6FE"/>
           </a:solidFill>
           <a:ln w="19050">
             <a:solidFill>
-              <a:srgbClr val="DB2777"/>
+              <a:srgbClr val="7C3AED"/>
             </a:solidFill>
             <a:prstDash val="solid"/>
           </a:ln>
@@ -25730,13 +25250,13 @@
             <a:r>
               <a:rPr lang="en-US" sz="1300" b="1" dirty="0">
                 <a:solidFill>
-                  <a:srgbClr val="9D174D"/>
+                  <a:srgbClr val="4C1D95"/>
                 </a:solidFill>
                 <a:latin typeface="Trebuchet MS" pitchFamily="34" charset="0"/>
                 <a:ea typeface="Trebuchet MS" pitchFamily="34" charset="-122"/>
                 <a:cs typeface="Trebuchet MS" pitchFamily="34" charset="-120"/>
               </a:rPr>
-              <a:t>ing</a:t>
+              <a:t>less</a:t>
             </a:r>
             <a:endParaRPr lang="en-US" sz="1300" dirty="0"/>
           </a:p>
@@ -25775,7 +25295,7 @@
                 <a:ea typeface="Calibri" pitchFamily="34" charset="-122"/>
                 <a:cs typeface="Calibri" pitchFamily="34" charset="-120"/>
               </a:rPr>
-              <a:t>action happening now</a:t>
+              <a:t>without</a:t>
             </a:r>
             <a:endParaRPr lang="en-US" sz="850" dirty="0"/>
           </a:p>
@@ -26039,7 +25559,7 @@
                 <a:ea typeface="Trebuchet MS" pitchFamily="34" charset="-122"/>
                 <a:cs typeface="Trebuchet MS" pitchFamily="34" charset="-120"/>
               </a:rPr>
-              <a:t>ing</a:t>
+              <a:t>less</a:t>
             </a:r>
             <a:endParaRPr lang="en-US" sz="1400" dirty="0"/>
           </a:p>
@@ -26602,7 +26122,7 @@
                 <a:ea typeface="Trebuchet MS" pitchFamily="34" charset="-122"/>
                 <a:cs typeface="Trebuchet MS" pitchFamily="34" charset="-120"/>
               </a:rPr>
-              <a:t>clouding</a:t>
+              <a:t>cloudless</a:t>
             </a:r>
             <a:endParaRPr lang="en-US" sz="2800" dirty="0"/>
           </a:p>
@@ -26803,11 +26323,11 @@
             </a:avLst>
           </a:prstGeom>
           <a:solidFill>
-            <a:srgbClr val="FCE7F3"/>
+            <a:srgbClr val="DDD6FE"/>
           </a:solidFill>
           <a:ln w="19050">
             <a:solidFill>
-              <a:srgbClr val="DB2777"/>
+              <a:srgbClr val="7C3AED"/>
             </a:solidFill>
             <a:prstDash val="solid"/>
           </a:ln>
@@ -26847,13 +26367,13 @@
             <a:r>
               <a:rPr lang="en-US" sz="1300" b="1" dirty="0">
                 <a:solidFill>
-                  <a:srgbClr val="9D174D"/>
+                  <a:srgbClr val="4C1D95"/>
                 </a:solidFill>
                 <a:latin typeface="Trebuchet MS" pitchFamily="34" charset="0"/>
                 <a:ea typeface="Trebuchet MS" pitchFamily="34" charset="-122"/>
                 <a:cs typeface="Trebuchet MS" pitchFamily="34" charset="-120"/>
               </a:rPr>
-              <a:t>ing</a:t>
+              <a:t>less</a:t>
             </a:r>
             <a:endParaRPr lang="en-US" sz="1300" dirty="0"/>
           </a:p>
@@ -26892,7 +26412,7 @@
                 <a:ea typeface="Calibri" pitchFamily="34" charset="-122"/>
                 <a:cs typeface="Calibri" pitchFamily="34" charset="-120"/>
               </a:rPr>
-              <a:t>action happening now</a:t>
+              <a:t>without</a:t>
             </a:r>
             <a:endParaRPr lang="en-US" sz="850" dirty="0"/>
           </a:p>
@@ -27156,7 +26676,7 @@
                 <a:ea typeface="Trebuchet MS" pitchFamily="34" charset="-122"/>
                 <a:cs typeface="Trebuchet MS" pitchFamily="34" charset="-120"/>
               </a:rPr>
-              <a:t>ing</a:t>
+              <a:t>less</a:t>
             </a:r>
             <a:endParaRPr lang="en-US" sz="1400" dirty="0"/>
           </a:p>
@@ -27263,7 +26783,7 @@
         </p:nvSpPr>
         <p:spPr>
           <a:xfrm>
-            <a:off x="2670048" y="4169664"/>
+            <a:off x="2254649" y="4169664"/>
             <a:ext cx="685800" cy="475488"/>
           </a:xfrm>
           <a:prstGeom prst="rect">
@@ -27290,7 +26810,7 @@
         </p:nvSpPr>
         <p:spPr>
           <a:xfrm>
-            <a:off x="2670048" y="4169664"/>
+            <a:off x="2254649" y="4169664"/>
             <a:ext cx="685800" cy="475488"/>
           </a:xfrm>
           <a:prstGeom prst="rect">
@@ -27329,7 +26849,7 @@
         </p:nvSpPr>
         <p:spPr>
           <a:xfrm>
-            <a:off x="4123944" y="4169664"/>
+            <a:off x="3293146" y="4169664"/>
             <a:ext cx="685800" cy="475488"/>
           </a:xfrm>
           <a:prstGeom prst="rect">
@@ -27356,7 +26876,7 @@
         </p:nvSpPr>
         <p:spPr>
           <a:xfrm>
-            <a:off x="4123944" y="4169664"/>
+            <a:off x="3293146" y="4169664"/>
             <a:ext cx="685800" cy="475488"/>
           </a:xfrm>
           <a:prstGeom prst="rect">
@@ -27395,7 +26915,7 @@
         </p:nvSpPr>
         <p:spPr>
           <a:xfrm>
-            <a:off x="5577840" y="4169664"/>
+            <a:off x="4331643" y="4169664"/>
             <a:ext cx="685800" cy="475488"/>
           </a:xfrm>
           <a:prstGeom prst="rect">
@@ -27422,7 +26942,7 @@
         </p:nvSpPr>
         <p:spPr>
           <a:xfrm>
-            <a:off x="5577840" y="4169664"/>
+            <a:off x="4331643" y="4169664"/>
             <a:ext cx="685800" cy="475488"/>
           </a:xfrm>
           <a:prstGeom prst="rect">
@@ -27461,7 +26981,7 @@
         </p:nvSpPr>
         <p:spPr>
           <a:xfrm>
-            <a:off x="7031736" y="4169664"/>
+            <a:off x="5370141" y="4169664"/>
             <a:ext cx="685800" cy="475488"/>
           </a:xfrm>
           <a:prstGeom prst="rect">
@@ -27488,7 +27008,7 @@
         </p:nvSpPr>
         <p:spPr>
           <a:xfrm>
-            <a:off x="7031736" y="4169664"/>
+            <a:off x="5370141" y="4169664"/>
             <a:ext cx="685800" cy="475488"/>
           </a:xfrm>
           <a:prstGeom prst="rect">
@@ -27513,7 +27033,139 @@
                 <a:ea typeface="Trebuchet MS" pitchFamily="34" charset="-122"/>
                 <a:cs typeface="Trebuchet MS" pitchFamily="34" charset="-120"/>
               </a:rPr>
-              <a:t>ing</a:t>
+              <a:t>l</a:t>
+            </a:r>
+            <a:endParaRPr lang="en-US" sz="900" dirty="0"/>
+          </a:p>
+        </p:txBody>
+      </p:sp>
+      <p:sp>
+        <p:nvSpPr>
+          <p:cNvPr id="41" name="Shape 39"/>
+          <p:cNvSpPr/>
+          <p:nvPr/>
+        </p:nvSpPr>
+        <p:spPr>
+          <a:xfrm>
+            <a:off x="6408638" y="4169664"/>
+            <a:ext cx="685800" cy="475488"/>
+          </a:xfrm>
+          <a:prstGeom prst="rect">
+            <a:avLst>
+              <a:gd name="adj" fmla="val 7692"/>
+            </a:avLst>
+          </a:prstGeom>
+          <a:solidFill>
+            <a:srgbClr val="FFFFFF"/>
+          </a:solidFill>
+          <a:ln w="12700">
+            <a:solidFill>
+              <a:srgbClr val="DB2777"/>
+            </a:solidFill>
+            <a:prstDash val="solid"/>
+          </a:ln>
+        </p:spPr>
+      </p:sp>
+      <p:sp>
+        <p:nvSpPr>
+          <p:cNvPr id="42" name="Text 40"/>
+          <p:cNvSpPr/>
+          <p:nvPr/>
+        </p:nvSpPr>
+        <p:spPr>
+          <a:xfrm>
+            <a:off x="6408638" y="4169664"/>
+            <a:ext cx="685800" cy="475488"/>
+          </a:xfrm>
+          <a:prstGeom prst="rect">
+            <a:avLst/>
+          </a:prstGeom>
+          <a:noFill/>
+          <a:ln/>
+        </p:spPr>
+        <p:txBody>
+          <a:bodyPr wrap="square" lIns="0" tIns="0" rIns="0" bIns="0" rtlCol="0" anchor="ctr"/>
+          <a:lstStyle/>
+          <a:p>
+            <a:pPr algn="ctr" indent="0" marL="0">
+              <a:buNone/>
+            </a:pPr>
+            <a:r>
+              <a:rPr lang="en-US" sz="900" b="1" dirty="0">
+                <a:solidFill>
+                  <a:srgbClr val="9D174D"/>
+                </a:solidFill>
+                <a:latin typeface="Trebuchet MS" pitchFamily="34" charset="0"/>
+                <a:ea typeface="Trebuchet MS" pitchFamily="34" charset="-122"/>
+                <a:cs typeface="Trebuchet MS" pitchFamily="34" charset="-120"/>
+              </a:rPr>
+              <a:t>e</a:t>
+            </a:r>
+            <a:endParaRPr lang="en-US" sz="900" dirty="0"/>
+          </a:p>
+        </p:txBody>
+      </p:sp>
+      <p:sp>
+        <p:nvSpPr>
+          <p:cNvPr id="43" name="Shape 41"/>
+          <p:cNvSpPr/>
+          <p:nvPr/>
+        </p:nvSpPr>
+        <p:spPr>
+          <a:xfrm>
+            <a:off x="7447135" y="4169664"/>
+            <a:ext cx="685800" cy="475488"/>
+          </a:xfrm>
+          <a:prstGeom prst="rect">
+            <a:avLst>
+              <a:gd name="adj" fmla="val 7692"/>
+            </a:avLst>
+          </a:prstGeom>
+          <a:solidFill>
+            <a:srgbClr val="FFFFFF"/>
+          </a:solidFill>
+          <a:ln w="12700">
+            <a:solidFill>
+              <a:srgbClr val="DB2777"/>
+            </a:solidFill>
+            <a:prstDash val="solid"/>
+          </a:ln>
+        </p:spPr>
+      </p:sp>
+      <p:sp>
+        <p:nvSpPr>
+          <p:cNvPr id="44" name="Text 42"/>
+          <p:cNvSpPr/>
+          <p:nvPr/>
+        </p:nvSpPr>
+        <p:spPr>
+          <a:xfrm>
+            <a:off x="7447135" y="4169664"/>
+            <a:ext cx="685800" cy="475488"/>
+          </a:xfrm>
+          <a:prstGeom prst="rect">
+            <a:avLst/>
+          </a:prstGeom>
+          <a:noFill/>
+          <a:ln/>
+        </p:spPr>
+        <p:txBody>
+          <a:bodyPr wrap="square" lIns="0" tIns="0" rIns="0" bIns="0" rtlCol="0" anchor="ctr"/>
+          <a:lstStyle/>
+          <a:p>
+            <a:pPr algn="ctr" indent="0" marL="0">
+              <a:buNone/>
+            </a:pPr>
+            <a:r>
+              <a:rPr lang="en-US" sz="900" b="1" dirty="0">
+                <a:solidFill>
+                  <a:srgbClr val="9D174D"/>
+                </a:solidFill>
+                <a:latin typeface="Trebuchet MS" pitchFamily="34" charset="0"/>
+                <a:ea typeface="Trebuchet MS" pitchFamily="34" charset="-122"/>
+                <a:cs typeface="Trebuchet MS" pitchFamily="34" charset="-120"/>
+              </a:rPr>
+              <a:t>ss</a:t>
             </a:r>
             <a:endParaRPr lang="en-US" sz="900" dirty="0"/>
           </a:p>
@@ -27944,7 +27596,7 @@
                 <a:ea typeface="Trebuchet MS" pitchFamily="34" charset="-122"/>
                 <a:cs typeface="Trebuchet MS" pitchFamily="34" charset="-120"/>
               </a:rPr>
-              <a:t>cloudless</a:t>
+              <a:t>covered</a:t>
             </a:r>
             <a:endParaRPr lang="en-US" sz="2800" dirty="0"/>
           </a:p>
@@ -28771,7 +28423,7 @@
                 <a:ea typeface="Trebuchet MS" pitchFamily="34" charset="-122"/>
                 <a:cs typeface="Trebuchet MS" pitchFamily="34" charset="-120"/>
               </a:rPr>
-              <a:t>cloudless</a:t>
+              <a:t>covered</a:t>
             </a:r>
             <a:endParaRPr lang="en-US" sz="2800" dirty="0"/>
           </a:p>
@@ -28860,11 +28512,11 @@
             </a:avLst>
           </a:prstGeom>
           <a:solidFill>
-            <a:srgbClr val="CCFBF1"/>
+            <a:srgbClr val="DDD6FE"/>
           </a:solidFill>
           <a:ln w="19050">
             <a:solidFill>
-              <a:srgbClr val="0D9488"/>
+              <a:srgbClr val="7C3AED"/>
             </a:solidFill>
             <a:prstDash val="solid"/>
           </a:ln>
@@ -28904,13 +28556,13 @@
             <a:r>
               <a:rPr lang="en-US" sz="1300" b="1" dirty="0">
                 <a:solidFill>
-                  <a:srgbClr val="0F766E"/>
+                  <a:srgbClr val="4C1D95"/>
                 </a:solidFill>
                 <a:latin typeface="Trebuchet MS" pitchFamily="34" charset="0"/>
                 <a:ea typeface="Trebuchet MS" pitchFamily="34" charset="-122"/>
                 <a:cs typeface="Trebuchet MS" pitchFamily="34" charset="-120"/>
               </a:rPr>
-              <a:t>cloud</a:t>
+              <a:t>cover</a:t>
             </a:r>
             <a:endParaRPr lang="en-US" sz="1300" dirty="0"/>
           </a:p>
@@ -28949,7 +28601,7 @@
                 <a:ea typeface="Calibri" pitchFamily="34" charset="-122"/>
                 <a:cs typeface="Calibri" pitchFamily="34" charset="-120"/>
               </a:rPr>
-              <a:t>mass of water vapour</a:t>
+              <a:t>to place something over</a:t>
             </a:r>
             <a:endParaRPr lang="en-US" sz="850" dirty="0"/>
           </a:p>
@@ -28972,11 +28624,11 @@
             </a:avLst>
           </a:prstGeom>
           <a:solidFill>
-            <a:srgbClr val="DDD6FE"/>
+            <a:srgbClr val="FCE7F3"/>
           </a:solidFill>
           <a:ln w="19050">
             <a:solidFill>
-              <a:srgbClr val="7C3AED"/>
+              <a:srgbClr val="DB2777"/>
             </a:solidFill>
             <a:prstDash val="solid"/>
           </a:ln>
@@ -29016,13 +28668,13 @@
             <a:r>
               <a:rPr lang="en-US" sz="1300" b="1" dirty="0">
                 <a:solidFill>
-                  <a:srgbClr val="4C1D95"/>
+                  <a:srgbClr val="9D174D"/>
                 </a:solidFill>
                 <a:latin typeface="Trebuchet MS" pitchFamily="34" charset="0"/>
                 <a:ea typeface="Trebuchet MS" pitchFamily="34" charset="-122"/>
                 <a:cs typeface="Trebuchet MS" pitchFamily="34" charset="-120"/>
               </a:rPr>
-              <a:t>less</a:t>
+              <a:t>ed</a:t>
             </a:r>
             <a:endParaRPr lang="en-US" sz="1300" dirty="0"/>
           </a:p>
@@ -29061,7 +28713,7 @@
                 <a:ea typeface="Calibri" pitchFamily="34" charset="-122"/>
                 <a:cs typeface="Calibri" pitchFamily="34" charset="-120"/>
               </a:rPr>
-              <a:t>without</a:t>
+              <a:t>past tense</a:t>
             </a:r>
             <a:endParaRPr lang="en-US" sz="850" dirty="0"/>
           </a:p>
@@ -29756,7 +29408,7 @@
                 <a:ea typeface="Trebuchet MS" pitchFamily="34" charset="-122"/>
                 <a:cs typeface="Trebuchet MS" pitchFamily="34" charset="-120"/>
               </a:rPr>
-              <a:t>cloudless</a:t>
+              <a:t>covered</a:t>
             </a:r>
             <a:endParaRPr lang="en-US" sz="2800" dirty="0"/>
           </a:p>
@@ -29845,11 +29497,11 @@
             </a:avLst>
           </a:prstGeom>
           <a:solidFill>
-            <a:srgbClr val="CCFBF1"/>
+            <a:srgbClr val="DDD6FE"/>
           </a:solidFill>
           <a:ln w="19050">
             <a:solidFill>
-              <a:srgbClr val="0D9488"/>
+              <a:srgbClr val="7C3AED"/>
             </a:solidFill>
             <a:prstDash val="solid"/>
           </a:ln>
@@ -29889,13 +29541,13 @@
             <a:r>
               <a:rPr lang="en-US" sz="1300" b="1" dirty="0">
                 <a:solidFill>
-                  <a:srgbClr val="0F766E"/>
+                  <a:srgbClr val="4C1D95"/>
                 </a:solidFill>
                 <a:latin typeface="Trebuchet MS" pitchFamily="34" charset="0"/>
                 <a:ea typeface="Trebuchet MS" pitchFamily="34" charset="-122"/>
                 <a:cs typeface="Trebuchet MS" pitchFamily="34" charset="-120"/>
               </a:rPr>
-              <a:t>cloud</a:t>
+              <a:t>cover</a:t>
             </a:r>
             <a:endParaRPr lang="en-US" sz="1300" dirty="0"/>
           </a:p>
@@ -29934,7 +29586,7 @@
                 <a:ea typeface="Calibri" pitchFamily="34" charset="-122"/>
                 <a:cs typeface="Calibri" pitchFamily="34" charset="-120"/>
               </a:rPr>
-              <a:t>mass of water vapour</a:t>
+              <a:t>to place something over</a:t>
             </a:r>
             <a:endParaRPr lang="en-US" sz="850" dirty="0"/>
           </a:p>
@@ -29957,11 +29609,11 @@
             </a:avLst>
           </a:prstGeom>
           <a:solidFill>
-            <a:srgbClr val="DDD6FE"/>
+            <a:srgbClr val="FCE7F3"/>
           </a:solidFill>
           <a:ln w="19050">
             <a:solidFill>
-              <a:srgbClr val="7C3AED"/>
+              <a:srgbClr val="DB2777"/>
             </a:solidFill>
             <a:prstDash val="solid"/>
           </a:ln>
@@ -30001,13 +29653,13 @@
             <a:r>
               <a:rPr lang="en-US" sz="1300" b="1" dirty="0">
                 <a:solidFill>
-                  <a:srgbClr val="4C1D95"/>
+                  <a:srgbClr val="9D174D"/>
                 </a:solidFill>
                 <a:latin typeface="Trebuchet MS" pitchFamily="34" charset="0"/>
                 <a:ea typeface="Trebuchet MS" pitchFamily="34" charset="-122"/>
                 <a:cs typeface="Trebuchet MS" pitchFamily="34" charset="-120"/>
               </a:rPr>
-              <a:t>less</a:t>
+              <a:t>ed</a:t>
             </a:r>
             <a:endParaRPr lang="en-US" sz="1300" dirty="0"/>
           </a:p>
@@ -30046,7 +29698,7 @@
                 <a:ea typeface="Calibri" pitchFamily="34" charset="-122"/>
                 <a:cs typeface="Calibri" pitchFamily="34" charset="-120"/>
               </a:rPr>
-              <a:t>without</a:t>
+              <a:t>past tense</a:t>
             </a:r>
             <a:endParaRPr lang="en-US" sz="850" dirty="0"/>
           </a:p>
@@ -30205,7 +29857,7 @@
                 <a:ea typeface="Trebuchet MS" pitchFamily="34" charset="-122"/>
                 <a:cs typeface="Trebuchet MS" pitchFamily="34" charset="-120"/>
               </a:rPr>
-              <a:t>cloud</a:t>
+              <a:t>cov</a:t>
             </a:r>
             <a:endParaRPr lang="en-US" sz="1400" dirty="0"/>
           </a:p>
@@ -30310,7 +29962,7 @@
                 <a:ea typeface="Trebuchet MS" pitchFamily="34" charset="-122"/>
                 <a:cs typeface="Trebuchet MS" pitchFamily="34" charset="-120"/>
               </a:rPr>
-              <a:t>less</a:t>
+              <a:t>ered</a:t>
             </a:r>
             <a:endParaRPr lang="en-US" sz="1400" dirty="0"/>
           </a:p>
@@ -30873,7 +30525,7 @@
                 <a:ea typeface="Trebuchet MS" pitchFamily="34" charset="-122"/>
                 <a:cs typeface="Trebuchet MS" pitchFamily="34" charset="-120"/>
               </a:rPr>
-              <a:t>cloudless</a:t>
+              <a:t>covered</a:t>
             </a:r>
             <a:endParaRPr lang="en-US" sz="2800" dirty="0"/>
           </a:p>
@@ -30962,11 +30614,11 @@
             </a:avLst>
           </a:prstGeom>
           <a:solidFill>
-            <a:srgbClr val="CCFBF1"/>
+            <a:srgbClr val="DDD6FE"/>
           </a:solidFill>
           <a:ln w="19050">
             <a:solidFill>
-              <a:srgbClr val="0D9488"/>
+              <a:srgbClr val="7C3AED"/>
             </a:solidFill>
             <a:prstDash val="solid"/>
           </a:ln>
@@ -31006,13 +30658,13 @@
             <a:r>
               <a:rPr lang="en-US" sz="1300" b="1" dirty="0">
                 <a:solidFill>
-                  <a:srgbClr val="0F766E"/>
+                  <a:srgbClr val="4C1D95"/>
                 </a:solidFill>
                 <a:latin typeface="Trebuchet MS" pitchFamily="34" charset="0"/>
                 <a:ea typeface="Trebuchet MS" pitchFamily="34" charset="-122"/>
                 <a:cs typeface="Trebuchet MS" pitchFamily="34" charset="-120"/>
               </a:rPr>
-              <a:t>cloud</a:t>
+              <a:t>cover</a:t>
             </a:r>
             <a:endParaRPr lang="en-US" sz="1300" dirty="0"/>
           </a:p>
@@ -31051,7 +30703,7 @@
                 <a:ea typeface="Calibri" pitchFamily="34" charset="-122"/>
                 <a:cs typeface="Calibri" pitchFamily="34" charset="-120"/>
               </a:rPr>
-              <a:t>mass of water vapour</a:t>
+              <a:t>to place something over</a:t>
             </a:r>
             <a:endParaRPr lang="en-US" sz="850" dirty="0"/>
           </a:p>
@@ -31074,11 +30726,11 @@
             </a:avLst>
           </a:prstGeom>
           <a:solidFill>
-            <a:srgbClr val="DDD6FE"/>
+            <a:srgbClr val="FCE7F3"/>
           </a:solidFill>
           <a:ln w="19050">
             <a:solidFill>
-              <a:srgbClr val="7C3AED"/>
+              <a:srgbClr val="DB2777"/>
             </a:solidFill>
             <a:prstDash val="solid"/>
           </a:ln>
@@ -31118,13 +30770,13 @@
             <a:r>
               <a:rPr lang="en-US" sz="1300" b="1" dirty="0">
                 <a:solidFill>
-                  <a:srgbClr val="4C1D95"/>
+                  <a:srgbClr val="9D174D"/>
                 </a:solidFill>
                 <a:latin typeface="Trebuchet MS" pitchFamily="34" charset="0"/>
                 <a:ea typeface="Trebuchet MS" pitchFamily="34" charset="-122"/>
                 <a:cs typeface="Trebuchet MS" pitchFamily="34" charset="-120"/>
               </a:rPr>
-              <a:t>less</a:t>
+              <a:t>ed</a:t>
             </a:r>
             <a:endParaRPr lang="en-US" sz="1300" dirty="0"/>
           </a:p>
@@ -31163,7 +30815,7 @@
                 <a:ea typeface="Calibri" pitchFamily="34" charset="-122"/>
                 <a:cs typeface="Calibri" pitchFamily="34" charset="-120"/>
               </a:rPr>
-              <a:t>without</a:t>
+              <a:t>past tense</a:t>
             </a:r>
             <a:endParaRPr lang="en-US" sz="850" dirty="0"/>
           </a:p>
@@ -31322,7 +30974,7 @@
                 <a:ea typeface="Trebuchet MS" pitchFamily="34" charset="-122"/>
                 <a:cs typeface="Trebuchet MS" pitchFamily="34" charset="-120"/>
               </a:rPr>
-              <a:t>cloud</a:t>
+              <a:t>cov</a:t>
             </a:r>
             <a:endParaRPr lang="en-US" sz="1400" dirty="0"/>
           </a:p>
@@ -31427,7 +31079,7 @@
                 <a:ea typeface="Trebuchet MS" pitchFamily="34" charset="-122"/>
                 <a:cs typeface="Trebuchet MS" pitchFamily="34" charset="-120"/>
               </a:rPr>
-              <a:t>less</a:t>
+              <a:t>ered</a:t>
             </a:r>
             <a:endParaRPr lang="en-US" sz="1400" dirty="0"/>
           </a:p>
@@ -31508,11 +31160,11 @@
         <p:spPr>
           <a:xfrm>
             <a:off x="1874520" y="4096512"/>
-            <a:ext cx="6903720" cy="658368"/>
+            <a:ext cx="6903720" cy="804672"/>
           </a:xfrm>
           <a:prstGeom prst="rect">
             <a:avLst>
-              <a:gd name="adj" fmla="val 8333"/>
+              <a:gd name="adj" fmla="val 6818"/>
             </a:avLst>
           </a:prstGeom>
           <a:solidFill>
@@ -31535,11 +31187,11 @@
         <p:spPr>
           <a:xfrm>
             <a:off x="2254649" y="4169664"/>
-            <a:ext cx="685800" cy="475488"/>
+            <a:ext cx="685800" cy="384048"/>
           </a:xfrm>
           <a:prstGeom prst="rect">
             <a:avLst>
-              <a:gd name="adj" fmla="val 7692"/>
+              <a:gd name="adj" fmla="val 9524"/>
             </a:avLst>
           </a:prstGeom>
           <a:solidFill>
@@ -31562,7 +31214,7 @@
         <p:spPr>
           <a:xfrm>
             <a:off x="2254649" y="4169664"/>
-            <a:ext cx="685800" cy="475488"/>
+            <a:ext cx="685800" cy="384048"/>
           </a:xfrm>
           <a:prstGeom prst="rect">
             <a:avLst/>
@@ -31586,7 +31238,7 @@
                 <a:ea typeface="Trebuchet MS" pitchFamily="34" charset="-122"/>
                 <a:cs typeface="Trebuchet MS" pitchFamily="34" charset="-120"/>
               </a:rPr>
-              <a:t>cl</a:t>
+              <a:t>c</a:t>
             </a:r>
             <a:endParaRPr lang="en-US" sz="900" dirty="0"/>
           </a:p>
@@ -31594,18 +31246,57 @@
       </p:sp>
       <p:sp>
         <p:nvSpPr>
-          <p:cNvPr id="35" name="Shape 33"/>
+          <p:cNvPr id="35" name="Text 33"/>
+          <p:cNvSpPr/>
+          <p:nvPr/>
+        </p:nvSpPr>
+        <p:spPr>
+          <a:xfrm>
+            <a:off x="2254649" y="4572000"/>
+            <a:ext cx="685800" cy="219456"/>
+          </a:xfrm>
+          <a:prstGeom prst="rect">
+            <a:avLst/>
+          </a:prstGeom>
+          <a:noFill/>
+          <a:ln/>
+        </p:spPr>
+        <p:txBody>
+          <a:bodyPr wrap="square" lIns="0" tIns="0" rIns="0" bIns="0" rtlCol="0" anchor="t"/>
+          <a:lstStyle/>
+          <a:p>
+            <a:pPr algn="ctr" indent="0" marL="0">
+              <a:buNone/>
+            </a:pPr>
+            <a:r>
+              <a:rPr lang="en-US" sz="750" i="1" dirty="0">
+                <a:solidFill>
+                  <a:srgbClr val="94A3B8"/>
+                </a:solidFill>
+                <a:latin typeface="Calibri" pitchFamily="34" charset="0"/>
+                <a:ea typeface="Calibri" pitchFamily="34" charset="-122"/>
+                <a:cs typeface="Calibri" pitchFamily="34" charset="-120"/>
+              </a:rPr>
+              <a:t>/k/</a:t>
+            </a:r>
+            <a:endParaRPr lang="en-US" sz="750" dirty="0"/>
+          </a:p>
+        </p:txBody>
+      </p:sp>
+      <p:sp>
+        <p:nvSpPr>
+          <p:cNvPr id="36" name="Shape 34"/>
           <p:cNvSpPr/>
           <p:nvPr/>
         </p:nvSpPr>
         <p:spPr>
           <a:xfrm>
             <a:off x="3293146" y="4169664"/>
-            <a:ext cx="685800" cy="475488"/>
+            <a:ext cx="685800" cy="384048"/>
           </a:xfrm>
           <a:prstGeom prst="rect">
             <a:avLst>
-              <a:gd name="adj" fmla="val 7692"/>
+              <a:gd name="adj" fmla="val 9524"/>
             </a:avLst>
           </a:prstGeom>
           <a:solidFill>
@@ -31621,14 +31312,14 @@
       </p:sp>
       <p:sp>
         <p:nvSpPr>
-          <p:cNvPr id="36" name="Text 34"/>
+          <p:cNvPr id="37" name="Text 35"/>
           <p:cNvSpPr/>
           <p:nvPr/>
         </p:nvSpPr>
         <p:spPr>
           <a:xfrm>
             <a:off x="3293146" y="4169664"/>
-            <a:ext cx="685800" cy="475488"/>
+            <a:ext cx="685800" cy="384048"/>
           </a:xfrm>
           <a:prstGeom prst="rect">
             <a:avLst/>
@@ -31652,7 +31343,7 @@
                 <a:ea typeface="Trebuchet MS" pitchFamily="34" charset="-122"/>
                 <a:cs typeface="Trebuchet MS" pitchFamily="34" charset="-120"/>
               </a:rPr>
-              <a:t>ou</a:t>
+              <a:t>o</a:t>
             </a:r>
             <a:endParaRPr lang="en-US" sz="900" dirty="0"/>
           </a:p>
@@ -31660,18 +31351,18 @@
       </p:sp>
       <p:sp>
         <p:nvSpPr>
-          <p:cNvPr id="37" name="Shape 35"/>
+          <p:cNvPr id="38" name="Shape 36"/>
           <p:cNvSpPr/>
           <p:nvPr/>
         </p:nvSpPr>
         <p:spPr>
           <a:xfrm>
             <a:off x="4331643" y="4169664"/>
-            <a:ext cx="685800" cy="475488"/>
+            <a:ext cx="685800" cy="384048"/>
           </a:xfrm>
           <a:prstGeom prst="rect">
             <a:avLst>
-              <a:gd name="adj" fmla="val 7692"/>
+              <a:gd name="adj" fmla="val 9524"/>
             </a:avLst>
           </a:prstGeom>
           <a:solidFill>
@@ -31687,14 +31378,14 @@
       </p:sp>
       <p:sp>
         <p:nvSpPr>
-          <p:cNvPr id="38" name="Text 36"/>
+          <p:cNvPr id="39" name="Text 37"/>
           <p:cNvSpPr/>
           <p:nvPr/>
         </p:nvSpPr>
         <p:spPr>
           <a:xfrm>
             <a:off x="4331643" y="4169664"/>
-            <a:ext cx="685800" cy="475488"/>
+            <a:ext cx="685800" cy="384048"/>
           </a:xfrm>
           <a:prstGeom prst="rect">
             <a:avLst/>
@@ -31718,7 +31409,7 @@
                 <a:ea typeface="Trebuchet MS" pitchFamily="34" charset="-122"/>
                 <a:cs typeface="Trebuchet MS" pitchFamily="34" charset="-120"/>
               </a:rPr>
-              <a:t>d</a:t>
+              <a:t>v</a:t>
             </a:r>
             <a:endParaRPr lang="en-US" sz="900" dirty="0"/>
           </a:p>
@@ -31726,18 +31417,18 @@
       </p:sp>
       <p:sp>
         <p:nvSpPr>
-          <p:cNvPr id="39" name="Shape 37"/>
+          <p:cNvPr id="40" name="Shape 38"/>
           <p:cNvSpPr/>
           <p:nvPr/>
         </p:nvSpPr>
         <p:spPr>
           <a:xfrm>
             <a:off x="5370141" y="4169664"/>
-            <a:ext cx="685800" cy="475488"/>
+            <a:ext cx="685800" cy="384048"/>
           </a:xfrm>
           <a:prstGeom prst="rect">
             <a:avLst>
-              <a:gd name="adj" fmla="val 7692"/>
+              <a:gd name="adj" fmla="val 9524"/>
             </a:avLst>
           </a:prstGeom>
           <a:solidFill>
@@ -31753,14 +31444,14 @@
       </p:sp>
       <p:sp>
         <p:nvSpPr>
-          <p:cNvPr id="40" name="Text 38"/>
+          <p:cNvPr id="41" name="Text 39"/>
           <p:cNvSpPr/>
           <p:nvPr/>
         </p:nvSpPr>
         <p:spPr>
           <a:xfrm>
             <a:off x="5370141" y="4169664"/>
-            <a:ext cx="685800" cy="475488"/>
+            <a:ext cx="685800" cy="384048"/>
           </a:xfrm>
           <a:prstGeom prst="rect">
             <a:avLst/>
@@ -31784,7 +31475,7 @@
                 <a:ea typeface="Trebuchet MS" pitchFamily="34" charset="-122"/>
                 <a:cs typeface="Trebuchet MS" pitchFamily="34" charset="-120"/>
               </a:rPr>
-              <a:t>l</a:t>
+              <a:t>er</a:t>
             </a:r>
             <a:endParaRPr lang="en-US" sz="900" dirty="0"/>
           </a:p>
@@ -31792,18 +31483,18 @@
       </p:sp>
       <p:sp>
         <p:nvSpPr>
-          <p:cNvPr id="41" name="Shape 39"/>
+          <p:cNvPr id="42" name="Shape 40"/>
           <p:cNvSpPr/>
           <p:nvPr/>
         </p:nvSpPr>
         <p:spPr>
           <a:xfrm>
             <a:off x="6408638" y="4169664"/>
-            <a:ext cx="685800" cy="475488"/>
+            <a:ext cx="685800" cy="384048"/>
           </a:xfrm>
           <a:prstGeom prst="rect">
             <a:avLst>
-              <a:gd name="adj" fmla="val 7692"/>
+              <a:gd name="adj" fmla="val 9524"/>
             </a:avLst>
           </a:prstGeom>
           <a:solidFill>
@@ -31819,14 +31510,14 @@
       </p:sp>
       <p:sp>
         <p:nvSpPr>
-          <p:cNvPr id="42" name="Text 40"/>
+          <p:cNvPr id="43" name="Text 41"/>
           <p:cNvSpPr/>
           <p:nvPr/>
         </p:nvSpPr>
         <p:spPr>
           <a:xfrm>
             <a:off x="6408638" y="4169664"/>
-            <a:ext cx="685800" cy="475488"/>
+            <a:ext cx="685800" cy="384048"/>
           </a:xfrm>
           <a:prstGeom prst="rect">
             <a:avLst/>
@@ -31858,18 +31549,18 @@
       </p:sp>
       <p:sp>
         <p:nvSpPr>
-          <p:cNvPr id="43" name="Shape 41"/>
+          <p:cNvPr id="44" name="Shape 42"/>
           <p:cNvSpPr/>
           <p:nvPr/>
         </p:nvSpPr>
         <p:spPr>
           <a:xfrm>
             <a:off x="7447135" y="4169664"/>
-            <a:ext cx="685800" cy="475488"/>
+            <a:ext cx="685800" cy="384048"/>
           </a:xfrm>
           <a:prstGeom prst="rect">
             <a:avLst>
-              <a:gd name="adj" fmla="val 7692"/>
+              <a:gd name="adj" fmla="val 9524"/>
             </a:avLst>
           </a:prstGeom>
           <a:solidFill>
@@ -31885,14 +31576,14 @@
       </p:sp>
       <p:sp>
         <p:nvSpPr>
-          <p:cNvPr id="44" name="Text 42"/>
+          <p:cNvPr id="45" name="Text 43"/>
           <p:cNvSpPr/>
           <p:nvPr/>
         </p:nvSpPr>
         <p:spPr>
           <a:xfrm>
             <a:off x="7447135" y="4169664"/>
-            <a:ext cx="685800" cy="475488"/>
+            <a:ext cx="685800" cy="384048"/>
           </a:xfrm>
           <a:prstGeom prst="rect">
             <a:avLst/>
@@ -31916,7 +31607,7 @@
                 <a:ea typeface="Trebuchet MS" pitchFamily="34" charset="-122"/>
                 <a:cs typeface="Trebuchet MS" pitchFamily="34" charset="-120"/>
               </a:rPr>
-              <a:t>ss</a:t>
+              <a:t>d</a:t>
             </a:r>
             <a:endParaRPr lang="en-US" sz="900" dirty="0"/>
           </a:p>
@@ -33806,7 +33497,7 @@
                 <a:ea typeface="Trebuchet MS" pitchFamily="34" charset="-122"/>
                 <a:cs typeface="Trebuchet MS" pitchFamily="34" charset="-120"/>
               </a:rPr>
-              <a:t>-s</a:t>
+              <a:t>-ed</a:t>
             </a:r>
             <a:endParaRPr lang="en-US" sz="1300" dirty="0"/>
           </a:p>
@@ -33959,7 +33650,7 @@
                 <a:ea typeface="Trebuchet MS" pitchFamily="34" charset="-122"/>
                 <a:cs typeface="Trebuchet MS" pitchFamily="34" charset="-120"/>
               </a:rPr>
-              <a:t>-ed</a:t>
+              <a:t>-s</a:t>
             </a:r>
             <a:endParaRPr lang="en-US" sz="1300" dirty="0"/>
           </a:p>
@@ -34023,7 +33714,7 @@
                 <a:ea typeface="Trebuchet MS" pitchFamily="34" charset="-122"/>
                 <a:cs typeface="Trebuchet MS" pitchFamily="34" charset="-120"/>
               </a:rPr>
-              <a:t>storm-</a:t>
+              <a:t>thunder-</a:t>
             </a:r>
             <a:endParaRPr lang="en-US" sz="1300" dirty="0"/>
           </a:p>
@@ -34112,7 +33803,7 @@
                 <a:ea typeface="Trebuchet MS" pitchFamily="34" charset="-122"/>
                 <a:cs typeface="Trebuchet MS" pitchFamily="34" charset="-120"/>
               </a:rPr>
-              <a:t>-ing</a:t>
+              <a:t>-less</a:t>
             </a:r>
             <a:endParaRPr lang="en-US" sz="1300" dirty="0"/>
           </a:p>
@@ -34176,7 +33867,7 @@
                 <a:ea typeface="Trebuchet MS" pitchFamily="34" charset="-122"/>
                 <a:cs typeface="Trebuchet MS" pitchFamily="34" charset="-120"/>
               </a:rPr>
-              <a:t>thunder-</a:t>
+              <a:t>under-</a:t>
             </a:r>
             <a:endParaRPr lang="en-US" sz="1300" dirty="0"/>
           </a:p>
@@ -34265,7 +33956,7 @@
                 <a:ea typeface="Trebuchet MS" pitchFamily="34" charset="-122"/>
                 <a:cs typeface="Trebuchet MS" pitchFamily="34" charset="-120"/>
               </a:rPr>
-              <a:t>-less</a:t>
+              <a:t>-y</a:t>
             </a:r>
             <a:endParaRPr lang="en-US" sz="1300" dirty="0"/>
           </a:p>
@@ -34329,7 +34020,7 @@
                 <a:ea typeface="Trebuchet MS" pitchFamily="34" charset="-122"/>
                 <a:cs typeface="Trebuchet MS" pitchFamily="34" charset="-120"/>
               </a:rPr>
-              <a:t>inter-</a:t>
+              <a:t>storm-</a:t>
             </a:r>
             <a:endParaRPr lang="en-US" sz="1300" dirty="0"/>
           </a:p>
@@ -34418,7 +34109,7 @@
                 <a:ea typeface="Trebuchet MS" pitchFamily="34" charset="-122"/>
                 <a:cs typeface="Trebuchet MS" pitchFamily="34" charset="-120"/>
               </a:rPr>
-              <a:t>-y</a:t>
+              <a:t>-burst</a:t>
             </a:r>
             <a:endParaRPr lang="en-US" sz="1300" dirty="0"/>
           </a:p>
@@ -34721,7 +34412,7 @@
                 <a:ea typeface="Trebuchet MS" pitchFamily="34" charset="-122"/>
                 <a:cs typeface="Trebuchet MS" pitchFamily="34" charset="-120"/>
               </a:rPr>
-              <a:t>overcloud</a:t>
+              <a:t>cloudburst</a:t>
             </a:r>
             <a:endParaRPr lang="en-US" sz="1200" dirty="0"/>
           </a:p>
@@ -34787,7 +34478,7 @@
                 <a:ea typeface="Trebuchet MS" pitchFamily="34" charset="-122"/>
                 <a:cs typeface="Trebuchet MS" pitchFamily="34" charset="-120"/>
               </a:rPr>
-              <a:t>overclouded</a:t>
+              <a:t>overcloud</a:t>
             </a:r>
             <a:endParaRPr lang="en-US" sz="1200" dirty="0"/>
           </a:p>
@@ -34853,7 +34544,7 @@
                 <a:ea typeface="Trebuchet MS" pitchFamily="34" charset="-122"/>
                 <a:cs typeface="Trebuchet MS" pitchFamily="34" charset="-120"/>
               </a:rPr>
-              <a:t>cloudier</a:t>
+              <a:t>thundercloud</a:t>
             </a:r>
             <a:endParaRPr lang="en-US" sz="1200" dirty="0"/>
           </a:p>
@@ -34919,7 +34610,7 @@
                 <a:ea typeface="Trebuchet MS" pitchFamily="34" charset="-122"/>
                 <a:cs typeface="Trebuchet MS" pitchFamily="34" charset="-120"/>
               </a:rPr>
-              <a:t>cloudiest</a:t>
+              <a:t>raincloud</a:t>
             </a:r>
             <a:endParaRPr lang="en-US" sz="1200" dirty="0"/>
           </a:p>
@@ -34985,7 +34676,7 @@
                 <a:ea typeface="Trebuchet MS" pitchFamily="34" charset="-122"/>
                 <a:cs typeface="Trebuchet MS" pitchFamily="34" charset="-120"/>
               </a:rPr>
-              <a:t>clouding</a:t>
+              <a:t>cloudlike</a:t>
             </a:r>
             <a:endParaRPr lang="en-US" sz="1200" dirty="0"/>
           </a:p>
@@ -36173,7 +35864,7 @@
                 <a:ea typeface="Calibri" pitchFamily="34" charset="-122"/>
                 <a:cs typeface="Calibri" pitchFamily="34" charset="-120"/>
               </a:rPr>
-              <a:t>1.  The word 'cloudless' means having no clouds at all.</a:t>
+              <a:t>1.  The word 'thundercloud' contains the root 'cloud'.</a:t>
             </a:r>
             <a:endParaRPr lang="en-US" sz="1300" dirty="0"/>
           </a:p>
@@ -36312,7 +36003,7 @@
                 <a:ea typeface="Calibri" pitchFamily="34" charset="-122"/>
                 <a:cs typeface="Calibri" pitchFamily="34" charset="-120"/>
               </a:rPr>
-              <a:t>2.  The word 'cloudy' uses the suffix '-ing'.</a:t>
+              <a:t>2.  The word 'cloudless' uses a suffix that means 'without'.</a:t>
             </a:r>
             <a:endParaRPr lang="en-US" sz="1300" dirty="0"/>
           </a:p>
@@ -36335,11 +36026,11 @@
             </a:avLst>
           </a:prstGeom>
           <a:solidFill>
-            <a:srgbClr val="FEE2E2"/>
-          </a:solidFill>
-          <a:ln w="12700">
-            <a:solidFill>
-              <a:srgbClr val="DC2626"/>
+            <a:srgbClr val="DCFCE7"/>
+          </a:solidFill>
+          <a:ln w="12700">
+            <a:solidFill>
+              <a:srgbClr val="16A34A"/>
             </a:solidFill>
             <a:prstDash val="solid"/>
           </a:ln>
@@ -36372,13 +36063,13 @@
             <a:r>
               <a:rPr lang="en-US" sz="1100" b="1" dirty="0">
                 <a:solidFill>
-                  <a:srgbClr val="DC2626"/>
+                  <a:srgbClr val="16A34A"/>
                 </a:solidFill>
                 <a:latin typeface="Trebuchet MS" pitchFamily="34" charset="0"/>
                 <a:ea typeface="Trebuchet MS" pitchFamily="34" charset="-122"/>
                 <a:cs typeface="Trebuchet MS" pitchFamily="34" charset="-120"/>
               </a:rPr>
-              <a:t>FALSE</a:t>
+              <a:t>TRUE</a:t>
             </a:r>
             <a:endParaRPr lang="en-US" sz="1100" dirty="0"/>
           </a:p>
@@ -36451,7 +36142,7 @@
                 <a:ea typeface="Calibri" pitchFamily="34" charset="-122"/>
                 <a:cs typeface="Calibri" pitchFamily="34" charset="-120"/>
               </a:rPr>
-              <a:t>3.  Adding '-ed' to 'cloud' makes the word 'clouded'.</a:t>
+              <a:t>3.  The suffix '-ed' in 'clouded' means 'able to'.</a:t>
             </a:r>
             <a:endParaRPr lang="en-US" sz="1300" dirty="0"/>
           </a:p>
@@ -36474,11 +36165,11 @@
             </a:avLst>
           </a:prstGeom>
           <a:solidFill>
-            <a:srgbClr val="DCFCE7"/>
-          </a:solidFill>
-          <a:ln w="12700">
-            <a:solidFill>
-              <a:srgbClr val="16A34A"/>
+            <a:srgbClr val="FEE2E2"/>
+          </a:solidFill>
+          <a:ln w="12700">
+            <a:solidFill>
+              <a:srgbClr val="DC2626"/>
             </a:solidFill>
             <a:prstDash val="solid"/>
           </a:ln>
@@ -36511,13 +36202,13 @@
             <a:r>
               <a:rPr lang="en-US" sz="1100" b="1" dirty="0">
                 <a:solidFill>
-                  <a:srgbClr val="16A34A"/>
+                  <a:srgbClr val="DC2626"/>
                 </a:solidFill>
                 <a:latin typeface="Trebuchet MS" pitchFamily="34" charset="0"/>
                 <a:ea typeface="Trebuchet MS" pitchFamily="34" charset="-122"/>
                 <a:cs typeface="Trebuchet MS" pitchFamily="34" charset="-120"/>
               </a:rPr>
-              <a:t>TRUE</a:t>
+              <a:t>FALSE</a:t>
             </a:r>
             <a:endParaRPr lang="en-US" sz="1100" dirty="0"/>
           </a:p>
@@ -36590,7 +36281,7 @@
                 <a:ea typeface="Calibri" pitchFamily="34" charset="-122"/>
                 <a:cs typeface="Calibri" pitchFamily="34" charset="-120"/>
               </a:rPr>
-              <a:t>4.  The prefix 'over-' can be added to 'cloud' to make a real English word.</a:t>
+              <a:t>4.  A 'cloudburst' is a type of sudden, heavy rainstorm.</a:t>
             </a:r>
             <a:endParaRPr lang="en-US" sz="1300" dirty="0"/>
           </a:p>
@@ -36729,7 +36420,7 @@
                 <a:ea typeface="Calibri" pitchFamily="34" charset="-122"/>
                 <a:cs typeface="Calibri" pitchFamily="34" charset="-120"/>
               </a:rPr>
-              <a:t>5.  The root 'cloud' comes from the Latin word for water.</a:t>
+              <a:t>5.  The root 'cloud' comes from a Greek word.</a:t>
             </a:r>
             <a:endParaRPr lang="en-US" sz="1300" dirty="0"/>
           </a:p>
@@ -37263,7 +36954,7 @@
                 <a:ea typeface="Calibri" pitchFamily="34" charset="-122"/>
                 <a:cs typeface="Calibri" pitchFamily="34" charset="-120"/>
               </a:rPr>
-              <a:t>Origin: Old English: clud</a:t>
+              <a:t>Origin: Latin: cloudus</a:t>
             </a:r>
             <a:endParaRPr lang="en-US" sz="1100" dirty="0"/>
           </a:p>
@@ -37566,7 +37257,7 @@
                 <a:ea typeface="Trebuchet MS" pitchFamily="34" charset="-122"/>
                 <a:cs typeface="Trebuchet MS" pitchFamily="34" charset="-120"/>
               </a:rPr>
-              <a:t>overcloud</a:t>
+              <a:t>cloudburst</a:t>
             </a:r>
             <a:endParaRPr lang="en-US" sz="1300" dirty="0"/>
           </a:p>
@@ -37632,7 +37323,7 @@
                 <a:ea typeface="Trebuchet MS" pitchFamily="34" charset="-122"/>
                 <a:cs typeface="Trebuchet MS" pitchFamily="34" charset="-120"/>
               </a:rPr>
-              <a:t>overclouded</a:t>
+              <a:t>overcloud</a:t>
             </a:r>
             <a:endParaRPr lang="en-US" sz="1300" dirty="0"/>
           </a:p>
@@ -37698,7 +37389,7 @@
                 <a:ea typeface="Trebuchet MS" pitchFamily="34" charset="-122"/>
                 <a:cs typeface="Trebuchet MS" pitchFamily="34" charset="-120"/>
               </a:rPr>
-              <a:t>cloudier</a:t>
+              <a:t>thundercloud</a:t>
             </a:r>
             <a:endParaRPr lang="en-US" sz="1300" dirty="0"/>
           </a:p>
@@ -37764,7 +37455,7 @@
                 <a:ea typeface="Trebuchet MS" pitchFamily="34" charset="-122"/>
                 <a:cs typeface="Trebuchet MS" pitchFamily="34" charset="-120"/>
               </a:rPr>
-              <a:t>cloudiest</a:t>
+              <a:t>raincloud</a:t>
             </a:r>
             <a:endParaRPr lang="en-US" sz="1300" dirty="0"/>
           </a:p>
@@ -38485,7 +38176,7 @@
                 <a:ea typeface="Trebuchet MS" pitchFamily="34" charset="-122"/>
                 <a:cs typeface="Trebuchet MS" pitchFamily="34" charset="-120"/>
               </a:rPr>
-              <a:t>-s</a:t>
+              <a:t>-ed</a:t>
             </a:r>
             <a:endParaRPr lang="en-US" sz="1300" dirty="0"/>
           </a:p>
@@ -38638,7 +38329,7 @@
                 <a:ea typeface="Trebuchet MS" pitchFamily="34" charset="-122"/>
                 <a:cs typeface="Trebuchet MS" pitchFamily="34" charset="-120"/>
               </a:rPr>
-              <a:t>-ed</a:t>
+              <a:t>-s</a:t>
             </a:r>
             <a:endParaRPr lang="en-US" sz="1300" dirty="0"/>
           </a:p>
@@ -38702,7 +38393,7 @@
                 <a:ea typeface="Trebuchet MS" pitchFamily="34" charset="-122"/>
                 <a:cs typeface="Trebuchet MS" pitchFamily="34" charset="-120"/>
               </a:rPr>
-              <a:t>storm-</a:t>
+              <a:t>thunder-</a:t>
             </a:r>
             <a:endParaRPr lang="en-US" sz="1300" dirty="0"/>
           </a:p>
@@ -38791,7 +38482,7 @@
                 <a:ea typeface="Trebuchet MS" pitchFamily="34" charset="-122"/>
                 <a:cs typeface="Trebuchet MS" pitchFamily="34" charset="-120"/>
               </a:rPr>
-              <a:t>-ing</a:t>
+              <a:t>-less</a:t>
             </a:r>
             <a:endParaRPr lang="en-US" sz="1300" dirty="0"/>
           </a:p>
@@ -38855,7 +38546,7 @@
                 <a:ea typeface="Trebuchet MS" pitchFamily="34" charset="-122"/>
                 <a:cs typeface="Trebuchet MS" pitchFamily="34" charset="-120"/>
               </a:rPr>
-              <a:t>thunder-</a:t>
+              <a:t>under-</a:t>
             </a:r>
             <a:endParaRPr lang="en-US" sz="1300" dirty="0"/>
           </a:p>
@@ -38944,7 +38635,7 @@
                 <a:ea typeface="Trebuchet MS" pitchFamily="34" charset="-122"/>
                 <a:cs typeface="Trebuchet MS" pitchFamily="34" charset="-120"/>
               </a:rPr>
-              <a:t>-less</a:t>
+              <a:t>-y</a:t>
             </a:r>
             <a:endParaRPr lang="en-US" sz="1300" dirty="0"/>
           </a:p>
@@ -39008,7 +38699,7 @@
                 <a:ea typeface="Trebuchet MS" pitchFamily="34" charset="-122"/>
                 <a:cs typeface="Trebuchet MS" pitchFamily="34" charset="-120"/>
               </a:rPr>
-              <a:t>inter-</a:t>
+              <a:t>storm-</a:t>
             </a:r>
             <a:endParaRPr lang="en-US" sz="1300" dirty="0"/>
           </a:p>
@@ -39097,7 +38788,7 @@
                 <a:ea typeface="Trebuchet MS" pitchFamily="34" charset="-122"/>
                 <a:cs typeface="Trebuchet MS" pitchFamily="34" charset="-120"/>
               </a:rPr>
-              <a:t>-y</a:t>
+              <a:t>-burst</a:t>
             </a:r>
             <a:endParaRPr lang="en-US" sz="1300" dirty="0"/>
           </a:p>
@@ -39433,7 +39124,7 @@
                 <a:ea typeface="Trebuchet MS" pitchFamily="34" charset="-122"/>
                 <a:cs typeface="Trebuchet MS" pitchFamily="34" charset="-120"/>
               </a:rPr>
-              <a:t>-s</a:t>
+              <a:t>-ed</a:t>
             </a:r>
             <a:endParaRPr lang="en-US" sz="1300" dirty="0"/>
           </a:p>
@@ -40008,7 +39699,7 @@
                 <a:ea typeface="Calibri" pitchFamily="34" charset="-122"/>
                 <a:cs typeface="Calibri" pitchFamily="34" charset="-120"/>
               </a:rPr>
-              <a:t>The most cloudy — having the greatest amount of clouds.</a:t>
+              <a:t>A dark cloud that is full of water and ready to rain.</a:t>
             </a:r>
             <a:endParaRPr lang="en-US" sz="1200" dirty="0"/>
           </a:p>
@@ -40147,7 +39838,7 @@
                 <a:ea typeface="Calibri" pitchFamily="34" charset="-122"/>
                 <a:cs typeface="Calibri" pitchFamily="34" charset="-120"/>
               </a:rPr>
-              <a:t>To cover the sky with clouds, making it darker.</a:t>
+              <a:t>A sudden, very heavy shower of rain that happens quickly.</a:t>
             </a:r>
             <a:endParaRPr lang="en-US" sz="1200" dirty="0"/>
           </a:p>
@@ -40286,7 +39977,7 @@
                 <a:ea typeface="Calibri" pitchFamily="34" charset="-122"/>
                 <a:cs typeface="Calibri" pitchFamily="34" charset="-120"/>
               </a:rPr>
-              <a:t>More cloudy than something else — having more clouds.</a:t>
+              <a:t>A large, dark cloud that brings thunder and lightning.</a:t>
             </a:r>
             <a:endParaRPr lang="en-US" sz="1200" dirty="0"/>
           </a:p>
@@ -40359,7 +40050,7 @@
                 <a:ea typeface="Trebuchet MS" pitchFamily="34" charset="-122"/>
                 <a:cs typeface="Trebuchet MS" pitchFamily="34" charset="-120"/>
               </a:rPr>
-              <a:t>overcloud</a:t>
+              <a:t>cloudburst</a:t>
             </a:r>
             <a:endParaRPr lang="en-US" sz="1200" dirty="0"/>
           </a:p>
@@ -40425,7 +40116,7 @@
                 <a:ea typeface="Calibri" pitchFamily="34" charset="-122"/>
                 <a:cs typeface="Calibri" pitchFamily="34" charset="-120"/>
               </a:rPr>
-              <a:t>When the sky has become completely covered with clouds.</a:t>
+              <a:t>When clouds spread across and cover the whole sky.</a:t>
             </a:r>
             <a:endParaRPr lang="en-US" sz="1200" dirty="0"/>
           </a:p>
@@ -40498,7 +40189,7 @@
                 <a:ea typeface="Trebuchet MS" pitchFamily="34" charset="-122"/>
                 <a:cs typeface="Trebuchet MS" pitchFamily="34" charset="-120"/>
               </a:rPr>
-              <a:t>overclouded</a:t>
+              <a:t>overcloud</a:t>
             </a:r>
             <a:endParaRPr lang="en-US" sz="1200" dirty="0"/>
           </a:p>
@@ -40564,7 +40255,7 @@
                 <a:ea typeface="Calibri" pitchFamily="34" charset="-122"/>
                 <a:cs typeface="Calibri" pitchFamily="34" charset="-120"/>
               </a:rPr>
-              <a:t>When the sky is full of clouds and not very sunny.</a:t>
+              <a:t>When the sky is covered with lots of clouds and not much sun can be seen.</a:t>
             </a:r>
             <a:endParaRPr lang="en-US" sz="1200" dirty="0"/>
           </a:p>
@@ -40637,7 +40328,7 @@
                 <a:ea typeface="Trebuchet MS" pitchFamily="34" charset="-122"/>
                 <a:cs typeface="Trebuchet MS" pitchFamily="34" charset="-120"/>
               </a:rPr>
-              <a:t>cloudier</a:t>
+              <a:t>thundercloud</a:t>
             </a:r>
             <a:endParaRPr lang="en-US" sz="1200" dirty="0"/>
           </a:p>
@@ -40703,7 +40394,7 @@
                 <a:ea typeface="Calibri" pitchFamily="34" charset="-122"/>
                 <a:cs typeface="Calibri" pitchFamily="34" charset="-120"/>
               </a:rPr>
-              <a:t>A sky with no clouds at all — completely clear and blue.</a:t>
+              <a:t>A sky with no clouds at all — perfectly clear and blue.</a:t>
             </a:r>
             <a:endParaRPr lang="en-US" sz="1200" dirty="0"/>
           </a:p>
@@ -40776,7 +40467,7 @@
                 <a:ea typeface="Trebuchet MS" pitchFamily="34" charset="-122"/>
                 <a:cs typeface="Trebuchet MS" pitchFamily="34" charset="-120"/>
               </a:rPr>
-              <a:t>cloudiest</a:t>
+              <a:t>raincloud</a:t>
             </a:r>
             <a:endParaRPr lang="en-US" sz="1200" dirty="0"/>
           </a:p>
@@ -40842,7 +40533,7 @@
                 <a:ea typeface="Calibri" pitchFamily="34" charset="-122"/>
                 <a:cs typeface="Calibri" pitchFamily="34" charset="-120"/>
               </a:rPr>
-              <a:t>Covered or hidden by clouds, or made unclear.</a:t>
+              <a:t>When something has become covered or hidden, like a sky filled with clouds.</a:t>
             </a:r>
             <a:endParaRPr lang="en-US" sz="1200" dirty="0"/>
           </a:p>
@@ -41337,7 +41028,7 @@
                 <a:ea typeface="Calibri" pitchFamily="34" charset="-122"/>
                 <a:cs typeface="Calibri" pitchFamily="34" charset="-120"/>
               </a:rPr>
-              <a:t>The sky was so cloudy this morning that we could not see the sun at all.</a:t>
+              <a:t>The sky became very cloudy this afternoon, so we moved our lunch inside.</a:t>
             </a:r>
             <a:endParaRPr lang="en-US" sz="1500" dirty="0"/>
           </a:p>
@@ -41501,7 +41192,7 @@
                 <a:ea typeface="Calibri" pitchFamily="34" charset="-122"/>
                 <a:cs typeface="Calibri" pitchFamily="34" charset="-120"/>
               </a:rPr>
-              <a:t>After the storm, the cloudless sky was a beautiful shade of bright blue.</a:t>
+              <a:t>A huge thundercloud rolled in over the mountains just before the storm began.</a:t>
             </a:r>
             <a:endParaRPr lang="en-US" sz="1500" dirty="0"/>
           </a:p>
@@ -41665,7 +41356,7 @@
                 <a:ea typeface="Calibri" pitchFamily="34" charset="-122"/>
                 <a:cs typeface="Calibri" pitchFamily="34" charset="-120"/>
               </a:rPr>
-              <a:t>The weather forecaster said the hills would be overclouded by afternoon.</a:t>
+              <a:t>After the cloudburst, the streets were covered in puddles.</a:t>
             </a:r>
             <a:endParaRPr lang="en-US" sz="1500" dirty="0"/>
           </a:p>
